--- a/ECS2026/chatbot-tm.pptx
+++ b/ECS2026/chatbot-tm.pptx
@@ -17,9 +17,9 @@
     <p:sldId id="259" r:id="rId8"/>
     <p:sldId id="260" r:id="rId9"/>
     <p:sldId id="261" r:id="rId10"/>
-    <p:sldId id="262" r:id="rId11"/>
-    <p:sldId id="263" r:id="rId12"/>
-    <p:sldId id="264" r:id="rId13"/>
+    <p:sldId id="263" r:id="rId11"/>
+    <p:sldId id="264" r:id="rId12"/>
+    <p:sldId id="262" r:id="rId13"/>
     <p:sldId id="265" r:id="rId14"/>
     <p:sldId id="266" r:id="rId15"/>
     <p:sldId id="267" r:id="rId16"/>
@@ -33,8 +33,8 @@
     <p:sldId id="275" r:id="rId24"/>
     <p:sldId id="276" r:id="rId25"/>
     <p:sldId id="277" r:id="rId26"/>
-    <p:sldId id="315" r:id="rId27"/>
-    <p:sldId id="312" r:id="rId28"/>
+    <p:sldId id="312" r:id="rId27"/>
+    <p:sldId id="315" r:id="rId28"/>
   </p:sldIdLst>
   <p:sldSz cx="12192000" cy="6858000"/>
   <p:notesSz cx="6858000" cy="12192000"/>
@@ -452,7 +452,7 @@
           <a:lstStyle/>
           <a:p>
             <a:r>
-              <a:rPr lang="en-GB" sz="1200" b="0" kern="1200" dirty="0">
+              <a:rPr lang="en-GB" sz="1200" b="1" kern="1200" dirty="0">
                 <a:solidFill>
                   <a:schemeClr val="tx1"/>
                 </a:solidFill>
@@ -461,63 +461,8 @@
                 <a:ea typeface="+mn-ea"/>
                 <a:cs typeface="+mn-cs"/>
               </a:rPr>
-              <a:t>The public copyright disputes around generative AI are useful here because they show a concrete technical pattern: parties allege that protected training content can influence generated outputs.</a:t>
-            </a:r>
-          </a:p>
-          <a:p>
-            <a:r>
-              <a:rPr lang="en-GB" sz="1200" b="0" kern="1200" dirty="0">
-                <a:solidFill>
-                  <a:schemeClr val="tx1"/>
-                </a:solidFill>
-                <a:effectLst/>
-                <a:latin typeface="+mn-lt"/>
-                <a:ea typeface="+mn-ea"/>
-                <a:cs typeface="+mn-cs"/>
-              </a:rPr>
-              <a:t>Content creators, publishers, and rights holders have argued that models were trained on protected works and can sometimes produce outputs that are too close to those works. The legal questions are separate from our security question, but the technical concern overlaps: if a model can reproduce or closely summarize protected training content, what else could it reproduce?</a:t>
-            </a:r>
-          </a:p>
-          <a:p>
-            <a:r>
-              <a:rPr lang="en-GB" sz="1200" b="0" kern="1200" dirty="0">
-                <a:solidFill>
-                  <a:schemeClr val="tx1"/>
-                </a:solidFill>
-                <a:effectLst/>
-                <a:latin typeface="+mn-lt"/>
-                <a:ea typeface="+mn-ea"/>
-                <a:cs typeface="+mn-cs"/>
-              </a:rPr>
-              <a:t>In a business context, replace copyrighted articles with internal playbooks, support transcripts, source code, executive notes, regulated records, or customer-specific examples.</a:t>
-            </a:r>
-          </a:p>
-          <a:p>
-            <a:r>
-              <a:rPr lang="en-GB" sz="1200" b="0" kern="1200" dirty="0">
-                <a:solidFill>
-                  <a:schemeClr val="tx1"/>
-                </a:solidFill>
-                <a:effectLst/>
-                <a:latin typeface="+mn-lt"/>
-                <a:ea typeface="+mn-ea"/>
-                <a:cs typeface="+mn-cs"/>
-              </a:rPr>
-              <a:t>The point is not to litigate the copyright cases. The point is to use them as a public signal that training data can affect outputs in ways organizations need to evaluate, monitor, and constrain.</a:t>
-            </a:r>
-          </a:p>
-          <a:p>
-            <a:br>
-              <a:rPr lang="en-GB" sz="1200" b="0" kern="1200" dirty="0">
-                <a:solidFill>
-                  <a:schemeClr val="tx1"/>
-                </a:solidFill>
-                <a:effectLst/>
-                <a:latin typeface="+mn-lt"/>
-                <a:ea typeface="+mn-ea"/>
-                <a:cs typeface="+mn-cs"/>
-              </a:rPr>
-            </a:br>
+              <a:t>### Narrative</a:t>
+            </a:r>
             <a:endParaRPr lang="en-GB" sz="1200" b="0" kern="1200" dirty="0">
               <a:solidFill>
                 <a:schemeClr val="tx1"/>
@@ -530,7 +475,7 @@
           </a:p>
           <a:p>
             <a:r>
-              <a:rPr lang="en-GB" sz="1200" b="1" kern="1200" dirty="0">
+              <a:rPr lang="en-GB" sz="1200" b="0" kern="1200" dirty="0">
                 <a:solidFill>
                   <a:schemeClr val="tx1"/>
                 </a:solidFill>
@@ -539,8 +484,100 @@
                 <a:ea typeface="+mn-ea"/>
                 <a:cs typeface="+mn-cs"/>
               </a:rPr>
-              <a:t>### Key Message</a:t>
-            </a:r>
+              <a:t>That product pressure turns a model-quality choice into a data-placement choice. When a team trains or fine-tunes on internal data, they are not only improving model </a:t>
+            </a:r>
+            <a:r>
+              <a:rPr lang="en-GB" sz="1200" b="0" kern="1200" dirty="0" err="1">
+                <a:solidFill>
+                  <a:schemeClr val="tx1"/>
+                </a:solidFill>
+                <a:effectLst/>
+                <a:latin typeface="+mn-lt"/>
+                <a:ea typeface="+mn-ea"/>
+                <a:cs typeface="+mn-cs"/>
+              </a:rPr>
+              <a:t>behavior</a:t>
+            </a:r>
+            <a:r>
+              <a:rPr lang="en-GB" sz="1200" b="0" kern="1200" dirty="0">
+                <a:solidFill>
+                  <a:schemeClr val="tx1"/>
+                </a:solidFill>
+                <a:effectLst/>
+                <a:latin typeface="+mn-lt"/>
+                <a:ea typeface="+mn-ea"/>
+                <a:cs typeface="+mn-cs"/>
+              </a:rPr>
+              <a:t>. They are deciding which data may influence model weights or adapter weights.</a:t>
+            </a:r>
+          </a:p>
+          <a:p>
+            <a:r>
+              <a:rPr lang="en-GB" sz="1200" b="0" kern="1200" dirty="0">
+                <a:solidFill>
+                  <a:schemeClr val="tx1"/>
+                </a:solidFill>
+                <a:effectLst/>
+                <a:latin typeface="+mn-lt"/>
+                <a:ea typeface="+mn-ea"/>
+                <a:cs typeface="+mn-cs"/>
+              </a:rPr>
+              <a:t>Some of that data may be harmless: public FAQs, approved product descriptions, high-level policy summaries. Some of it may be sensitive: support transcripts, customer records, internal escalation notes, exception procedures, billing disputes, or regulated health-adjacent information.</a:t>
+            </a:r>
+          </a:p>
+          <a:p>
+            <a:r>
+              <a:rPr lang="en-GB" sz="1200" b="0" kern="1200" dirty="0">
+                <a:solidFill>
+                  <a:schemeClr val="tx1"/>
+                </a:solidFill>
+                <a:effectLst/>
+                <a:latin typeface="+mn-lt"/>
+                <a:ea typeface="+mn-ea"/>
+                <a:cs typeface="+mn-cs"/>
+              </a:rPr>
+              <a:t>Even if the model does not store documents like a database, training can still influence </a:t>
+            </a:r>
+            <a:r>
+              <a:rPr lang="en-GB" sz="1200" b="0" kern="1200" dirty="0" err="1">
+                <a:solidFill>
+                  <a:schemeClr val="tx1"/>
+                </a:solidFill>
+                <a:effectLst/>
+                <a:latin typeface="+mn-lt"/>
+                <a:ea typeface="+mn-ea"/>
+                <a:cs typeface="+mn-cs"/>
+              </a:rPr>
+              <a:t>behavior</a:t>
+            </a:r>
+            <a:r>
+              <a:rPr lang="en-GB" sz="1200" b="0" kern="1200" dirty="0">
+                <a:solidFill>
+                  <a:schemeClr val="tx1"/>
+                </a:solidFill>
+                <a:effectLst/>
+                <a:latin typeface="+mn-lt"/>
+                <a:ea typeface="+mn-ea"/>
+                <a:cs typeface="+mn-cs"/>
+              </a:rPr>
+              <a:t> in ways that preserve rare phrases, examples, names, identifiers, or unusual facts. The risk is higher when data is unique, repeated, overrepresented, or present in a small fine-tuning set.</a:t>
+            </a:r>
+          </a:p>
+          <a:p>
+            <a:r>
+              <a:rPr lang="en-GB" sz="1200" b="0" kern="1200" dirty="0">
+                <a:solidFill>
+                  <a:schemeClr val="tx1"/>
+                </a:solidFill>
+                <a:effectLst/>
+                <a:latin typeface="+mn-lt"/>
+                <a:ea typeface="+mn-ea"/>
+                <a:cs typeface="+mn-cs"/>
+              </a:rPr>
+              <a:t>The security problem is that the model becomes a fuzzy, hard-to-query, hard-to-delete storage layer. You cannot apply normal database access controls to model weights. If the organization needs record-level authorization, deletion, audit, legal hold, or tenant isolation, model weights are usually the wrong storage location.</a:t>
+            </a:r>
+          </a:p>
+          <a:p>
             <a:endParaRPr lang="en-GB" sz="1200" b="0" kern="1200" dirty="0">
               <a:solidFill>
                 <a:schemeClr val="tx1"/>
@@ -553,7 +590,7 @@
           </a:p>
           <a:p>
             <a:r>
-              <a:rPr lang="en-GB" sz="1200" b="0" kern="1200" dirty="0">
+              <a:rPr lang="en-GB" sz="1200" b="1" kern="1200" dirty="0">
                 <a:solidFill>
                   <a:schemeClr val="tx1"/>
                 </a:solidFill>
@@ -562,7 +599,54 @@
                 <a:ea typeface="+mn-ea"/>
                 <a:cs typeface="+mn-cs"/>
               </a:rPr>
-              <a:t>If public content can become a regurgitation dispute, private business content can become an exposure incident or compliance finding.</a:t>
+              <a:t>### Key Message</a:t>
+            </a:r>
+            <a:endParaRPr lang="en-GB" sz="1200" b="0" kern="1200" dirty="0">
+              <a:solidFill>
+                <a:schemeClr val="tx1"/>
+              </a:solidFill>
+              <a:effectLst/>
+              <a:latin typeface="+mn-lt"/>
+              <a:ea typeface="+mn-ea"/>
+              <a:cs typeface="+mn-cs"/>
+            </a:endParaRPr>
+          </a:p>
+          <a:p>
+            <a:r>
+              <a:rPr lang="en-GB" sz="1200" b="0" kern="1200" dirty="0">
+                <a:solidFill>
+                  <a:schemeClr val="tx1"/>
+                </a:solidFill>
+                <a:effectLst/>
+                <a:latin typeface="+mn-lt"/>
+                <a:ea typeface="+mn-ea"/>
+                <a:cs typeface="+mn-cs"/>
+              </a:rPr>
+              <a:t>Training on internal data can turn model </a:t>
+            </a:r>
+            <a:r>
+              <a:rPr lang="en-GB" sz="1200" b="0" kern="1200" dirty="0" err="1">
+                <a:solidFill>
+                  <a:schemeClr val="tx1"/>
+                </a:solidFill>
+                <a:effectLst/>
+                <a:latin typeface="+mn-lt"/>
+                <a:ea typeface="+mn-ea"/>
+                <a:cs typeface="+mn-cs"/>
+              </a:rPr>
+              <a:t>behavior</a:t>
+            </a:r>
+            <a:r>
+              <a:rPr lang="en-GB" sz="1200" b="0" kern="1200" dirty="0">
+                <a:solidFill>
+                  <a:schemeClr val="tx1"/>
+                </a:solidFill>
+                <a:effectLst/>
+                <a:latin typeface="+mn-lt"/>
+                <a:ea typeface="+mn-ea"/>
+                <a:cs typeface="+mn-cs"/>
+              </a:rPr>
+              <a:t> into a sensitive-data artifact that needs lineage, approval, evaluation, and release controls.</a:t>
             </a:r>
           </a:p>
           <a:p>
@@ -3873,183 +3957,6 @@
           <a:bodyPr/>
           <a:lstStyle/>
           <a:p>
-            <a:r>
-              <a:rPr lang="en-GB" sz="1200" b="1" kern="1200" dirty="0">
-                <a:solidFill>
-                  <a:schemeClr val="tx1"/>
-                </a:solidFill>
-                <a:effectLst/>
-                <a:latin typeface="+mn-lt"/>
-                <a:ea typeface="+mn-ea"/>
-                <a:cs typeface="+mn-cs"/>
-              </a:rPr>
-              <a:t>### Narrative</a:t>
-            </a:r>
-            <a:endParaRPr lang="en-GB" sz="1200" b="0" kern="1200" dirty="0">
-              <a:solidFill>
-                <a:schemeClr val="tx1"/>
-              </a:solidFill>
-              <a:effectLst/>
-              <a:latin typeface="+mn-lt"/>
-              <a:ea typeface="+mn-ea"/>
-              <a:cs typeface="+mn-cs"/>
-            </a:endParaRPr>
-          </a:p>
-          <a:p>
-            <a:r>
-              <a:rPr lang="en-GB" sz="1200" b="0" kern="1200" dirty="0">
-                <a:solidFill>
-                  <a:schemeClr val="tx1"/>
-                </a:solidFill>
-                <a:effectLst/>
-                <a:latin typeface="+mn-lt"/>
-                <a:ea typeface="+mn-ea"/>
-                <a:cs typeface="+mn-cs"/>
-              </a:rPr>
-              <a:t>The full story is not that chatbots are unsafe. The story is that every useful chatbot architecture moves sensitive data somewhere new, lets new content influence the model, or gives the bot a new capability.</a:t>
-            </a:r>
-          </a:p>
-          <a:p>
-            <a:r>
-              <a:rPr lang="en-GB" sz="1200" b="0" kern="1200" dirty="0">
-                <a:solidFill>
-                  <a:schemeClr val="tx1"/>
-                </a:solidFill>
-                <a:effectLst/>
-                <a:latin typeface="+mn-lt"/>
-                <a:ea typeface="+mn-ea"/>
-                <a:cs typeface="+mn-cs"/>
-              </a:rPr>
-              <a:t>In Stage 1, the risk was sensitive data in prompts, responses, logs, and any training or fine-tuning data. The control was data minimization, training data governance, redaction, memorization testing, and release approval.</a:t>
-            </a:r>
-          </a:p>
-          <a:p>
-            <a:r>
-              <a:rPr lang="en-GB" sz="1200" b="0" kern="1200" dirty="0">
-                <a:solidFill>
-                  <a:schemeClr val="tx1"/>
-                </a:solidFill>
-                <a:effectLst/>
-                <a:latin typeface="+mn-lt"/>
-                <a:ea typeface="+mn-ea"/>
-                <a:cs typeface="+mn-cs"/>
-              </a:rPr>
-              <a:t>In Stage 2, the risk moved into retrieval. The control was source classification, ACL-preserving ingestion, permission-aware retrieval, bounded prompt context, untrusted-content handling, and traceability.</a:t>
-            </a:r>
-          </a:p>
-          <a:p>
-            <a:r>
-              <a:rPr lang="en-GB" sz="1200" b="0" kern="1200" dirty="0">
-                <a:solidFill>
-                  <a:schemeClr val="tx1"/>
-                </a:solidFill>
-                <a:effectLst/>
-                <a:latin typeface="+mn-lt"/>
-                <a:ea typeface="+mn-ea"/>
-                <a:cs typeface="+mn-cs"/>
-              </a:rPr>
-              <a:t>In Stage 3, the bot gained tools, memory, state, and action. The control became least-privilege tooling, deterministic authorization outside the model, semantic argument validation, confirmation for high-risk changes, memory governance, and action-level monitoring.</a:t>
-            </a:r>
-          </a:p>
-          <a:p>
-            <a:r>
-              <a:rPr lang="en-GB" sz="1200" b="0" kern="1200" dirty="0">
-                <a:solidFill>
-                  <a:schemeClr val="tx1"/>
-                </a:solidFill>
-                <a:effectLst/>
-                <a:latin typeface="+mn-lt"/>
-                <a:ea typeface="+mn-ea"/>
-                <a:cs typeface="+mn-cs"/>
-              </a:rPr>
-              <a:t>The practical lesson is to stop treating chatbot security as one prompt-hardening exercise. Prompts matter, but they are not the architecture. The real control points are where data is stored, how it enters context, who can influence instructions, and what the bot is allowed to do.</a:t>
-            </a:r>
-          </a:p>
-          <a:p>
-            <a:r>
-              <a:rPr lang="en-GB" sz="1200" b="0" kern="1200" dirty="0">
-                <a:solidFill>
-                  <a:schemeClr val="tx1"/>
-                </a:solidFill>
-                <a:effectLst/>
-                <a:latin typeface="+mn-lt"/>
-                <a:ea typeface="+mn-ea"/>
-                <a:cs typeface="+mn-cs"/>
-              </a:rPr>
-              <a:t>If you remember one thing, remember the repeated question from the beginning: when the chatbot becomes more useful, what changed in the threat model?</a:t>
-            </a:r>
-          </a:p>
-          <a:p>
-            <a:endParaRPr lang="en-GB" sz="1200" b="0" kern="1200" dirty="0">
-              <a:solidFill>
-                <a:schemeClr val="tx1"/>
-              </a:solidFill>
-              <a:effectLst/>
-              <a:latin typeface="+mn-lt"/>
-              <a:ea typeface="+mn-ea"/>
-              <a:cs typeface="+mn-cs"/>
-            </a:endParaRPr>
-          </a:p>
-          <a:p>
-            <a:r>
-              <a:rPr lang="en-GB" sz="1200" b="1" kern="1200" dirty="0">
-                <a:solidFill>
-                  <a:schemeClr val="tx1"/>
-                </a:solidFill>
-                <a:effectLst/>
-                <a:latin typeface="+mn-lt"/>
-                <a:ea typeface="+mn-ea"/>
-                <a:cs typeface="+mn-cs"/>
-              </a:rPr>
-              <a:t>### Key Message</a:t>
-            </a:r>
-            <a:endParaRPr lang="en-GB" sz="1200" b="0" kern="1200" dirty="0">
-              <a:solidFill>
-                <a:schemeClr val="tx1"/>
-              </a:solidFill>
-              <a:effectLst/>
-              <a:latin typeface="+mn-lt"/>
-              <a:ea typeface="+mn-ea"/>
-              <a:cs typeface="+mn-cs"/>
-            </a:endParaRPr>
-          </a:p>
-          <a:p>
-            <a:r>
-              <a:rPr lang="en-GB" sz="1200" b="0" kern="1200" dirty="0">
-                <a:solidFill>
-                  <a:schemeClr val="tx1"/>
-                </a:solidFill>
-                <a:effectLst/>
-                <a:latin typeface="+mn-lt"/>
-                <a:ea typeface="+mn-ea"/>
-                <a:cs typeface="+mn-cs"/>
-              </a:rPr>
-              <a:t>Each new capability needs a matching security control.</a:t>
-            </a:r>
-          </a:p>
-          <a:p>
-            <a:br>
-              <a:rPr lang="en-GB" sz="1200" b="0" kern="1200" dirty="0">
-                <a:solidFill>
-                  <a:schemeClr val="tx1"/>
-                </a:solidFill>
-                <a:effectLst/>
-                <a:latin typeface="+mn-lt"/>
-                <a:ea typeface="+mn-ea"/>
-                <a:cs typeface="+mn-cs"/>
-              </a:rPr>
-            </a:br>
-            <a:endParaRPr lang="en-GB" sz="1200" b="0" kern="1200" dirty="0">
-              <a:solidFill>
-                <a:schemeClr val="tx1"/>
-              </a:solidFill>
-              <a:effectLst/>
-              <a:latin typeface="+mn-lt"/>
-              <a:ea typeface="+mn-ea"/>
-              <a:cs typeface="+mn-cs"/>
-            </a:endParaRPr>
-          </a:p>
-          <a:p>
             <a:endParaRPr lang="en-US" dirty="0"/>
           </a:p>
         </p:txBody>
@@ -4075,11 +3982,71 @@
           <a:bodyPr/>
           <a:lstStyle/>
           <a:p>
+            <a:pPr marL="0" marR="0" lvl="0" indent="0" algn="l" defTabSz="914400" rtl="0" eaLnBrk="1" fontAlgn="auto" latinLnBrk="0" hangingPunct="1">
+              <a:lnSpc>
+                <a:spcPct val="100000"/>
+              </a:lnSpc>
+              <a:spcBef>
+                <a:spcPts val="0"/>
+              </a:spcBef>
+              <a:spcAft>
+                <a:spcPts val="0"/>
+              </a:spcAft>
+              <a:buClrTx/>
+              <a:buSzTx/>
+              <a:buFontTx/>
+              <a:buNone/>
+              <a:tabLst/>
+              <a:defRPr/>
+            </a:pPr>
             <a:fld id="{F7021451-1387-4CA6-816F-3879F97B5CBC}" type="slidenum">
-              <a:rPr lang="en-US"/>
-              <a:t>25</a:t>
+              <a:rPr kumimoji="0" lang="en-US" sz="1800" b="0" i="0" u="none" strike="noStrike" kern="1200" cap="none" spc="0" normalizeH="0" baseline="0" noProof="0">
+                <a:ln>
+                  <a:noFill/>
+                </a:ln>
+                <a:solidFill>
+                  <a:prstClr val="black"/>
+                </a:solidFill>
+                <a:effectLst/>
+                <a:uLnTx/>
+                <a:uFillTx/>
+                <a:latin typeface="Aptos" panose="02110004020202020204"/>
+                <a:ea typeface="+mn-ea"/>
+                <a:cs typeface="+mn-cs"/>
+              </a:rPr>
+              <a:pPr marL="0" marR="0" lvl="0" indent="0" algn="l" defTabSz="914400" rtl="0" eaLnBrk="1" fontAlgn="auto" latinLnBrk="0" hangingPunct="1">
+                <a:lnSpc>
+                  <a:spcPct val="100000"/>
+                </a:lnSpc>
+                <a:spcBef>
+                  <a:spcPts val="0"/>
+                </a:spcBef>
+                <a:spcAft>
+                  <a:spcPts val="0"/>
+                </a:spcAft>
+                <a:buClrTx/>
+                <a:buSzTx/>
+                <a:buFontTx/>
+                <a:buNone/>
+                <a:tabLst/>
+                <a:defRPr/>
+              </a:pPr>
+              <a:t>26</a:t>
             </a:fld>
-            <a:endParaRPr lang="en-US"/>
+            <a:endParaRPr kumimoji="0" lang="en-US" sz="1800" b="0" i="0" u="none" strike="noStrike" kern="1200" cap="none" spc="0" normalizeH="0" baseline="0" noProof="0">
+              <a:ln>
+                <a:noFill/>
+              </a:ln>
+              <a:solidFill>
+                <a:prstClr val="black"/>
+              </a:solidFill>
+              <a:effectLst/>
+              <a:uLnTx/>
+              <a:uFillTx/>
+              <a:latin typeface="Aptos" panose="02110004020202020204"/>
+              <a:ea typeface="+mn-ea"/>
+              <a:cs typeface="+mn-cs"/>
+            </a:endParaRPr>
           </a:p>
         </p:txBody>
       </p:sp>
@@ -5355,10 +5322,12 @@
                 <a:ea typeface="+mn-ea"/>
                 <a:cs typeface="+mn-cs"/>
               </a:rPr>
-              <a:t>That product pressure turns a model-quality choice into a data-placement choice. When a team trains or fine-tunes on internal data, they are not only improving model </a:t>
-            </a:r>
-            <a:r>
-              <a:rPr lang="en-GB" sz="1200" b="0" kern="1200" dirty="0" err="1">
+              <a:t>The important defensive question is not whether a model contains a perfect copy of every training document. It usually does not.</a:t>
+            </a:r>
+          </a:p>
+          <a:p>
+            <a:r>
+              <a:rPr lang="en-GB" sz="1200" b="0" kern="1200" dirty="0">
                 <a:solidFill>
                   <a:schemeClr val="tx1"/>
                 </a:solidFill>
@@ -5367,8 +5336,10 @@
                 <a:ea typeface="+mn-ea"/>
                 <a:cs typeface="+mn-cs"/>
               </a:rPr>
-              <a:t>behavior</a:t>
-            </a:r>
+              <a:t>The question is whether sensitive fragments, rare strings, private examples, or protected content can be recovered under some conditions. Research on extractable memorization and public disputes suggest the answer can be yes.</a:t>
+            </a:r>
+          </a:p>
+          <a:p>
             <a:r>
               <a:rPr lang="en-GB" sz="1200" b="0" kern="1200" dirty="0">
                 <a:solidFill>
@@ -5379,7 +5350,7 @@
                 <a:ea typeface="+mn-ea"/>
                 <a:cs typeface="+mn-cs"/>
               </a:rPr>
-              <a:t>. They are deciding which data may influence model weights or adapter weights.</a:t>
+              <a:t>Models can sometimes memorize and regurgitate. Repeated prompting, unusual prefixes, prompt patterns, or targeted queries can sometimes produce content that looks very close to training data. Fine-tuned models can be especially concerning when datasets are small, repetitive, or contain rare sensitive values.</a:t>
             </a:r>
           </a:p>
           <a:p>
@@ -5393,7 +5364,7 @@
                 <a:ea typeface="+mn-ea"/>
                 <a:cs typeface="+mn-cs"/>
               </a:rPr>
-              <a:t>Some of that data may be harmless: public FAQs, approved product descriptions, high-level policy summaries. Some of it may be sensitive: support transcripts, customer records, internal escalation notes, exception procedures, billing disputes, or regulated health-adjacent information.</a:t>
+              <a:t>For defenders, the lesson is practical: if you would not paste the data into a public support chat, be cautious about putting it into training or fine-tuning data.</a:t>
             </a:r>
           </a:p>
           <a:p>
@@ -5407,45 +5378,7 @@
                 <a:ea typeface="+mn-ea"/>
                 <a:cs typeface="+mn-cs"/>
               </a:rPr>
-              <a:t>Even if the model does not store documents like a database, training can still influence </a:t>
-            </a:r>
-            <a:r>
-              <a:rPr lang="en-GB" sz="1200" b="0" kern="1200" dirty="0" err="1">
-                <a:solidFill>
-                  <a:schemeClr val="tx1"/>
-                </a:solidFill>
-                <a:effectLst/>
-                <a:latin typeface="+mn-lt"/>
-                <a:ea typeface="+mn-ea"/>
-                <a:cs typeface="+mn-cs"/>
-              </a:rPr>
-              <a:t>behavior</a:t>
-            </a:r>
-            <a:r>
-              <a:rPr lang="en-GB" sz="1200" b="0" kern="1200" dirty="0">
-                <a:solidFill>
-                  <a:schemeClr val="tx1"/>
-                </a:solidFill>
-                <a:effectLst/>
-                <a:latin typeface="+mn-lt"/>
-                <a:ea typeface="+mn-ea"/>
-                <a:cs typeface="+mn-cs"/>
-              </a:rPr>
-              <a:t> in ways that preserve rare phrases, examples, names, identifiers, or unusual facts. The risk is higher when data is unique, repeated, overrepresented, or present in a small fine-tuning set.</a:t>
-            </a:r>
-          </a:p>
-          <a:p>
-            <a:r>
-              <a:rPr lang="en-GB" sz="1200" b="0" kern="1200" dirty="0">
-                <a:solidFill>
-                  <a:schemeClr val="tx1"/>
-                </a:solidFill>
-                <a:effectLst/>
-                <a:latin typeface="+mn-lt"/>
-                <a:ea typeface="+mn-ea"/>
-                <a:cs typeface="+mn-cs"/>
-              </a:rPr>
-              <a:t>The security problem is that the model becomes a fuzzy, hard-to-query, hard-to-delete storage layer. You cannot apply normal database access controls to model weights. If the organization needs record-level authorization, deletion, audit, legal hold, or tenant isolation, model weights are usually the wrong storage location.</a:t>
+              <a:t>Several technique categories are worth naming because they map to tests defenders can build into an evaluation harness:</a:t>
             </a:r>
           </a:p>
           <a:p>
@@ -5461,7 +5394,7 @@
           </a:p>
           <a:p>
             <a:r>
-              <a:rPr lang="en-GB" sz="1200" b="1" kern="1200" dirty="0">
+              <a:rPr lang="en-GB" sz="1200" b="0" kern="1200" dirty="0">
                 <a:solidFill>
                   <a:schemeClr val="tx1"/>
                 </a:solidFill>
@@ -5470,8 +5403,129 @@
                 <a:ea typeface="+mn-ea"/>
                 <a:cs typeface="+mn-cs"/>
               </a:rPr>
-              <a:t>### Key Message</a:t>
-            </a:r>
+              <a:t>- Prompt repetition and continuation attacks: prompts that try to make the model continue, repeat, or complete memorized text patterns.</a:t>
+            </a:r>
+          </a:p>
+          <a:p>
+            <a:r>
+              <a:rPr lang="en-GB" sz="1200" b="0" kern="1200" dirty="0">
+                <a:solidFill>
+                  <a:schemeClr val="tx1"/>
+                </a:solidFill>
+                <a:effectLst/>
+                <a:latin typeface="+mn-lt"/>
+                <a:ea typeface="+mn-ea"/>
+                <a:cs typeface="+mn-cs"/>
+              </a:rPr>
+              <a:t>- Rare-string or canary extraction: testing whether unique tokens, identifiers, synthetic secrets, or unusual phrases from training data can be reproduced.</a:t>
+            </a:r>
+          </a:p>
+          <a:p>
+            <a:r>
+              <a:rPr lang="en-GB" sz="1200" b="0" kern="1200" dirty="0">
+                <a:solidFill>
+                  <a:schemeClr val="tx1"/>
+                </a:solidFill>
+                <a:effectLst/>
+                <a:latin typeface="+mn-lt"/>
+                <a:ea typeface="+mn-ea"/>
+                <a:cs typeface="+mn-cs"/>
+              </a:rPr>
+              <a:t>- Membership inference: trying to determine whether a specific record, document, or phrase was part of the training set.</a:t>
+            </a:r>
+          </a:p>
+          <a:p>
+            <a:r>
+              <a:rPr lang="en-GB" sz="1200" b="0" kern="1200" dirty="0">
+                <a:solidFill>
+                  <a:schemeClr val="tx1"/>
+                </a:solidFill>
+                <a:effectLst/>
+                <a:latin typeface="+mn-lt"/>
+                <a:ea typeface="+mn-ea"/>
+                <a:cs typeface="+mn-cs"/>
+              </a:rPr>
+              <a:t>- Model inversion and reconstruction: broader ML privacy attacks that attempt to infer sensitive attributes or reconstruct representative training examples from model </a:t>
+            </a:r>
+            <a:r>
+              <a:rPr lang="en-GB" sz="1200" b="0" kern="1200" dirty="0" err="1">
+                <a:solidFill>
+                  <a:schemeClr val="tx1"/>
+                </a:solidFill>
+                <a:effectLst/>
+                <a:latin typeface="+mn-lt"/>
+                <a:ea typeface="+mn-ea"/>
+                <a:cs typeface="+mn-cs"/>
+              </a:rPr>
+              <a:t>behavior</a:t>
+            </a:r>
+            <a:r>
+              <a:rPr lang="en-GB" sz="1200" b="0" kern="1200" dirty="0">
+                <a:solidFill>
+                  <a:schemeClr val="tx1"/>
+                </a:solidFill>
+                <a:effectLst/>
+                <a:latin typeface="+mn-lt"/>
+                <a:ea typeface="+mn-ea"/>
+                <a:cs typeface="+mn-cs"/>
+              </a:rPr>
+              <a:t>.</a:t>
+            </a:r>
+          </a:p>
+          <a:p>
+            <a:r>
+              <a:rPr lang="en-GB" sz="1200" b="0" kern="1200" dirty="0">
+                <a:solidFill>
+                  <a:schemeClr val="tx1"/>
+                </a:solidFill>
+                <a:effectLst/>
+                <a:latin typeface="+mn-lt"/>
+                <a:ea typeface="+mn-ea"/>
+                <a:cs typeface="+mn-cs"/>
+              </a:rPr>
+              <a:t>- Targeted data extraction: querying around known prefixes, formats, names, IDs, or document structures to recover nearby memorized content.</a:t>
+            </a:r>
+          </a:p>
+          <a:p>
+            <a:r>
+              <a:rPr lang="en-GB" sz="1200" b="0" kern="1200" dirty="0">
+                <a:solidFill>
+                  <a:schemeClr val="tx1"/>
+                </a:solidFill>
+                <a:effectLst/>
+                <a:latin typeface="+mn-lt"/>
+                <a:ea typeface="+mn-ea"/>
+                <a:cs typeface="+mn-cs"/>
+              </a:rPr>
+              <a:t>- Fine-tune leakage testing: checking whether a smaller fine-tuned dataset made private examples easier to reproduce.</a:t>
+            </a:r>
+          </a:p>
+          <a:p>
+            <a:r>
+              <a:rPr lang="en-GB" sz="1200" b="0" kern="1200" dirty="0">
+                <a:solidFill>
+                  <a:schemeClr val="tx1"/>
+                </a:solidFill>
+                <a:effectLst/>
+                <a:latin typeface="+mn-lt"/>
+                <a:ea typeface="+mn-ea"/>
+                <a:cs typeface="+mn-cs"/>
+              </a:rPr>
+              <a:t>- Shadow-model analysis: training or comparing against auxiliary models to estimate what kinds of records are likely to leak.</a:t>
+            </a:r>
+          </a:p>
+          <a:p>
+            <a:br>
+              <a:rPr lang="en-GB" sz="1200" b="0" kern="1200" dirty="0">
+                <a:solidFill>
+                  <a:schemeClr val="tx1"/>
+                </a:solidFill>
+                <a:effectLst/>
+                <a:latin typeface="+mn-lt"/>
+                <a:ea typeface="+mn-ea"/>
+                <a:cs typeface="+mn-cs"/>
+              </a:rPr>
+            </a:br>
             <a:endParaRPr lang="en-GB" sz="1200" b="0" kern="1200" dirty="0">
               <a:solidFill>
                 <a:schemeClr val="tx1"/>
@@ -5493,10 +5547,12 @@
                 <a:ea typeface="+mn-ea"/>
                 <a:cs typeface="+mn-cs"/>
               </a:rPr>
-              <a:t>Training on internal data can turn model </a:t>
-            </a:r>
-            <a:r>
-              <a:rPr lang="en-GB" sz="1200" b="0" kern="1200" dirty="0" err="1">
+              <a:t>The talk should keep exploit mechanics at the concept level. The useful engineering takeaway is what to evaluate before release and after model updates.</a:t>
+            </a:r>
+          </a:p>
+          <a:p>
+            <a:br>
+              <a:rPr lang="en-GB" sz="1200" b="0" kern="1200" dirty="0">
                 <a:solidFill>
                   <a:schemeClr val="tx1"/>
                 </a:solidFill>
@@ -5505,10 +5561,9 @@
                 <a:ea typeface="+mn-ea"/>
                 <a:cs typeface="+mn-cs"/>
               </a:rPr>
-              <a:t>behavior</a:t>
-            </a:r>
-            <a:r>
-              <a:rPr lang="en-GB" sz="1200" b="0" kern="1200" dirty="0">
+            </a:br>
+            <a:r>
+              <a:rPr lang="en-GB" sz="1200" b="1" kern="1200" dirty="0">
                 <a:solidFill>
                   <a:schemeClr val="tx1"/>
                 </a:solidFill>
@@ -5517,8 +5572,53 @@
                 <a:ea typeface="+mn-ea"/>
                 <a:cs typeface="+mn-cs"/>
               </a:rPr>
-              <a:t> into a sensitive-data artifact that needs lineage, approval, evaluation, and release controls.</a:t>
-            </a:r>
+              <a:t>### Key Message</a:t>
+            </a:r>
+            <a:endParaRPr lang="en-GB" sz="1200" b="0" kern="1200" dirty="0">
+              <a:solidFill>
+                <a:schemeClr val="tx1"/>
+              </a:solidFill>
+              <a:effectLst/>
+              <a:latin typeface="+mn-lt"/>
+              <a:ea typeface="+mn-ea"/>
+              <a:cs typeface="+mn-cs"/>
+            </a:endParaRPr>
+          </a:p>
+          <a:p>
+            <a:r>
+              <a:rPr lang="en-GB" sz="1200" b="0" kern="1200" dirty="0">
+                <a:solidFill>
+                  <a:schemeClr val="tx1"/>
+                </a:solidFill>
+                <a:effectLst/>
+                <a:latin typeface="+mn-lt"/>
+                <a:ea typeface="+mn-ea"/>
+                <a:cs typeface="+mn-cs"/>
+              </a:rPr>
+              <a:t>The risk is not that every training record is recoverable. The risk is that rare or sensitive fragments may be recoverable, and teams need a repeatable way to test for that before release.</a:t>
+            </a:r>
+          </a:p>
+          <a:p>
+            <a:br>
+              <a:rPr lang="en-GB" sz="1200" b="0" kern="1200" dirty="0">
+                <a:solidFill>
+                  <a:schemeClr val="tx1"/>
+                </a:solidFill>
+                <a:effectLst/>
+                <a:latin typeface="+mn-lt"/>
+                <a:ea typeface="+mn-ea"/>
+                <a:cs typeface="+mn-cs"/>
+              </a:rPr>
+            </a:br>
+            <a:endParaRPr lang="en-GB" sz="1200" b="0" kern="1200" dirty="0">
+              <a:solidFill>
+                <a:schemeClr val="tx1"/>
+              </a:solidFill>
+              <a:effectLst/>
+              <a:latin typeface="+mn-lt"/>
+              <a:ea typeface="+mn-ea"/>
+              <a:cs typeface="+mn-cs"/>
+            </a:endParaRPr>
           </a:p>
           <a:p>
             <a:endParaRPr lang="en-US" dirty="0"/>
@@ -5606,7 +5706,7 @@
           <a:lstStyle/>
           <a:p>
             <a:r>
-              <a:rPr lang="en-GB" sz="1200" b="1" kern="1200" dirty="0">
+              <a:rPr lang="en-GB" sz="1200" b="0" kern="1200" dirty="0">
                 <a:solidFill>
                   <a:schemeClr val="tx1"/>
                 </a:solidFill>
@@ -5615,17 +5715,8 @@
                 <a:ea typeface="+mn-ea"/>
                 <a:cs typeface="+mn-cs"/>
               </a:rPr>
-              <a:t>### Narrative</a:t>
-            </a:r>
-            <a:endParaRPr lang="en-GB" sz="1200" b="0" kern="1200" dirty="0">
-              <a:solidFill>
-                <a:schemeClr val="tx1"/>
-              </a:solidFill>
-              <a:effectLst/>
-              <a:latin typeface="+mn-lt"/>
-              <a:ea typeface="+mn-ea"/>
-              <a:cs typeface="+mn-cs"/>
-            </a:endParaRPr>
+              <a:t>The public copyright disputes around generative AI are useful here because they show a concrete technical pattern: parties allege that protected training content can influence generated outputs.</a:t>
+            </a:r>
           </a:p>
           <a:p>
             <a:r>
@@ -5638,7 +5729,7 @@
                 <a:ea typeface="+mn-ea"/>
                 <a:cs typeface="+mn-cs"/>
               </a:rPr>
-              <a:t>The important defensive question is not whether a model contains a perfect copy of every training document. It usually does not.</a:t>
+              <a:t>Content creators, publishers, and rights holders have argued that models were trained on protected works and can sometimes produce outputs that are too close to those works. The legal questions are separate from our security question, but the technical concern overlaps: if a model can reproduce or closely summarize protected training content, what else could it reproduce?</a:t>
             </a:r>
           </a:p>
           <a:p>
@@ -5652,7 +5743,7 @@
                 <a:ea typeface="+mn-ea"/>
                 <a:cs typeface="+mn-cs"/>
               </a:rPr>
-              <a:t>The question is whether sensitive fragments, rare strings, private examples, or protected content can be recovered under some conditions. Research on extractable memorization and public disputes suggest the answer can be yes.</a:t>
+              <a:t>In a business context, replace copyrighted articles with internal playbooks, support transcripts, source code, executive notes, regulated records, or customer-specific examples.</a:t>
             </a:r>
           </a:p>
           <a:p>
@@ -5666,168 +5757,7 @@
                 <a:ea typeface="+mn-ea"/>
                 <a:cs typeface="+mn-cs"/>
               </a:rPr>
-              <a:t>Models can sometimes memorize and regurgitate. Repeated prompting, unusual prefixes, prompt patterns, or targeted queries can sometimes produce content that looks very close to training data. Fine-tuned models can be especially concerning when datasets are small, repetitive, or contain rare sensitive values.</a:t>
-            </a:r>
-          </a:p>
-          <a:p>
-            <a:r>
-              <a:rPr lang="en-GB" sz="1200" b="0" kern="1200" dirty="0">
-                <a:solidFill>
-                  <a:schemeClr val="tx1"/>
-                </a:solidFill>
-                <a:effectLst/>
-                <a:latin typeface="+mn-lt"/>
-                <a:ea typeface="+mn-ea"/>
-                <a:cs typeface="+mn-cs"/>
-              </a:rPr>
-              <a:t>For defenders, the lesson is practical: if you would not paste the data into a public support chat, be cautious about putting it into training or fine-tuning data.</a:t>
-            </a:r>
-          </a:p>
-          <a:p>
-            <a:r>
-              <a:rPr lang="en-GB" sz="1200" b="0" kern="1200" dirty="0">
-                <a:solidFill>
-                  <a:schemeClr val="tx1"/>
-                </a:solidFill>
-                <a:effectLst/>
-                <a:latin typeface="+mn-lt"/>
-                <a:ea typeface="+mn-ea"/>
-                <a:cs typeface="+mn-cs"/>
-              </a:rPr>
-              <a:t>Several technique categories are worth naming because they map to tests defenders can build into an evaluation harness:</a:t>
-            </a:r>
-          </a:p>
-          <a:p>
-            <a:endParaRPr lang="en-GB" sz="1200" b="0" kern="1200" dirty="0">
-              <a:solidFill>
-                <a:schemeClr val="tx1"/>
-              </a:solidFill>
-              <a:effectLst/>
-              <a:latin typeface="+mn-lt"/>
-              <a:ea typeface="+mn-ea"/>
-              <a:cs typeface="+mn-cs"/>
-            </a:endParaRPr>
-          </a:p>
-          <a:p>
-            <a:r>
-              <a:rPr lang="en-GB" sz="1200" b="0" kern="1200" dirty="0">
-                <a:solidFill>
-                  <a:schemeClr val="tx1"/>
-                </a:solidFill>
-                <a:effectLst/>
-                <a:latin typeface="+mn-lt"/>
-                <a:ea typeface="+mn-ea"/>
-                <a:cs typeface="+mn-cs"/>
-              </a:rPr>
-              <a:t>- Prompt repetition and continuation attacks: prompts that try to make the model continue, repeat, or complete memorized text patterns.</a:t>
-            </a:r>
-          </a:p>
-          <a:p>
-            <a:r>
-              <a:rPr lang="en-GB" sz="1200" b="0" kern="1200" dirty="0">
-                <a:solidFill>
-                  <a:schemeClr val="tx1"/>
-                </a:solidFill>
-                <a:effectLst/>
-                <a:latin typeface="+mn-lt"/>
-                <a:ea typeface="+mn-ea"/>
-                <a:cs typeface="+mn-cs"/>
-              </a:rPr>
-              <a:t>- Rare-string or canary extraction: testing whether unique tokens, identifiers, synthetic secrets, or unusual phrases from training data can be reproduced.</a:t>
-            </a:r>
-          </a:p>
-          <a:p>
-            <a:r>
-              <a:rPr lang="en-GB" sz="1200" b="0" kern="1200" dirty="0">
-                <a:solidFill>
-                  <a:schemeClr val="tx1"/>
-                </a:solidFill>
-                <a:effectLst/>
-                <a:latin typeface="+mn-lt"/>
-                <a:ea typeface="+mn-ea"/>
-                <a:cs typeface="+mn-cs"/>
-              </a:rPr>
-              <a:t>- Membership inference: trying to determine whether a specific record, document, or phrase was part of the training set.</a:t>
-            </a:r>
-          </a:p>
-          <a:p>
-            <a:r>
-              <a:rPr lang="en-GB" sz="1200" b="0" kern="1200" dirty="0">
-                <a:solidFill>
-                  <a:schemeClr val="tx1"/>
-                </a:solidFill>
-                <a:effectLst/>
-                <a:latin typeface="+mn-lt"/>
-                <a:ea typeface="+mn-ea"/>
-                <a:cs typeface="+mn-cs"/>
-              </a:rPr>
-              <a:t>- Model inversion and reconstruction: broader ML privacy attacks that attempt to infer sensitive attributes or reconstruct representative training examples from model </a:t>
-            </a:r>
-            <a:r>
-              <a:rPr lang="en-GB" sz="1200" b="0" kern="1200" dirty="0" err="1">
-                <a:solidFill>
-                  <a:schemeClr val="tx1"/>
-                </a:solidFill>
-                <a:effectLst/>
-                <a:latin typeface="+mn-lt"/>
-                <a:ea typeface="+mn-ea"/>
-                <a:cs typeface="+mn-cs"/>
-              </a:rPr>
-              <a:t>behavior</a:t>
-            </a:r>
-            <a:r>
-              <a:rPr lang="en-GB" sz="1200" b="0" kern="1200" dirty="0">
-                <a:solidFill>
-                  <a:schemeClr val="tx1"/>
-                </a:solidFill>
-                <a:effectLst/>
-                <a:latin typeface="+mn-lt"/>
-                <a:ea typeface="+mn-ea"/>
-                <a:cs typeface="+mn-cs"/>
-              </a:rPr>
-              <a:t>.</a:t>
-            </a:r>
-          </a:p>
-          <a:p>
-            <a:r>
-              <a:rPr lang="en-GB" sz="1200" b="0" kern="1200" dirty="0">
-                <a:solidFill>
-                  <a:schemeClr val="tx1"/>
-                </a:solidFill>
-                <a:effectLst/>
-                <a:latin typeface="+mn-lt"/>
-                <a:ea typeface="+mn-ea"/>
-                <a:cs typeface="+mn-cs"/>
-              </a:rPr>
-              <a:t>- Targeted data extraction: querying around known prefixes, formats, names, IDs, or document structures to recover nearby memorized content.</a:t>
-            </a:r>
-          </a:p>
-          <a:p>
-            <a:r>
-              <a:rPr lang="en-GB" sz="1200" b="0" kern="1200" dirty="0">
-                <a:solidFill>
-                  <a:schemeClr val="tx1"/>
-                </a:solidFill>
-                <a:effectLst/>
-                <a:latin typeface="+mn-lt"/>
-                <a:ea typeface="+mn-ea"/>
-                <a:cs typeface="+mn-cs"/>
-              </a:rPr>
-              <a:t>- Fine-tune leakage testing: checking whether a smaller fine-tuned dataset made private examples easier to reproduce.</a:t>
-            </a:r>
-          </a:p>
-          <a:p>
-            <a:r>
-              <a:rPr lang="en-GB" sz="1200" b="0" kern="1200" dirty="0">
-                <a:solidFill>
-                  <a:schemeClr val="tx1"/>
-                </a:solidFill>
-                <a:effectLst/>
-                <a:latin typeface="+mn-lt"/>
-                <a:ea typeface="+mn-ea"/>
-                <a:cs typeface="+mn-cs"/>
-              </a:rPr>
-              <a:t>- Shadow-model analysis: training or comparing against auxiliary models to estimate what kinds of records are likely to leak.</a:t>
+              <a:t>The point is not to litigate the copyright cases. The point is to use them as a public signal that training data can affect outputs in ways organizations need to evaluate, monitor, and constrain.</a:t>
             </a:r>
           </a:p>
           <a:p>
@@ -5854,31 +5784,6 @@
           </a:p>
           <a:p>
             <a:r>
-              <a:rPr lang="en-GB" sz="1200" b="0" kern="1200" dirty="0">
-                <a:solidFill>
-                  <a:schemeClr val="tx1"/>
-                </a:solidFill>
-                <a:effectLst/>
-                <a:latin typeface="+mn-lt"/>
-                <a:ea typeface="+mn-ea"/>
-                <a:cs typeface="+mn-cs"/>
-              </a:rPr>
-              <a:t>The talk should keep exploit mechanics at the concept level. The useful engineering takeaway is what to evaluate before release and after model updates.</a:t>
-            </a:r>
-          </a:p>
-          <a:p>
-            <a:br>
-              <a:rPr lang="en-GB" sz="1200" b="0" kern="1200" dirty="0">
-                <a:solidFill>
-                  <a:schemeClr val="tx1"/>
-                </a:solidFill>
-                <a:effectLst/>
-                <a:latin typeface="+mn-lt"/>
-                <a:ea typeface="+mn-ea"/>
-                <a:cs typeface="+mn-cs"/>
-              </a:rPr>
-            </a:br>
-            <a:r>
               <a:rPr lang="en-GB" sz="1200" b="1" kern="1200" dirty="0">
                 <a:solidFill>
                   <a:schemeClr val="tx1"/>
@@ -5911,30 +5816,8 @@
                 <a:ea typeface="+mn-ea"/>
                 <a:cs typeface="+mn-cs"/>
               </a:rPr>
-              <a:t>The risk is not that every training record is recoverable. The risk is that rare or sensitive fragments may be recoverable, and teams need a repeatable way to test for that before release.</a:t>
-            </a:r>
-          </a:p>
-          <a:p>
-            <a:br>
-              <a:rPr lang="en-GB" sz="1200" b="0" kern="1200" dirty="0">
-                <a:solidFill>
-                  <a:schemeClr val="tx1"/>
-                </a:solidFill>
-                <a:effectLst/>
-                <a:latin typeface="+mn-lt"/>
-                <a:ea typeface="+mn-ea"/>
-                <a:cs typeface="+mn-cs"/>
-              </a:rPr>
-            </a:br>
-            <a:endParaRPr lang="en-GB" sz="1200" b="0" kern="1200" dirty="0">
-              <a:solidFill>
-                <a:schemeClr val="tx1"/>
-              </a:solidFill>
-              <a:effectLst/>
-              <a:latin typeface="+mn-lt"/>
-              <a:ea typeface="+mn-ea"/>
-              <a:cs typeface="+mn-cs"/>
-            </a:endParaRPr>
+              <a:t>If public content can become a regurgitation dispute, private business content can become an exposure incident or compliance finding.</a:t>
+            </a:r>
           </a:p>
           <a:p>
             <a:endParaRPr lang="en-US" dirty="0"/>
@@ -17890,998 +17773,6 @@
 
 <file path=ppt/slides/slide10.xml><?xml version="1.0" encoding="utf-8"?>
 <p:sld xmlns:a="http://schemas.openxmlformats.org/drawingml/2006/main" xmlns:r="http://schemas.openxmlformats.org/officeDocument/2006/relationships" xmlns:p="http://schemas.openxmlformats.org/presentationml/2006/main">
-  <p:cSld name="Slide 8">
-    <p:bg>
-      <p:bgPr>
-        <a:solidFill>
-          <a:srgbClr val="0D1117"/>
-        </a:solidFill>
-        <a:effectLst/>
-      </p:bgPr>
-    </p:bg>
-    <p:spTree>
-      <p:nvGrpSpPr>
-        <p:cNvPr id="1" name=""/>
-        <p:cNvGrpSpPr/>
-        <p:nvPr/>
-      </p:nvGrpSpPr>
-      <p:grpSpPr>
-        <a:xfrm>
-          <a:off x="0" y="0"/>
-          <a:ext cx="0" cy="0"/>
-          <a:chOff x="0" y="0"/>
-          <a:chExt cx="0" cy="0"/>
-        </a:xfrm>
-      </p:grpSpPr>
-      <p:sp>
-        <p:nvSpPr>
-          <p:cNvPr id="2" name="Text 0"/>
-          <p:cNvSpPr/>
-          <p:nvPr/>
-        </p:nvSpPr>
-        <p:spPr>
-          <a:xfrm>
-            <a:off x="548640" y="228600"/>
-            <a:ext cx="3657600" cy="274320"/>
-          </a:xfrm>
-          <a:prstGeom prst="rect">
-            <a:avLst/>
-          </a:prstGeom>
-          <a:noFill/>
-          <a:ln/>
-        </p:spPr>
-        <p:txBody>
-          <a:bodyPr wrap="square" rtlCol="0" anchor="ctr"/>
-          <a:lstStyle/>
-          <a:p>
-            <a:pPr marL="0" indent="0">
-              <a:buNone/>
-            </a:pPr>
-            <a:r>
-              <a:rPr lang="en-US" sz="1100" dirty="0">
-                <a:solidFill>
-                  <a:srgbClr val="8B949E"/>
-                </a:solidFill>
-                <a:latin typeface="Consolas" pitchFamily="34" charset="0"/>
-                <a:ea typeface="Consolas" pitchFamily="34" charset="-122"/>
-                <a:cs typeface="Consolas" pitchFamily="34" charset="-120"/>
-              </a:rPr>
-              <a:t>Stage 1 · Extraction</a:t>
-            </a:r>
-            <a:endParaRPr lang="en-US" sz="1100" dirty="0"/>
-          </a:p>
-        </p:txBody>
-      </p:sp>
-      <p:sp>
-        <p:nvSpPr>
-          <p:cNvPr id="3" name="Text 1"/>
-          <p:cNvSpPr/>
-          <p:nvPr/>
-        </p:nvSpPr>
-        <p:spPr>
-          <a:xfrm>
-            <a:off x="548640" y="594360"/>
-            <a:ext cx="11091672" cy="502920"/>
-          </a:xfrm>
-          <a:prstGeom prst="rect">
-            <a:avLst/>
-          </a:prstGeom>
-          <a:noFill/>
-          <a:ln/>
-        </p:spPr>
-        <p:txBody>
-          <a:bodyPr wrap="square" rtlCol="0" anchor="ctr"/>
-          <a:lstStyle/>
-          <a:p>
-            <a:pPr marL="0" indent="0">
-              <a:buNone/>
-            </a:pPr>
-            <a:r>
-              <a:rPr lang="en-US" sz="2400" dirty="0">
-                <a:solidFill>
-                  <a:srgbClr val="8B949E"/>
-                </a:solidFill>
-                <a:latin typeface="Consolas" pitchFamily="34" charset="0"/>
-                <a:ea typeface="Consolas" pitchFamily="34" charset="-122"/>
-                <a:cs typeface="Consolas" pitchFamily="34" charset="-120"/>
-              </a:rPr>
-              <a:t>&gt; </a:t>
-            </a:r>
-            <a:r>
-              <a:rPr lang="en-US" sz="2200" b="1" dirty="0">
-                <a:solidFill>
-                  <a:srgbClr val="58A6FF"/>
-                </a:solidFill>
-                <a:latin typeface="Consolas" pitchFamily="34" charset="0"/>
-                <a:ea typeface="Consolas" pitchFamily="34" charset="-122"/>
-                <a:cs typeface="Consolas" pitchFamily="34" charset="-120"/>
-              </a:rPr>
-              <a:t>Can training data be extracted?</a:t>
-            </a:r>
-            <a:endParaRPr lang="en-US" sz="2400" dirty="0"/>
-          </a:p>
-        </p:txBody>
-      </p:sp>
-      <p:sp>
-        <p:nvSpPr>
-          <p:cNvPr id="4" name="Shape 2"/>
-          <p:cNvSpPr/>
-          <p:nvPr/>
-        </p:nvSpPr>
-        <p:spPr>
-          <a:xfrm>
-            <a:off x="548640" y="1143000"/>
-            <a:ext cx="11091672" cy="13716"/>
-          </a:xfrm>
-          <a:prstGeom prst="rect">
-            <a:avLst/>
-          </a:prstGeom>
-          <a:solidFill>
-            <a:srgbClr val="30363D"/>
-          </a:solidFill>
-          <a:ln/>
-        </p:spPr>
-        <p:txBody>
-          <a:bodyPr/>
-          <a:lstStyle/>
-          <a:p>
-            <a:endParaRPr lang="en-GB"/>
-          </a:p>
-        </p:txBody>
-      </p:sp>
-      <p:sp>
-        <p:nvSpPr>
-          <p:cNvPr id="5" name="Text 3"/>
-          <p:cNvSpPr/>
-          <p:nvPr/>
-        </p:nvSpPr>
-        <p:spPr>
-          <a:xfrm>
-            <a:off x="10972800" y="6446520"/>
-            <a:ext cx="731520" cy="274320"/>
-          </a:xfrm>
-          <a:prstGeom prst="rect">
-            <a:avLst/>
-          </a:prstGeom>
-          <a:noFill/>
-          <a:ln/>
-        </p:spPr>
-        <p:txBody>
-          <a:bodyPr wrap="square" rtlCol="0" anchor="ctr"/>
-          <a:lstStyle/>
-          <a:p>
-            <a:pPr marL="0" indent="0" algn="r">
-              <a:buNone/>
-            </a:pPr>
-            <a:r>
-              <a:rPr lang="en-US" sz="1000" dirty="0">
-                <a:solidFill>
-                  <a:srgbClr val="8B949E"/>
-                </a:solidFill>
-                <a:latin typeface="Consolas" pitchFamily="34" charset="0"/>
-                <a:ea typeface="Consolas" pitchFamily="34" charset="-122"/>
-                <a:cs typeface="Consolas" pitchFamily="34" charset="-120"/>
-              </a:rPr>
-              <a:t>8</a:t>
-            </a:r>
-            <a:endParaRPr lang="en-US" sz="1000" dirty="0"/>
-          </a:p>
-        </p:txBody>
-      </p:sp>
-      <p:sp>
-        <p:nvSpPr>
-          <p:cNvPr id="6" name="Shape 4"/>
-          <p:cNvSpPr/>
-          <p:nvPr/>
-        </p:nvSpPr>
-        <p:spPr>
-          <a:xfrm>
-            <a:off x="548640" y="1325880"/>
-            <a:ext cx="11091672" cy="5074920"/>
-          </a:xfrm>
-          <a:prstGeom prst="roundRect">
-            <a:avLst>
-              <a:gd name="adj" fmla="val 2162"/>
-            </a:avLst>
-          </a:prstGeom>
-          <a:solidFill>
-            <a:srgbClr val="161B22"/>
-          </a:solidFill>
-          <a:ln w="9525">
-            <a:solidFill>
-              <a:srgbClr val="30363D"/>
-            </a:solidFill>
-            <a:prstDash val="solid"/>
-          </a:ln>
-        </p:spPr>
-        <p:txBody>
-          <a:bodyPr/>
-          <a:lstStyle/>
-          <a:p>
-            <a:endParaRPr lang="en-GB"/>
-          </a:p>
-        </p:txBody>
-      </p:sp>
-      <p:sp>
-        <p:nvSpPr>
-          <p:cNvPr id="7" name="Shape 5"/>
-          <p:cNvSpPr/>
-          <p:nvPr/>
-        </p:nvSpPr>
-        <p:spPr>
-          <a:xfrm>
-            <a:off x="3194685" y="1639062"/>
-            <a:ext cx="3200400" cy="1463040"/>
-          </a:xfrm>
-          <a:prstGeom prst="roundRect">
-            <a:avLst>
-              <a:gd name="adj" fmla="val 6250"/>
-            </a:avLst>
-          </a:prstGeom>
-          <a:solidFill>
-            <a:srgbClr val="010409"/>
-          </a:solidFill>
-          <a:ln w="12700">
-            <a:solidFill>
-              <a:srgbClr val="F85149"/>
-            </a:solidFill>
-            <a:prstDash val="solid"/>
-          </a:ln>
-        </p:spPr>
-        <p:txBody>
-          <a:bodyPr/>
-          <a:lstStyle/>
-          <a:p>
-            <a:endParaRPr lang="en-GB"/>
-          </a:p>
-        </p:txBody>
-      </p:sp>
-      <p:sp>
-        <p:nvSpPr>
-          <p:cNvPr id="8" name="Text 6"/>
-          <p:cNvSpPr/>
-          <p:nvPr/>
-        </p:nvSpPr>
-        <p:spPr>
-          <a:xfrm>
-            <a:off x="3194685" y="1639062"/>
-            <a:ext cx="3200400" cy="1463040"/>
-          </a:xfrm>
-          <a:prstGeom prst="rect">
-            <a:avLst/>
-          </a:prstGeom>
-          <a:noFill/>
-          <a:ln/>
-        </p:spPr>
-        <p:txBody>
-          <a:bodyPr wrap="square" rtlCol="0" anchor="ctr"/>
-          <a:lstStyle/>
-          <a:p>
-            <a:pPr marL="0" indent="0" algn="ctr">
-              <a:buNone/>
-            </a:pPr>
-            <a:r>
-              <a:rPr lang="en-US" sz="1400" dirty="0">
-                <a:solidFill>
-                  <a:srgbClr val="F85149"/>
-                </a:solidFill>
-                <a:latin typeface="Consolas" pitchFamily="34" charset="0"/>
-                <a:ea typeface="Consolas" pitchFamily="34" charset="-122"/>
-                <a:cs typeface="Consolas" pitchFamily="34" charset="-120"/>
-              </a:rPr>
-              <a:t>Model</a:t>
-            </a:r>
-            <a:endParaRPr lang="en-US" sz="1400" dirty="0"/>
-          </a:p>
-          <a:p>
-            <a:pPr marL="0" indent="0" algn="ctr">
-              <a:buNone/>
-            </a:pPr>
-            <a:r>
-              <a:rPr lang="en-US" sz="1400" dirty="0">
-                <a:solidFill>
-                  <a:srgbClr val="F85149"/>
-                </a:solidFill>
-                <a:latin typeface="Consolas" pitchFamily="34" charset="0"/>
-                <a:ea typeface="Consolas" pitchFamily="34" charset="-122"/>
-                <a:cs typeface="Consolas" pitchFamily="34" charset="-120"/>
-              </a:rPr>
-              <a:t>(black box)</a:t>
-            </a:r>
-            <a:endParaRPr lang="en-US" sz="1400" dirty="0"/>
-          </a:p>
-        </p:txBody>
-      </p:sp>
-      <p:sp>
-        <p:nvSpPr>
-          <p:cNvPr id="9" name="Text 7"/>
-          <p:cNvSpPr/>
-          <p:nvPr/>
-        </p:nvSpPr>
-        <p:spPr>
-          <a:xfrm>
-            <a:off x="1365885" y="2004822"/>
-            <a:ext cx="1645920" cy="457200"/>
-          </a:xfrm>
-          <a:prstGeom prst="rect">
-            <a:avLst/>
-          </a:prstGeom>
-          <a:noFill/>
-          <a:ln/>
-        </p:spPr>
-        <p:txBody>
-          <a:bodyPr wrap="square" rtlCol="0" anchor="ctr"/>
-          <a:lstStyle/>
-          <a:p>
-            <a:pPr marL="0" indent="0" algn="r">
-              <a:buNone/>
-            </a:pPr>
-            <a:r>
-              <a:rPr lang="en-US" sz="1200" dirty="0">
-                <a:solidFill>
-                  <a:srgbClr val="8B949E"/>
-                </a:solidFill>
-                <a:latin typeface="Consolas" pitchFamily="34" charset="0"/>
-                <a:ea typeface="Consolas" pitchFamily="34" charset="-122"/>
-                <a:cs typeface="Consolas" pitchFamily="34" charset="-120"/>
-              </a:rPr>
-              <a:t>Prompt attempts →</a:t>
-            </a:r>
-            <a:endParaRPr lang="en-US" sz="1200" dirty="0"/>
-          </a:p>
-        </p:txBody>
-      </p:sp>
-      <p:sp>
-        <p:nvSpPr>
-          <p:cNvPr id="10" name="Text 8"/>
-          <p:cNvSpPr/>
-          <p:nvPr/>
-        </p:nvSpPr>
-        <p:spPr>
-          <a:xfrm>
-            <a:off x="6395085" y="2004822"/>
-            <a:ext cx="365760" cy="457200"/>
-          </a:xfrm>
-          <a:prstGeom prst="rect">
-            <a:avLst/>
-          </a:prstGeom>
-          <a:noFill/>
-          <a:ln/>
-        </p:spPr>
-        <p:txBody>
-          <a:bodyPr wrap="square" rtlCol="0" anchor="ctr"/>
-          <a:lstStyle/>
-          <a:p>
-            <a:pPr marL="0" indent="0" algn="ctr">
-              <a:buNone/>
-            </a:pPr>
-            <a:r>
-              <a:rPr lang="en-US" sz="1400" dirty="0">
-                <a:solidFill>
-                  <a:srgbClr val="8B949E"/>
-                </a:solidFill>
-                <a:latin typeface="Consolas" pitchFamily="34" charset="0"/>
-                <a:ea typeface="Consolas" pitchFamily="34" charset="-122"/>
-                <a:cs typeface="Consolas" pitchFamily="34" charset="-120"/>
-              </a:rPr>
-              <a:t>→</a:t>
-            </a:r>
-            <a:endParaRPr lang="en-US" sz="1400" dirty="0"/>
-          </a:p>
-        </p:txBody>
-      </p:sp>
-      <p:sp>
-        <p:nvSpPr>
-          <p:cNvPr id="11" name="Shape 9"/>
-          <p:cNvSpPr/>
-          <p:nvPr/>
-        </p:nvSpPr>
-        <p:spPr>
-          <a:xfrm>
-            <a:off x="6943725" y="1639062"/>
-            <a:ext cx="2286000" cy="320040"/>
-          </a:xfrm>
-          <a:prstGeom prst="roundRect">
-            <a:avLst>
-              <a:gd name="adj" fmla="val 11429"/>
-            </a:avLst>
-          </a:prstGeom>
-          <a:solidFill>
-            <a:srgbClr val="161B22"/>
-          </a:solidFill>
-          <a:ln w="6350">
-            <a:solidFill>
-              <a:srgbClr val="F85149"/>
-            </a:solidFill>
-            <a:prstDash val="dash"/>
-          </a:ln>
-        </p:spPr>
-        <p:txBody>
-          <a:bodyPr/>
-          <a:lstStyle/>
-          <a:p>
-            <a:endParaRPr lang="en-GB"/>
-          </a:p>
-        </p:txBody>
-      </p:sp>
-      <p:sp>
-        <p:nvSpPr>
-          <p:cNvPr id="12" name="Text 10"/>
-          <p:cNvSpPr/>
-          <p:nvPr/>
-        </p:nvSpPr>
-        <p:spPr>
-          <a:xfrm>
-            <a:off x="6943725" y="1639062"/>
-            <a:ext cx="2286000" cy="320040"/>
-          </a:xfrm>
-          <a:prstGeom prst="rect">
-            <a:avLst/>
-          </a:prstGeom>
-          <a:noFill/>
-          <a:ln/>
-        </p:spPr>
-        <p:txBody>
-          <a:bodyPr wrap="square" rtlCol="0" anchor="ctr"/>
-          <a:lstStyle/>
-          <a:p>
-            <a:pPr marL="0" indent="0" algn="ctr">
-              <a:buNone/>
-            </a:pPr>
-            <a:r>
-              <a:rPr lang="en-US" sz="1000" dirty="0">
-                <a:solidFill>
-                  <a:srgbClr val="F85149"/>
-                </a:solidFill>
-                <a:latin typeface="Consolas" pitchFamily="34" charset="0"/>
-                <a:ea typeface="Consolas" pitchFamily="34" charset="-122"/>
-                <a:cs typeface="Consolas" pitchFamily="34" charset="-120"/>
-              </a:rPr>
-              <a:t>memorized phrase</a:t>
-            </a:r>
-            <a:endParaRPr lang="en-US" sz="1000" dirty="0"/>
-          </a:p>
-        </p:txBody>
-      </p:sp>
-      <p:sp>
-        <p:nvSpPr>
-          <p:cNvPr id="13" name="Shape 11"/>
-          <p:cNvSpPr/>
-          <p:nvPr/>
-        </p:nvSpPr>
-        <p:spPr>
-          <a:xfrm>
-            <a:off x="6943725" y="2004822"/>
-            <a:ext cx="2286000" cy="320040"/>
-          </a:xfrm>
-          <a:prstGeom prst="roundRect">
-            <a:avLst>
-              <a:gd name="adj" fmla="val 11429"/>
-            </a:avLst>
-          </a:prstGeom>
-          <a:solidFill>
-            <a:srgbClr val="161B22"/>
-          </a:solidFill>
-          <a:ln w="6350">
-            <a:solidFill>
-              <a:srgbClr val="F85149"/>
-            </a:solidFill>
-            <a:prstDash val="dash"/>
-          </a:ln>
-        </p:spPr>
-        <p:txBody>
-          <a:bodyPr/>
-          <a:lstStyle/>
-          <a:p>
-            <a:endParaRPr lang="en-GB"/>
-          </a:p>
-        </p:txBody>
-      </p:sp>
-      <p:sp>
-        <p:nvSpPr>
-          <p:cNvPr id="14" name="Text 12"/>
-          <p:cNvSpPr/>
-          <p:nvPr/>
-        </p:nvSpPr>
-        <p:spPr>
-          <a:xfrm>
-            <a:off x="6943725" y="2004822"/>
-            <a:ext cx="2286000" cy="320040"/>
-          </a:xfrm>
-          <a:prstGeom prst="rect">
-            <a:avLst/>
-          </a:prstGeom>
-          <a:noFill/>
-          <a:ln/>
-        </p:spPr>
-        <p:txBody>
-          <a:bodyPr wrap="square" rtlCol="0" anchor="ctr"/>
-          <a:lstStyle/>
-          <a:p>
-            <a:pPr marL="0" indent="0" algn="ctr">
-              <a:buNone/>
-            </a:pPr>
-            <a:r>
-              <a:rPr lang="en-US" sz="1000" dirty="0">
-                <a:solidFill>
-                  <a:srgbClr val="F85149"/>
-                </a:solidFill>
-                <a:latin typeface="Consolas" pitchFamily="34" charset="0"/>
-                <a:ea typeface="Consolas" pitchFamily="34" charset="-122"/>
-                <a:cs typeface="Consolas" pitchFamily="34" charset="-120"/>
-              </a:rPr>
-              <a:t>rare identifier</a:t>
-            </a:r>
-            <a:endParaRPr lang="en-US" sz="1000" dirty="0"/>
-          </a:p>
-        </p:txBody>
-      </p:sp>
-      <p:sp>
-        <p:nvSpPr>
-          <p:cNvPr id="15" name="Shape 13"/>
-          <p:cNvSpPr/>
-          <p:nvPr/>
-        </p:nvSpPr>
-        <p:spPr>
-          <a:xfrm>
-            <a:off x="6943725" y="2370582"/>
-            <a:ext cx="2286000" cy="320040"/>
-          </a:xfrm>
-          <a:prstGeom prst="roundRect">
-            <a:avLst>
-              <a:gd name="adj" fmla="val 11429"/>
-            </a:avLst>
-          </a:prstGeom>
-          <a:solidFill>
-            <a:srgbClr val="161B22"/>
-          </a:solidFill>
-          <a:ln w="6350">
-            <a:solidFill>
-              <a:srgbClr val="F85149"/>
-            </a:solidFill>
-            <a:prstDash val="dash"/>
-          </a:ln>
-        </p:spPr>
-        <p:txBody>
-          <a:bodyPr/>
-          <a:lstStyle/>
-          <a:p>
-            <a:endParaRPr lang="en-GB"/>
-          </a:p>
-        </p:txBody>
-      </p:sp>
-      <p:sp>
-        <p:nvSpPr>
-          <p:cNvPr id="16" name="Text 14"/>
-          <p:cNvSpPr/>
-          <p:nvPr/>
-        </p:nvSpPr>
-        <p:spPr>
-          <a:xfrm>
-            <a:off x="6943725" y="2370582"/>
-            <a:ext cx="2286000" cy="320040"/>
-          </a:xfrm>
-          <a:prstGeom prst="rect">
-            <a:avLst/>
-          </a:prstGeom>
-          <a:noFill/>
-          <a:ln/>
-        </p:spPr>
-        <p:txBody>
-          <a:bodyPr wrap="square" rtlCol="0" anchor="ctr"/>
-          <a:lstStyle/>
-          <a:p>
-            <a:pPr marL="0" indent="0" algn="ctr">
-              <a:buNone/>
-            </a:pPr>
-            <a:r>
-              <a:rPr lang="en-US" sz="1000" dirty="0">
-                <a:solidFill>
-                  <a:srgbClr val="F85149"/>
-                </a:solidFill>
-                <a:latin typeface="Consolas" pitchFamily="34" charset="0"/>
-                <a:ea typeface="Consolas" pitchFamily="34" charset="-122"/>
-                <a:cs typeface="Consolas" pitchFamily="34" charset="-120"/>
-              </a:rPr>
-              <a:t>copied passage</a:t>
-            </a:r>
-            <a:endParaRPr lang="en-US" sz="1000" dirty="0"/>
-          </a:p>
-        </p:txBody>
-      </p:sp>
-      <p:sp>
-        <p:nvSpPr>
-          <p:cNvPr id="17" name="Shape 15"/>
-          <p:cNvSpPr/>
-          <p:nvPr/>
-        </p:nvSpPr>
-        <p:spPr>
-          <a:xfrm>
-            <a:off x="6943725" y="2736342"/>
-            <a:ext cx="2286000" cy="320040"/>
-          </a:xfrm>
-          <a:prstGeom prst="roundRect">
-            <a:avLst>
-              <a:gd name="adj" fmla="val 11429"/>
-            </a:avLst>
-          </a:prstGeom>
-          <a:solidFill>
-            <a:srgbClr val="161B22"/>
-          </a:solidFill>
-          <a:ln w="6350">
-            <a:solidFill>
-              <a:srgbClr val="F85149"/>
-            </a:solidFill>
-            <a:prstDash val="dash"/>
-          </a:ln>
-        </p:spPr>
-        <p:txBody>
-          <a:bodyPr/>
-          <a:lstStyle/>
-          <a:p>
-            <a:endParaRPr lang="en-GB"/>
-          </a:p>
-        </p:txBody>
-      </p:sp>
-      <p:sp>
-        <p:nvSpPr>
-          <p:cNvPr id="18" name="Text 16"/>
-          <p:cNvSpPr/>
-          <p:nvPr/>
-        </p:nvSpPr>
-        <p:spPr>
-          <a:xfrm>
-            <a:off x="6943725" y="2736342"/>
-            <a:ext cx="2286000" cy="320040"/>
-          </a:xfrm>
-          <a:prstGeom prst="rect">
-            <a:avLst/>
-          </a:prstGeom>
-          <a:noFill/>
-          <a:ln/>
-        </p:spPr>
-        <p:txBody>
-          <a:bodyPr wrap="square" rtlCol="0" anchor="ctr"/>
-          <a:lstStyle/>
-          <a:p>
-            <a:pPr marL="0" indent="0" algn="ctr">
-              <a:buNone/>
-            </a:pPr>
-            <a:r>
-              <a:rPr lang="en-US" sz="1000" dirty="0">
-                <a:solidFill>
-                  <a:srgbClr val="F85149"/>
-                </a:solidFill>
-                <a:latin typeface="Consolas" pitchFamily="34" charset="0"/>
-                <a:ea typeface="Consolas" pitchFamily="34" charset="-122"/>
-                <a:cs typeface="Consolas" pitchFamily="34" charset="-120"/>
-              </a:rPr>
-              <a:t>private example</a:t>
-            </a:r>
-            <a:endParaRPr lang="en-US" sz="1000" dirty="0"/>
-          </a:p>
-        </p:txBody>
-      </p:sp>
-      <p:sp>
-        <p:nvSpPr>
-          <p:cNvPr id="19" name="Text 17"/>
-          <p:cNvSpPr/>
-          <p:nvPr/>
-        </p:nvSpPr>
-        <p:spPr>
-          <a:xfrm>
-            <a:off x="1280160" y="3260979"/>
-            <a:ext cx="3840480" cy="320040"/>
-          </a:xfrm>
-          <a:prstGeom prst="rect">
-            <a:avLst/>
-          </a:prstGeom>
-          <a:noFill/>
-          <a:ln/>
-        </p:spPr>
-        <p:txBody>
-          <a:bodyPr wrap="square" rtlCol="0" anchor="ctr"/>
-          <a:lstStyle/>
-          <a:p>
-            <a:pPr marL="0" indent="0">
-              <a:buNone/>
-            </a:pPr>
-            <a:r>
-              <a:rPr lang="en-US" sz="1200" b="1" dirty="0">
-                <a:solidFill>
-                  <a:srgbClr val="58A6FF"/>
-                </a:solidFill>
-                <a:latin typeface="Segoe UI" pitchFamily="34" charset="0"/>
-                <a:ea typeface="Segoe UI" pitchFamily="34" charset="-122"/>
-                <a:cs typeface="Segoe UI" pitchFamily="34" charset="-120"/>
-              </a:rPr>
-              <a:t>Extraction tests defenders should know</a:t>
-            </a:r>
-            <a:endParaRPr lang="en-US" sz="1200" dirty="0"/>
-          </a:p>
-        </p:txBody>
-      </p:sp>
-      <p:sp>
-        <p:nvSpPr>
-          <p:cNvPr id="20" name="Text 18"/>
-          <p:cNvSpPr/>
-          <p:nvPr/>
-        </p:nvSpPr>
-        <p:spPr>
-          <a:xfrm>
-            <a:off x="1280160" y="3559302"/>
-            <a:ext cx="3840480" cy="1933956"/>
-          </a:xfrm>
-          <a:prstGeom prst="rect">
-            <a:avLst/>
-          </a:prstGeom>
-          <a:noFill/>
-          <a:ln/>
-        </p:spPr>
-        <p:txBody>
-          <a:bodyPr wrap="square" rtlCol="0" anchor="t"/>
-          <a:lstStyle/>
-          <a:p>
-            <a:pPr marL="342900" indent="-342900">
-              <a:lnSpc>
-                <a:spcPct val="135000"/>
-              </a:lnSpc>
-              <a:spcBef>
-                <a:spcPts val="400"/>
-              </a:spcBef>
-              <a:buSzPct val="100000"/>
-              <a:buChar char="•"/>
-            </a:pPr>
-            <a:r>
-              <a:rPr lang="en-US" sz="1200" dirty="0">
-                <a:solidFill>
-                  <a:srgbClr val="E6EDF3"/>
-                </a:solidFill>
-                <a:latin typeface="Segoe UI" pitchFamily="34" charset="0"/>
-                <a:ea typeface="Segoe UI" pitchFamily="34" charset="-122"/>
-                <a:cs typeface="Segoe UI" pitchFamily="34" charset="-120"/>
-              </a:rPr>
-              <a:t>Repetition / continuation</a:t>
-            </a:r>
-            <a:endParaRPr lang="en-US" sz="1200" dirty="0"/>
-          </a:p>
-          <a:p>
-            <a:pPr marL="342900" indent="-342900">
-              <a:lnSpc>
-                <a:spcPct val="135000"/>
-              </a:lnSpc>
-              <a:spcBef>
-                <a:spcPts val="400"/>
-              </a:spcBef>
-              <a:buSzPct val="100000"/>
-              <a:buChar char="•"/>
-            </a:pPr>
-            <a:r>
-              <a:rPr lang="en-US" sz="1200" dirty="0">
-                <a:solidFill>
-                  <a:srgbClr val="E6EDF3"/>
-                </a:solidFill>
-                <a:latin typeface="Segoe UI" pitchFamily="34" charset="0"/>
-                <a:ea typeface="Segoe UI" pitchFamily="34" charset="-122"/>
-                <a:cs typeface="Segoe UI" pitchFamily="34" charset="-120"/>
-              </a:rPr>
-              <a:t>Canary strings</a:t>
-            </a:r>
-            <a:endParaRPr lang="en-US" sz="1200" dirty="0"/>
-          </a:p>
-          <a:p>
-            <a:pPr marL="342900" indent="-342900">
-              <a:lnSpc>
-                <a:spcPct val="135000"/>
-              </a:lnSpc>
-              <a:spcBef>
-                <a:spcPts val="400"/>
-              </a:spcBef>
-              <a:buSzPct val="100000"/>
-              <a:buChar char="•"/>
-            </a:pPr>
-            <a:r>
-              <a:rPr lang="en-US" sz="1200" dirty="0">
-                <a:solidFill>
-                  <a:srgbClr val="E6EDF3"/>
-                </a:solidFill>
-                <a:latin typeface="Segoe UI" pitchFamily="34" charset="0"/>
-                <a:ea typeface="Segoe UI" pitchFamily="34" charset="-122"/>
-                <a:cs typeface="Segoe UI" pitchFamily="34" charset="-120"/>
-              </a:rPr>
-              <a:t>Membership inference</a:t>
-            </a:r>
-            <a:endParaRPr lang="en-US" sz="1200" dirty="0"/>
-          </a:p>
-          <a:p>
-            <a:pPr marL="342900" indent="-342900">
-              <a:lnSpc>
-                <a:spcPct val="135000"/>
-              </a:lnSpc>
-              <a:spcBef>
-                <a:spcPts val="400"/>
-              </a:spcBef>
-              <a:buSzPct val="100000"/>
-              <a:buChar char="•"/>
-            </a:pPr>
-            <a:r>
-              <a:rPr lang="en-US" sz="1200" dirty="0">
-                <a:solidFill>
-                  <a:srgbClr val="E6EDF3"/>
-                </a:solidFill>
-                <a:latin typeface="Segoe UI" pitchFamily="34" charset="0"/>
-                <a:ea typeface="Segoe UI" pitchFamily="34" charset="-122"/>
-                <a:cs typeface="Segoe UI" pitchFamily="34" charset="-120"/>
-              </a:rPr>
-              <a:t>Inversion / reconstruction</a:t>
-            </a:r>
-            <a:endParaRPr lang="en-US" sz="1200" dirty="0"/>
-          </a:p>
-          <a:p>
-            <a:pPr marL="342900" indent="-342900">
-              <a:lnSpc>
-                <a:spcPct val="135000"/>
-              </a:lnSpc>
-              <a:spcBef>
-                <a:spcPts val="400"/>
-              </a:spcBef>
-              <a:buSzPct val="100000"/>
-              <a:buChar char="•"/>
-            </a:pPr>
-            <a:r>
-              <a:rPr lang="en-US" sz="1200" dirty="0">
-                <a:solidFill>
-                  <a:srgbClr val="E6EDF3"/>
-                </a:solidFill>
-                <a:latin typeface="Segoe UI" pitchFamily="34" charset="0"/>
-                <a:ea typeface="Segoe UI" pitchFamily="34" charset="-122"/>
-                <a:cs typeface="Segoe UI" pitchFamily="34" charset="-120"/>
-              </a:rPr>
-              <a:t>Targeted prefix probing</a:t>
-            </a:r>
-            <a:endParaRPr lang="en-US" sz="1200" dirty="0"/>
-          </a:p>
-          <a:p>
-            <a:pPr marL="342900" indent="-342900">
-              <a:lnSpc>
-                <a:spcPct val="135000"/>
-              </a:lnSpc>
-              <a:spcBef>
-                <a:spcPts val="400"/>
-              </a:spcBef>
-              <a:buSzPct val="100000"/>
-              <a:buChar char="•"/>
-            </a:pPr>
-            <a:r>
-              <a:rPr lang="en-US" sz="1200" dirty="0">
-                <a:solidFill>
-                  <a:srgbClr val="E6EDF3"/>
-                </a:solidFill>
-                <a:latin typeface="Segoe UI" pitchFamily="34" charset="0"/>
-                <a:ea typeface="Segoe UI" pitchFamily="34" charset="-122"/>
-                <a:cs typeface="Segoe UI" pitchFamily="34" charset="-120"/>
-              </a:rPr>
-              <a:t>Fine-tune leakage testing</a:t>
-            </a:r>
-            <a:endParaRPr lang="en-US" sz="1200" dirty="0"/>
-          </a:p>
-        </p:txBody>
-      </p:sp>
-      <p:sp>
-        <p:nvSpPr>
-          <p:cNvPr id="21" name="Shape 19"/>
-          <p:cNvSpPr/>
-          <p:nvPr/>
-        </p:nvSpPr>
-        <p:spPr>
-          <a:xfrm>
-            <a:off x="731520" y="5394960"/>
-            <a:ext cx="54864" cy="411480"/>
-          </a:xfrm>
-          <a:prstGeom prst="rect">
-            <a:avLst/>
-          </a:prstGeom>
-          <a:solidFill>
-            <a:srgbClr val="3FB950"/>
-          </a:solidFill>
-          <a:ln/>
-        </p:spPr>
-        <p:txBody>
-          <a:bodyPr/>
-          <a:lstStyle/>
-          <a:p>
-            <a:endParaRPr lang="en-GB"/>
-          </a:p>
-        </p:txBody>
-      </p:sp>
-      <p:sp>
-        <p:nvSpPr>
-          <p:cNvPr id="22" name="Text 20"/>
-          <p:cNvSpPr/>
-          <p:nvPr/>
-        </p:nvSpPr>
-        <p:spPr>
-          <a:xfrm>
-            <a:off x="960120" y="5394960"/>
-            <a:ext cx="10497312" cy="411480"/>
-          </a:xfrm>
-          <a:prstGeom prst="rect">
-            <a:avLst/>
-          </a:prstGeom>
-          <a:noFill/>
-          <a:ln/>
-        </p:spPr>
-        <p:txBody>
-          <a:bodyPr wrap="square" rtlCol="0" anchor="ctr"/>
-          <a:lstStyle/>
-          <a:p>
-            <a:pPr marL="0" indent="0">
-              <a:buNone/>
-            </a:pPr>
-            <a:r>
-              <a:rPr lang="en-US" sz="1400" b="1" i="1" dirty="0">
-                <a:solidFill>
-                  <a:srgbClr val="3FB950"/>
-                </a:solidFill>
-                <a:latin typeface="Segoe UI" pitchFamily="34" charset="0"/>
-                <a:ea typeface="Segoe UI" pitchFamily="34" charset="-122"/>
-                <a:cs typeface="Segoe UI" pitchFamily="34" charset="-120"/>
-              </a:rPr>
-              <a:t>Rare or sensitive fragments may be recoverable — teams need repeatable tests before release.</a:t>
-            </a:r>
-            <a:endParaRPr lang="en-US" sz="1400" dirty="0"/>
-          </a:p>
-        </p:txBody>
-      </p:sp>
-      <p:sp>
-        <p:nvSpPr>
-          <p:cNvPr id="23" name="Text 21"/>
-          <p:cNvSpPr/>
-          <p:nvPr/>
-        </p:nvSpPr>
-        <p:spPr>
-          <a:xfrm>
-            <a:off x="8686800" y="6263640"/>
-            <a:ext cx="2926080" cy="228600"/>
-          </a:xfrm>
-          <a:prstGeom prst="rect">
-            <a:avLst/>
-          </a:prstGeom>
-          <a:noFill/>
-          <a:ln/>
-        </p:spPr>
-        <p:txBody>
-          <a:bodyPr wrap="square" rtlCol="0" anchor="ctr"/>
-          <a:lstStyle/>
-          <a:p>
-            <a:pPr marL="0" indent="0" algn="r">
-              <a:buNone/>
-            </a:pPr>
-            <a:r>
-              <a:rPr lang="en-US" sz="900" dirty="0">
-                <a:solidFill>
-                  <a:srgbClr val="8B949E"/>
-                </a:solidFill>
-                <a:latin typeface="Consolas" pitchFamily="34" charset="0"/>
-                <a:ea typeface="Consolas" pitchFamily="34" charset="-122"/>
-                <a:cs typeface="Consolas" pitchFamily="34" charset="-120"/>
-              </a:rPr>
-              <a:t>OWASP LLM02:2025 · arXiv:2311.17035</a:t>
-            </a:r>
-            <a:endParaRPr lang="en-US" sz="900" dirty="0"/>
-          </a:p>
-        </p:txBody>
-      </p:sp>
-    </p:spTree>
-  </p:cSld>
-  <p:clrMapOvr>
-    <a:masterClrMapping/>
-  </p:clrMapOvr>
-</p:sld>
-</file>
-
-<file path=ppt/slides/slide11.xml><?xml version="1.0" encoding="utf-8"?>
-<p:sld xmlns:a="http://schemas.openxmlformats.org/drawingml/2006/main" xmlns:r="http://schemas.openxmlformats.org/officeDocument/2006/relationships" xmlns:p="http://schemas.openxmlformats.org/presentationml/2006/main">
   <p:cSld name="Slide 9">
     <p:bg>
       <p:bgPr>
@@ -19634,6 +18525,1246 @@
               <a:t>Authors Guild et al. v. OpenAI</a:t>
             </a:r>
             <a:endParaRPr lang="en-US" sz="900" dirty="0"/>
+          </a:p>
+        </p:txBody>
+      </p:sp>
+    </p:spTree>
+  </p:cSld>
+  <p:clrMapOvr>
+    <a:masterClrMapping/>
+  </p:clrMapOvr>
+</p:sld>
+</file>
+
+<file path=ppt/slides/slide11.xml><?xml version="1.0" encoding="utf-8"?>
+<p:sld xmlns:a="http://schemas.openxmlformats.org/drawingml/2006/main" xmlns:r="http://schemas.openxmlformats.org/officeDocument/2006/relationships" xmlns:p="http://schemas.openxmlformats.org/presentationml/2006/main">
+  <p:cSld name="Slide 7">
+    <p:bg>
+      <p:bgPr>
+        <a:solidFill>
+          <a:srgbClr val="0D1117"/>
+        </a:solidFill>
+        <a:effectLst/>
+      </p:bgPr>
+    </p:bg>
+    <p:spTree>
+      <p:nvGrpSpPr>
+        <p:cNvPr id="1" name=""/>
+        <p:cNvGrpSpPr/>
+        <p:nvPr/>
+      </p:nvGrpSpPr>
+      <p:grpSpPr>
+        <a:xfrm>
+          <a:off x="0" y="0"/>
+          <a:ext cx="0" cy="0"/>
+          <a:chOff x="0" y="0"/>
+          <a:chExt cx="0" cy="0"/>
+        </a:xfrm>
+      </p:grpSpPr>
+      <p:sp>
+        <p:nvSpPr>
+          <p:cNvPr id="2" name="Text 0"/>
+          <p:cNvSpPr/>
+          <p:nvPr/>
+        </p:nvSpPr>
+        <p:spPr>
+          <a:xfrm>
+            <a:off x="548640" y="228600"/>
+            <a:ext cx="3657600" cy="274320"/>
+          </a:xfrm>
+          <a:prstGeom prst="rect">
+            <a:avLst/>
+          </a:prstGeom>
+          <a:noFill/>
+          <a:ln/>
+        </p:spPr>
+        <p:txBody>
+          <a:bodyPr wrap="square" rtlCol="0" anchor="ctr"/>
+          <a:lstStyle/>
+          <a:p>
+            <a:pPr marL="0" indent="0">
+              <a:buNone/>
+            </a:pPr>
+            <a:r>
+              <a:rPr lang="en-US" sz="1100" dirty="0">
+                <a:solidFill>
+                  <a:srgbClr val="8B949E"/>
+                </a:solidFill>
+                <a:latin typeface="Consolas" pitchFamily="34" charset="0"/>
+                <a:ea typeface="Consolas" pitchFamily="34" charset="-122"/>
+                <a:cs typeface="Consolas" pitchFamily="34" charset="-120"/>
+              </a:rPr>
+              <a:t>Stage 1 · Training</a:t>
+            </a:r>
+            <a:endParaRPr lang="en-US" sz="1100" dirty="0"/>
+          </a:p>
+        </p:txBody>
+      </p:sp>
+      <p:sp>
+        <p:nvSpPr>
+          <p:cNvPr id="3" name="Text 1"/>
+          <p:cNvSpPr/>
+          <p:nvPr/>
+        </p:nvSpPr>
+        <p:spPr>
+          <a:xfrm>
+            <a:off x="548640" y="594360"/>
+            <a:ext cx="11091672" cy="502920"/>
+          </a:xfrm>
+          <a:prstGeom prst="rect">
+            <a:avLst/>
+          </a:prstGeom>
+          <a:noFill/>
+          <a:ln/>
+        </p:spPr>
+        <p:txBody>
+          <a:bodyPr wrap="square" rtlCol="0" anchor="ctr"/>
+          <a:lstStyle/>
+          <a:p>
+            <a:pPr marL="0" indent="0">
+              <a:buNone/>
+            </a:pPr>
+            <a:r>
+              <a:rPr lang="en-US" sz="2400" dirty="0">
+                <a:solidFill>
+                  <a:srgbClr val="8B949E"/>
+                </a:solidFill>
+                <a:latin typeface="Consolas" pitchFamily="34" charset="0"/>
+                <a:ea typeface="Consolas" pitchFamily="34" charset="-122"/>
+                <a:cs typeface="Consolas" pitchFamily="34" charset="-120"/>
+              </a:rPr>
+              <a:t>&gt; </a:t>
+            </a:r>
+            <a:r>
+              <a:rPr lang="en-US" sz="2200" b="1" dirty="0">
+                <a:solidFill>
+                  <a:srgbClr val="58A6FF"/>
+                </a:solidFill>
+                <a:latin typeface="Consolas" pitchFamily="34" charset="0"/>
+                <a:ea typeface="Consolas" pitchFamily="34" charset="-122"/>
+                <a:cs typeface="Consolas" pitchFamily="34" charset="-120"/>
+              </a:rPr>
+              <a:t>How to secure sensitive data?</a:t>
+            </a:r>
+            <a:endParaRPr lang="en-US" sz="2400" dirty="0"/>
+          </a:p>
+        </p:txBody>
+      </p:sp>
+      <p:sp>
+        <p:nvSpPr>
+          <p:cNvPr id="4" name="Shape 2"/>
+          <p:cNvSpPr/>
+          <p:nvPr/>
+        </p:nvSpPr>
+        <p:spPr>
+          <a:xfrm>
+            <a:off x="548640" y="1143000"/>
+            <a:ext cx="11091672" cy="13716"/>
+          </a:xfrm>
+          <a:prstGeom prst="rect">
+            <a:avLst/>
+          </a:prstGeom>
+          <a:solidFill>
+            <a:srgbClr val="30363D"/>
+          </a:solidFill>
+          <a:ln/>
+        </p:spPr>
+        <p:txBody>
+          <a:bodyPr/>
+          <a:lstStyle/>
+          <a:p>
+            <a:endParaRPr lang="en-GB"/>
+          </a:p>
+        </p:txBody>
+      </p:sp>
+      <p:sp>
+        <p:nvSpPr>
+          <p:cNvPr id="5" name="Text 3"/>
+          <p:cNvSpPr/>
+          <p:nvPr/>
+        </p:nvSpPr>
+        <p:spPr>
+          <a:xfrm>
+            <a:off x="10972800" y="6446520"/>
+            <a:ext cx="731520" cy="274320"/>
+          </a:xfrm>
+          <a:prstGeom prst="rect">
+            <a:avLst/>
+          </a:prstGeom>
+          <a:noFill/>
+          <a:ln/>
+        </p:spPr>
+        <p:txBody>
+          <a:bodyPr wrap="square" rtlCol="0" anchor="ctr"/>
+          <a:lstStyle/>
+          <a:p>
+            <a:pPr marL="0" indent="0" algn="r">
+              <a:buNone/>
+            </a:pPr>
+            <a:r>
+              <a:rPr lang="en-US" sz="1000" dirty="0">
+                <a:solidFill>
+                  <a:srgbClr val="8B949E"/>
+                </a:solidFill>
+                <a:latin typeface="Consolas" pitchFamily="34" charset="0"/>
+                <a:ea typeface="Consolas" pitchFamily="34" charset="-122"/>
+                <a:cs typeface="Consolas" pitchFamily="34" charset="-120"/>
+              </a:rPr>
+              <a:t>7</a:t>
+            </a:r>
+            <a:endParaRPr lang="en-US" sz="1000" dirty="0"/>
+          </a:p>
+        </p:txBody>
+      </p:sp>
+      <p:sp>
+        <p:nvSpPr>
+          <p:cNvPr id="6" name="Shape 4"/>
+          <p:cNvSpPr/>
+          <p:nvPr/>
+        </p:nvSpPr>
+        <p:spPr>
+          <a:xfrm>
+            <a:off x="548640" y="1325880"/>
+            <a:ext cx="11091672" cy="5074920"/>
+          </a:xfrm>
+          <a:prstGeom prst="roundRect">
+            <a:avLst>
+              <a:gd name="adj" fmla="val 2162"/>
+            </a:avLst>
+          </a:prstGeom>
+          <a:solidFill>
+            <a:srgbClr val="161B22"/>
+          </a:solidFill>
+          <a:ln w="9525">
+            <a:solidFill>
+              <a:srgbClr val="30363D"/>
+            </a:solidFill>
+            <a:prstDash val="solid"/>
+          </a:ln>
+        </p:spPr>
+        <p:txBody>
+          <a:bodyPr/>
+          <a:lstStyle/>
+          <a:p>
+            <a:endParaRPr lang="en-GB" dirty="0"/>
+          </a:p>
+        </p:txBody>
+      </p:sp>
+      <p:sp>
+        <p:nvSpPr>
+          <p:cNvPr id="7" name="Shape 5"/>
+          <p:cNvSpPr/>
+          <p:nvPr/>
+        </p:nvSpPr>
+        <p:spPr>
+          <a:xfrm>
+            <a:off x="914400" y="1645920"/>
+            <a:ext cx="1852574" cy="502920"/>
+          </a:xfrm>
+          <a:prstGeom prst="roundRect">
+            <a:avLst>
+              <a:gd name="adj" fmla="val 10909"/>
+            </a:avLst>
+          </a:prstGeom>
+          <a:solidFill>
+            <a:srgbClr val="161B22"/>
+          </a:solidFill>
+          <a:ln w="9525">
+            <a:solidFill>
+              <a:srgbClr val="30363D"/>
+            </a:solidFill>
+            <a:prstDash val="solid"/>
+          </a:ln>
+        </p:spPr>
+        <p:txBody>
+          <a:bodyPr/>
+          <a:lstStyle/>
+          <a:p>
+            <a:endParaRPr lang="en-GB"/>
+          </a:p>
+        </p:txBody>
+      </p:sp>
+      <p:sp>
+        <p:nvSpPr>
+          <p:cNvPr id="8" name="Text 6"/>
+          <p:cNvSpPr/>
+          <p:nvPr/>
+        </p:nvSpPr>
+        <p:spPr>
+          <a:xfrm>
+            <a:off x="914400" y="1645920"/>
+            <a:ext cx="1852574" cy="502920"/>
+          </a:xfrm>
+          <a:prstGeom prst="rect">
+            <a:avLst/>
+          </a:prstGeom>
+          <a:noFill/>
+          <a:ln/>
+        </p:spPr>
+        <p:txBody>
+          <a:bodyPr wrap="square" rtlCol="0" anchor="ctr"/>
+          <a:lstStyle/>
+          <a:p>
+            <a:pPr marL="0" indent="0" algn="ctr">
+              <a:buNone/>
+            </a:pPr>
+            <a:r>
+              <a:rPr lang="en-US" sz="1100" b="1" dirty="0">
+                <a:solidFill>
+                  <a:srgbClr val="E6EDF3"/>
+                </a:solidFill>
+                <a:latin typeface="Segoe UI" pitchFamily="34" charset="0"/>
+                <a:ea typeface="Segoe UI" pitchFamily="34" charset="-122"/>
+                <a:cs typeface="Segoe UI" pitchFamily="34" charset="-120"/>
+              </a:rPr>
+              <a:t>Internal Docs</a:t>
+            </a:r>
+            <a:endParaRPr lang="en-US" sz="1100" dirty="0"/>
+          </a:p>
+        </p:txBody>
+      </p:sp>
+      <p:sp>
+        <p:nvSpPr>
+          <p:cNvPr id="9" name="Text 7"/>
+          <p:cNvSpPr/>
+          <p:nvPr/>
+        </p:nvSpPr>
+        <p:spPr>
+          <a:xfrm>
+            <a:off x="2766974" y="1645920"/>
+            <a:ext cx="274320" cy="502920"/>
+          </a:xfrm>
+          <a:prstGeom prst="rect">
+            <a:avLst/>
+          </a:prstGeom>
+          <a:noFill/>
+          <a:ln/>
+        </p:spPr>
+        <p:txBody>
+          <a:bodyPr wrap="square" rtlCol="0" anchor="ctr"/>
+          <a:lstStyle/>
+          <a:p>
+            <a:pPr marL="0" indent="0" algn="ctr">
+              <a:buNone/>
+            </a:pPr>
+            <a:r>
+              <a:rPr lang="en-US" sz="1600" dirty="0">
+                <a:solidFill>
+                  <a:srgbClr val="D29922"/>
+                </a:solidFill>
+                <a:latin typeface="Segoe UI" pitchFamily="34" charset="0"/>
+                <a:ea typeface="Segoe UI" pitchFamily="34" charset="-122"/>
+                <a:cs typeface="Segoe UI" pitchFamily="34" charset="-120"/>
+              </a:rPr>
+              <a:t>→</a:t>
+            </a:r>
+            <a:endParaRPr lang="en-US" sz="1600" dirty="0"/>
+          </a:p>
+        </p:txBody>
+      </p:sp>
+      <p:sp>
+        <p:nvSpPr>
+          <p:cNvPr id="10" name="Shape 8"/>
+          <p:cNvSpPr/>
+          <p:nvPr/>
+        </p:nvSpPr>
+        <p:spPr>
+          <a:xfrm>
+            <a:off x="3041294" y="1645920"/>
+            <a:ext cx="1852574" cy="502920"/>
+          </a:xfrm>
+          <a:prstGeom prst="roundRect">
+            <a:avLst>
+              <a:gd name="adj" fmla="val 10909"/>
+            </a:avLst>
+          </a:prstGeom>
+          <a:solidFill>
+            <a:srgbClr val="161B22"/>
+          </a:solidFill>
+          <a:ln w="9525">
+            <a:solidFill>
+              <a:srgbClr val="30363D"/>
+            </a:solidFill>
+            <a:prstDash val="solid"/>
+          </a:ln>
+        </p:spPr>
+        <p:txBody>
+          <a:bodyPr/>
+          <a:lstStyle/>
+          <a:p>
+            <a:endParaRPr lang="en-GB"/>
+          </a:p>
+        </p:txBody>
+      </p:sp>
+      <p:sp>
+        <p:nvSpPr>
+          <p:cNvPr id="11" name="Text 9"/>
+          <p:cNvSpPr/>
+          <p:nvPr/>
+        </p:nvSpPr>
+        <p:spPr>
+          <a:xfrm>
+            <a:off x="3041294" y="1645920"/>
+            <a:ext cx="1852574" cy="502920"/>
+          </a:xfrm>
+          <a:prstGeom prst="rect">
+            <a:avLst/>
+          </a:prstGeom>
+          <a:noFill/>
+          <a:ln/>
+        </p:spPr>
+        <p:txBody>
+          <a:bodyPr wrap="square" rtlCol="0" anchor="ctr"/>
+          <a:lstStyle/>
+          <a:p>
+            <a:pPr marL="0" indent="0" algn="ctr">
+              <a:buNone/>
+            </a:pPr>
+            <a:r>
+              <a:rPr lang="en-US" sz="1100" b="1" dirty="0">
+                <a:solidFill>
+                  <a:srgbClr val="E6EDF3"/>
+                </a:solidFill>
+                <a:latin typeface="Segoe UI" pitchFamily="34" charset="0"/>
+                <a:ea typeface="Segoe UI" pitchFamily="34" charset="-122"/>
+                <a:cs typeface="Segoe UI" pitchFamily="34" charset="-120"/>
+              </a:rPr>
+              <a:t>Classification</a:t>
+            </a:r>
+            <a:endParaRPr lang="en-US" sz="1100" dirty="0"/>
+          </a:p>
+        </p:txBody>
+      </p:sp>
+      <p:sp>
+        <p:nvSpPr>
+          <p:cNvPr id="12" name="Text 10"/>
+          <p:cNvSpPr/>
+          <p:nvPr/>
+        </p:nvSpPr>
+        <p:spPr>
+          <a:xfrm>
+            <a:off x="4893869" y="1645920"/>
+            <a:ext cx="274320" cy="502920"/>
+          </a:xfrm>
+          <a:prstGeom prst="rect">
+            <a:avLst/>
+          </a:prstGeom>
+          <a:noFill/>
+          <a:ln/>
+        </p:spPr>
+        <p:txBody>
+          <a:bodyPr wrap="square" rtlCol="0" anchor="ctr"/>
+          <a:lstStyle/>
+          <a:p>
+            <a:pPr marL="0" indent="0" algn="ctr">
+              <a:buNone/>
+            </a:pPr>
+            <a:r>
+              <a:rPr lang="en-US" sz="1600" dirty="0">
+                <a:solidFill>
+                  <a:srgbClr val="D29922"/>
+                </a:solidFill>
+                <a:latin typeface="Segoe UI" pitchFamily="34" charset="0"/>
+                <a:ea typeface="Segoe UI" pitchFamily="34" charset="-122"/>
+                <a:cs typeface="Segoe UI" pitchFamily="34" charset="-120"/>
+              </a:rPr>
+              <a:t>→</a:t>
+            </a:r>
+            <a:endParaRPr lang="en-US" sz="1600" dirty="0"/>
+          </a:p>
+        </p:txBody>
+      </p:sp>
+      <p:sp>
+        <p:nvSpPr>
+          <p:cNvPr id="13" name="Shape 11"/>
+          <p:cNvSpPr/>
+          <p:nvPr/>
+        </p:nvSpPr>
+        <p:spPr>
+          <a:xfrm>
+            <a:off x="5168189" y="1645920"/>
+            <a:ext cx="1852574" cy="502920"/>
+          </a:xfrm>
+          <a:prstGeom prst="roundRect">
+            <a:avLst>
+              <a:gd name="adj" fmla="val 10909"/>
+            </a:avLst>
+          </a:prstGeom>
+          <a:solidFill>
+            <a:srgbClr val="161B22"/>
+          </a:solidFill>
+          <a:ln w="9525">
+            <a:solidFill>
+              <a:srgbClr val="30363D"/>
+            </a:solidFill>
+            <a:prstDash val="solid"/>
+          </a:ln>
+        </p:spPr>
+        <p:txBody>
+          <a:bodyPr/>
+          <a:lstStyle/>
+          <a:p>
+            <a:endParaRPr lang="en-GB"/>
+          </a:p>
+        </p:txBody>
+      </p:sp>
+      <p:sp>
+        <p:nvSpPr>
+          <p:cNvPr id="14" name="Text 12"/>
+          <p:cNvSpPr/>
+          <p:nvPr/>
+        </p:nvSpPr>
+        <p:spPr>
+          <a:xfrm>
+            <a:off x="5168189" y="1645920"/>
+            <a:ext cx="1852574" cy="502920"/>
+          </a:xfrm>
+          <a:prstGeom prst="rect">
+            <a:avLst/>
+          </a:prstGeom>
+          <a:noFill/>
+          <a:ln/>
+        </p:spPr>
+        <p:txBody>
+          <a:bodyPr wrap="square" rtlCol="0" anchor="ctr"/>
+          <a:lstStyle/>
+          <a:p>
+            <a:pPr marL="0" indent="0" algn="ctr">
+              <a:buNone/>
+            </a:pPr>
+            <a:r>
+              <a:rPr lang="en-US" sz="1100" b="1" dirty="0">
+                <a:solidFill>
+                  <a:srgbClr val="E6EDF3"/>
+                </a:solidFill>
+                <a:latin typeface="Segoe UI" pitchFamily="34" charset="0"/>
+                <a:ea typeface="Segoe UI" pitchFamily="34" charset="-122"/>
+                <a:cs typeface="Segoe UI" pitchFamily="34" charset="-120"/>
+              </a:rPr>
+              <a:t>Redaction</a:t>
+            </a:r>
+            <a:endParaRPr lang="en-US" sz="1100" dirty="0"/>
+          </a:p>
+        </p:txBody>
+      </p:sp>
+      <p:sp>
+        <p:nvSpPr>
+          <p:cNvPr id="15" name="Text 13"/>
+          <p:cNvSpPr/>
+          <p:nvPr/>
+        </p:nvSpPr>
+        <p:spPr>
+          <a:xfrm>
+            <a:off x="7020763" y="1645920"/>
+            <a:ext cx="274320" cy="502920"/>
+          </a:xfrm>
+          <a:prstGeom prst="rect">
+            <a:avLst/>
+          </a:prstGeom>
+          <a:noFill/>
+          <a:ln/>
+        </p:spPr>
+        <p:txBody>
+          <a:bodyPr wrap="square" rtlCol="0" anchor="ctr"/>
+          <a:lstStyle/>
+          <a:p>
+            <a:pPr marL="0" indent="0" algn="ctr">
+              <a:buNone/>
+            </a:pPr>
+            <a:r>
+              <a:rPr lang="en-US" sz="1600" dirty="0">
+                <a:solidFill>
+                  <a:srgbClr val="D29922"/>
+                </a:solidFill>
+                <a:latin typeface="Segoe UI" pitchFamily="34" charset="0"/>
+                <a:ea typeface="Segoe UI" pitchFamily="34" charset="-122"/>
+                <a:cs typeface="Segoe UI" pitchFamily="34" charset="-120"/>
+              </a:rPr>
+              <a:t>→</a:t>
+            </a:r>
+            <a:endParaRPr lang="en-US" sz="1600" dirty="0"/>
+          </a:p>
+        </p:txBody>
+      </p:sp>
+      <p:sp>
+        <p:nvSpPr>
+          <p:cNvPr id="16" name="Shape 14"/>
+          <p:cNvSpPr/>
+          <p:nvPr/>
+        </p:nvSpPr>
+        <p:spPr>
+          <a:xfrm>
+            <a:off x="7295083" y="1645920"/>
+            <a:ext cx="1852574" cy="502920"/>
+          </a:xfrm>
+          <a:prstGeom prst="roundRect">
+            <a:avLst>
+              <a:gd name="adj" fmla="val 10909"/>
+            </a:avLst>
+          </a:prstGeom>
+          <a:solidFill>
+            <a:srgbClr val="161B22"/>
+          </a:solidFill>
+          <a:ln w="9525">
+            <a:solidFill>
+              <a:srgbClr val="30363D"/>
+            </a:solidFill>
+            <a:prstDash val="solid"/>
+          </a:ln>
+        </p:spPr>
+        <p:txBody>
+          <a:bodyPr/>
+          <a:lstStyle/>
+          <a:p>
+            <a:endParaRPr lang="en-GB"/>
+          </a:p>
+        </p:txBody>
+      </p:sp>
+      <p:sp>
+        <p:nvSpPr>
+          <p:cNvPr id="17" name="Text 15"/>
+          <p:cNvSpPr/>
+          <p:nvPr/>
+        </p:nvSpPr>
+        <p:spPr>
+          <a:xfrm>
+            <a:off x="7295083" y="1645920"/>
+            <a:ext cx="1852574" cy="502920"/>
+          </a:xfrm>
+          <a:prstGeom prst="rect">
+            <a:avLst/>
+          </a:prstGeom>
+          <a:noFill/>
+          <a:ln/>
+        </p:spPr>
+        <p:txBody>
+          <a:bodyPr wrap="square" rtlCol="0" anchor="ctr"/>
+          <a:lstStyle/>
+          <a:p>
+            <a:pPr marL="0" indent="0" algn="ctr">
+              <a:buNone/>
+            </a:pPr>
+            <a:r>
+              <a:rPr lang="en-US" sz="1100" b="1" dirty="0">
+                <a:solidFill>
+                  <a:srgbClr val="E6EDF3"/>
+                </a:solidFill>
+                <a:latin typeface="Segoe UI" pitchFamily="34" charset="0"/>
+                <a:ea typeface="Segoe UI" pitchFamily="34" charset="-122"/>
+                <a:cs typeface="Segoe UI" pitchFamily="34" charset="-120"/>
+              </a:rPr>
+              <a:t>Training Pipeline</a:t>
+            </a:r>
+            <a:endParaRPr lang="en-US" sz="1100" dirty="0"/>
+          </a:p>
+        </p:txBody>
+      </p:sp>
+      <p:sp>
+        <p:nvSpPr>
+          <p:cNvPr id="18" name="Text 16"/>
+          <p:cNvSpPr/>
+          <p:nvPr/>
+        </p:nvSpPr>
+        <p:spPr>
+          <a:xfrm>
+            <a:off x="9147658" y="1645920"/>
+            <a:ext cx="274320" cy="502920"/>
+          </a:xfrm>
+          <a:prstGeom prst="rect">
+            <a:avLst/>
+          </a:prstGeom>
+          <a:noFill/>
+          <a:ln/>
+        </p:spPr>
+        <p:txBody>
+          <a:bodyPr wrap="square" rtlCol="0" anchor="ctr"/>
+          <a:lstStyle/>
+          <a:p>
+            <a:pPr marL="0" indent="0" algn="ctr">
+              <a:buNone/>
+            </a:pPr>
+            <a:r>
+              <a:rPr lang="en-US" sz="1600" dirty="0">
+                <a:solidFill>
+                  <a:srgbClr val="D29922"/>
+                </a:solidFill>
+                <a:latin typeface="Segoe UI" pitchFamily="34" charset="0"/>
+                <a:ea typeface="Segoe UI" pitchFamily="34" charset="-122"/>
+                <a:cs typeface="Segoe UI" pitchFamily="34" charset="-120"/>
+              </a:rPr>
+              <a:t>→</a:t>
+            </a:r>
+            <a:endParaRPr lang="en-US" sz="1600" dirty="0"/>
+          </a:p>
+        </p:txBody>
+      </p:sp>
+      <p:sp>
+        <p:nvSpPr>
+          <p:cNvPr id="19" name="Shape 17"/>
+          <p:cNvSpPr/>
+          <p:nvPr/>
+        </p:nvSpPr>
+        <p:spPr>
+          <a:xfrm>
+            <a:off x="9421978" y="1645920"/>
+            <a:ext cx="1852574" cy="502920"/>
+          </a:xfrm>
+          <a:prstGeom prst="roundRect">
+            <a:avLst>
+              <a:gd name="adj" fmla="val 10909"/>
+            </a:avLst>
+          </a:prstGeom>
+          <a:solidFill>
+            <a:srgbClr val="161B22"/>
+          </a:solidFill>
+          <a:ln w="9525">
+            <a:solidFill>
+              <a:srgbClr val="30363D"/>
+            </a:solidFill>
+            <a:prstDash val="solid"/>
+          </a:ln>
+        </p:spPr>
+        <p:txBody>
+          <a:bodyPr/>
+          <a:lstStyle/>
+          <a:p>
+            <a:endParaRPr lang="en-GB"/>
+          </a:p>
+        </p:txBody>
+      </p:sp>
+      <p:sp>
+        <p:nvSpPr>
+          <p:cNvPr id="20" name="Text 18"/>
+          <p:cNvSpPr/>
+          <p:nvPr/>
+        </p:nvSpPr>
+        <p:spPr>
+          <a:xfrm>
+            <a:off x="9421978" y="1645920"/>
+            <a:ext cx="1852574" cy="502920"/>
+          </a:xfrm>
+          <a:prstGeom prst="rect">
+            <a:avLst/>
+          </a:prstGeom>
+          <a:noFill/>
+          <a:ln/>
+        </p:spPr>
+        <p:txBody>
+          <a:bodyPr wrap="square" rtlCol="0" anchor="ctr"/>
+          <a:lstStyle/>
+          <a:p>
+            <a:pPr marL="0" indent="0" algn="ctr">
+              <a:buNone/>
+            </a:pPr>
+            <a:r>
+              <a:rPr lang="en-US" sz="1100" b="1" dirty="0">
+                <a:solidFill>
+                  <a:srgbClr val="E6EDF3"/>
+                </a:solidFill>
+                <a:latin typeface="Segoe UI" pitchFamily="34" charset="0"/>
+                <a:ea typeface="Segoe UI" pitchFamily="34" charset="-122"/>
+                <a:cs typeface="Segoe UI" pitchFamily="34" charset="-120"/>
+              </a:rPr>
+              <a:t>Model Behavior</a:t>
+            </a:r>
+            <a:endParaRPr lang="en-US" sz="1100" dirty="0"/>
+          </a:p>
+        </p:txBody>
+      </p:sp>
+      <p:sp>
+        <p:nvSpPr>
+          <p:cNvPr id="21" name="Text 19"/>
+          <p:cNvSpPr/>
+          <p:nvPr/>
+        </p:nvSpPr>
+        <p:spPr>
+          <a:xfrm>
+            <a:off x="914400" y="3295650"/>
+            <a:ext cx="10360152" cy="2007870"/>
+          </a:xfrm>
+          <a:prstGeom prst="rect">
+            <a:avLst/>
+          </a:prstGeom>
+          <a:noFill/>
+          <a:ln/>
+        </p:spPr>
+        <p:txBody>
+          <a:bodyPr wrap="square" rtlCol="0" anchor="t"/>
+          <a:lstStyle/>
+          <a:p>
+            <a:pPr marL="342900" indent="-342900">
+              <a:lnSpc>
+                <a:spcPct val="135000"/>
+              </a:lnSpc>
+              <a:spcBef>
+                <a:spcPts val="400"/>
+              </a:spcBef>
+              <a:buSzPct val="100000"/>
+              <a:buChar char="•"/>
+            </a:pPr>
+            <a:r>
+              <a:rPr lang="en-US" sz="1300" dirty="0">
+                <a:solidFill>
+                  <a:srgbClr val="E6EDF3"/>
+                </a:solidFill>
+                <a:latin typeface="Segoe UI" pitchFamily="34" charset="0"/>
+                <a:ea typeface="Segoe UI" pitchFamily="34" charset="-122"/>
+                <a:cs typeface="Segoe UI" pitchFamily="34" charset="-120"/>
+              </a:rPr>
+              <a:t>Training on internal data is a data-placement decision, not just a quality decision</a:t>
+            </a:r>
+            <a:endParaRPr lang="en-US" sz="1300" dirty="0"/>
+          </a:p>
+          <a:p>
+            <a:pPr marL="342900" indent="-342900">
+              <a:lnSpc>
+                <a:spcPct val="135000"/>
+              </a:lnSpc>
+              <a:spcBef>
+                <a:spcPts val="400"/>
+              </a:spcBef>
+              <a:buSzPct val="100000"/>
+              <a:buChar char="•"/>
+            </a:pPr>
+            <a:r>
+              <a:rPr lang="en-US" sz="1300" dirty="0">
+                <a:solidFill>
+                  <a:srgbClr val="E6EDF3"/>
+                </a:solidFill>
+                <a:latin typeface="Segoe UI" pitchFamily="34" charset="0"/>
+                <a:ea typeface="Segoe UI" pitchFamily="34" charset="-122"/>
+                <a:cs typeface="Segoe UI" pitchFamily="34" charset="-120"/>
+              </a:rPr>
+              <a:t>Model weights become a fuzzy, hard-to-query, hard-to-delete storage layer</a:t>
+            </a:r>
+            <a:endParaRPr lang="en-US" sz="1300" dirty="0"/>
+          </a:p>
+          <a:p>
+            <a:pPr marL="342900" indent="-342900">
+              <a:lnSpc>
+                <a:spcPct val="135000"/>
+              </a:lnSpc>
+              <a:spcBef>
+                <a:spcPts val="400"/>
+              </a:spcBef>
+              <a:buSzPct val="100000"/>
+              <a:buChar char="•"/>
+            </a:pPr>
+            <a:r>
+              <a:rPr lang="en-US" sz="1300" dirty="0">
+                <a:solidFill>
+                  <a:srgbClr val="E6EDF3"/>
+                </a:solidFill>
+                <a:latin typeface="Segoe UI" pitchFamily="34" charset="0"/>
+                <a:ea typeface="Segoe UI" pitchFamily="34" charset="-122"/>
+                <a:cs typeface="Segoe UI" pitchFamily="34" charset="-120"/>
+              </a:rPr>
+              <a:t>Cannot apply database ACLs to model weights</a:t>
+            </a:r>
+            <a:endParaRPr lang="en-US" sz="1300" dirty="0"/>
+          </a:p>
+        </p:txBody>
+      </p:sp>
+      <p:sp>
+        <p:nvSpPr>
+          <p:cNvPr id="22" name="Shape 20"/>
+          <p:cNvSpPr/>
+          <p:nvPr/>
+        </p:nvSpPr>
+        <p:spPr>
+          <a:xfrm>
+            <a:off x="731520" y="5669280"/>
+            <a:ext cx="54864" cy="411480"/>
+          </a:xfrm>
+          <a:prstGeom prst="rect">
+            <a:avLst/>
+          </a:prstGeom>
+          <a:solidFill>
+            <a:srgbClr val="3FB950"/>
+          </a:solidFill>
+          <a:ln/>
+        </p:spPr>
+        <p:txBody>
+          <a:bodyPr/>
+          <a:lstStyle/>
+          <a:p>
+            <a:endParaRPr lang="en-GB"/>
+          </a:p>
+        </p:txBody>
+      </p:sp>
+      <p:sp>
+        <p:nvSpPr>
+          <p:cNvPr id="23" name="Text 21"/>
+          <p:cNvSpPr/>
+          <p:nvPr/>
+        </p:nvSpPr>
+        <p:spPr>
+          <a:xfrm>
+            <a:off x="960120" y="5669280"/>
+            <a:ext cx="10497312" cy="411480"/>
+          </a:xfrm>
+          <a:prstGeom prst="rect">
+            <a:avLst/>
+          </a:prstGeom>
+          <a:noFill/>
+          <a:ln/>
+        </p:spPr>
+        <p:txBody>
+          <a:bodyPr wrap="square" rtlCol="0" anchor="ctr"/>
+          <a:lstStyle/>
+          <a:p>
+            <a:pPr marL="0" indent="0">
+              <a:buNone/>
+            </a:pPr>
+            <a:r>
+              <a:rPr lang="en-US" sz="1400" b="1" i="1" dirty="0">
+                <a:solidFill>
+                  <a:srgbClr val="3FB950"/>
+                </a:solidFill>
+                <a:latin typeface="Segoe UI" pitchFamily="34" charset="0"/>
+                <a:ea typeface="Segoe UI" pitchFamily="34" charset="-122"/>
+                <a:cs typeface="Segoe UI" pitchFamily="34" charset="-120"/>
+              </a:rPr>
+              <a:t>Training on internal data can turn model behavior into a sensitive-data artifact.</a:t>
+            </a:r>
+            <a:endParaRPr lang="en-US" sz="1400" dirty="0"/>
+          </a:p>
+        </p:txBody>
+      </p:sp>
+      <p:sp>
+        <p:nvSpPr>
+          <p:cNvPr id="25" name="Shape 20">
+            <a:extLst>
+              <a:ext uri="{FF2B5EF4-FFF2-40B4-BE49-F238E27FC236}">
+                <a16:creationId xmlns:a16="http://schemas.microsoft.com/office/drawing/2014/main" id="{8C8614B8-A6C5-130E-EFB6-1459706AB5B2}"/>
+              </a:ext>
+            </a:extLst>
+          </p:cNvPr>
+          <p:cNvSpPr/>
+          <p:nvPr/>
+        </p:nvSpPr>
+        <p:spPr>
+          <a:xfrm>
+            <a:off x="1715414" y="2607945"/>
+            <a:ext cx="2103120" cy="365760"/>
+          </a:xfrm>
+          <a:prstGeom prst="roundRect">
+            <a:avLst>
+              <a:gd name="adj" fmla="val 15000"/>
+            </a:avLst>
+          </a:prstGeom>
+          <a:solidFill>
+            <a:srgbClr val="161B22"/>
+          </a:solidFill>
+          <a:ln w="9525">
+            <a:solidFill>
+              <a:srgbClr val="D29922"/>
+            </a:solidFill>
+            <a:prstDash val="dash"/>
+          </a:ln>
+        </p:spPr>
+        <p:txBody>
+          <a:bodyPr/>
+          <a:lstStyle/>
+          <a:p>
+            <a:endParaRPr lang="en-GB"/>
+          </a:p>
+        </p:txBody>
+      </p:sp>
+      <p:sp>
+        <p:nvSpPr>
+          <p:cNvPr id="26" name="Text 21">
+            <a:extLst>
+              <a:ext uri="{FF2B5EF4-FFF2-40B4-BE49-F238E27FC236}">
+                <a16:creationId xmlns:a16="http://schemas.microsoft.com/office/drawing/2014/main" id="{5D0495CF-218D-F779-8FB1-C276A8B81420}"/>
+              </a:ext>
+            </a:extLst>
+          </p:cNvPr>
+          <p:cNvSpPr/>
+          <p:nvPr/>
+        </p:nvSpPr>
+        <p:spPr>
+          <a:xfrm>
+            <a:off x="1715414" y="2607945"/>
+            <a:ext cx="2103120" cy="365760"/>
+          </a:xfrm>
+          <a:prstGeom prst="rect">
+            <a:avLst/>
+          </a:prstGeom>
+          <a:noFill/>
+          <a:ln/>
+        </p:spPr>
+        <p:txBody>
+          <a:bodyPr wrap="square" rtlCol="0" anchor="ctr"/>
+          <a:lstStyle/>
+          <a:p>
+            <a:pPr marL="0" indent="0" algn="ctr">
+              <a:buNone/>
+            </a:pPr>
+            <a:r>
+              <a:rPr lang="en-US" sz="1000" dirty="0">
+                <a:solidFill>
+                  <a:srgbClr val="D29922"/>
+                </a:solidFill>
+                <a:latin typeface="Segoe UI" pitchFamily="34" charset="0"/>
+                <a:ea typeface="Segoe UI" pitchFamily="34" charset="-122"/>
+                <a:cs typeface="Segoe UI" pitchFamily="34" charset="-120"/>
+              </a:rPr>
+              <a:t>Track dataset lineage</a:t>
+            </a:r>
+            <a:endParaRPr lang="en-US" sz="1000" dirty="0"/>
+          </a:p>
+        </p:txBody>
+      </p:sp>
+      <p:sp>
+        <p:nvSpPr>
+          <p:cNvPr id="27" name="Shape 20">
+            <a:extLst>
+              <a:ext uri="{FF2B5EF4-FFF2-40B4-BE49-F238E27FC236}">
+                <a16:creationId xmlns:a16="http://schemas.microsoft.com/office/drawing/2014/main" id="{2F69BF65-4778-B5A9-003A-EE5D21675AC6}"/>
+              </a:ext>
+            </a:extLst>
+          </p:cNvPr>
+          <p:cNvSpPr/>
+          <p:nvPr/>
+        </p:nvSpPr>
+        <p:spPr>
+          <a:xfrm>
+            <a:off x="3992880" y="2601849"/>
+            <a:ext cx="2103120" cy="365760"/>
+          </a:xfrm>
+          <a:prstGeom prst="roundRect">
+            <a:avLst>
+              <a:gd name="adj" fmla="val 15000"/>
+            </a:avLst>
+          </a:prstGeom>
+          <a:solidFill>
+            <a:srgbClr val="161B22"/>
+          </a:solidFill>
+          <a:ln w="9525">
+            <a:solidFill>
+              <a:srgbClr val="D29922"/>
+            </a:solidFill>
+            <a:prstDash val="dash"/>
+          </a:ln>
+        </p:spPr>
+        <p:txBody>
+          <a:bodyPr/>
+          <a:lstStyle/>
+          <a:p>
+            <a:endParaRPr lang="en-GB"/>
+          </a:p>
+        </p:txBody>
+      </p:sp>
+      <p:sp>
+        <p:nvSpPr>
+          <p:cNvPr id="28" name="Text 21">
+            <a:extLst>
+              <a:ext uri="{FF2B5EF4-FFF2-40B4-BE49-F238E27FC236}">
+                <a16:creationId xmlns:a16="http://schemas.microsoft.com/office/drawing/2014/main" id="{2661766B-7B2E-3890-6382-17B3A7220243}"/>
+              </a:ext>
+            </a:extLst>
+          </p:cNvPr>
+          <p:cNvSpPr/>
+          <p:nvPr/>
+        </p:nvSpPr>
+        <p:spPr>
+          <a:xfrm>
+            <a:off x="3992880" y="2601849"/>
+            <a:ext cx="2103120" cy="365760"/>
+          </a:xfrm>
+          <a:prstGeom prst="rect">
+            <a:avLst/>
+          </a:prstGeom>
+          <a:noFill/>
+          <a:ln/>
+        </p:spPr>
+        <p:txBody>
+          <a:bodyPr wrap="square" rtlCol="0" anchor="ctr"/>
+          <a:lstStyle/>
+          <a:p>
+            <a:pPr marL="0" indent="0" algn="ctr">
+              <a:buNone/>
+            </a:pPr>
+            <a:r>
+              <a:rPr lang="en-US" sz="1000" dirty="0">
+                <a:solidFill>
+                  <a:srgbClr val="D29922"/>
+                </a:solidFill>
+                <a:latin typeface="Segoe UI" pitchFamily="34" charset="0"/>
+                <a:cs typeface="Segoe UI" pitchFamily="34" charset="-120"/>
+              </a:rPr>
+              <a:t>Test memorization before release</a:t>
+            </a:r>
+            <a:endParaRPr lang="en-US" sz="1000" dirty="0"/>
+          </a:p>
+        </p:txBody>
+      </p:sp>
+      <p:sp>
+        <p:nvSpPr>
+          <p:cNvPr id="29" name="Shape 20">
+            <a:extLst>
+              <a:ext uri="{FF2B5EF4-FFF2-40B4-BE49-F238E27FC236}">
+                <a16:creationId xmlns:a16="http://schemas.microsoft.com/office/drawing/2014/main" id="{E2FE3ED6-066F-F3B0-D29A-7EB3B8B8FD82}"/>
+              </a:ext>
+            </a:extLst>
+          </p:cNvPr>
+          <p:cNvSpPr/>
+          <p:nvPr/>
+        </p:nvSpPr>
+        <p:spPr>
+          <a:xfrm>
+            <a:off x="6270347" y="2594229"/>
+            <a:ext cx="2311677" cy="365760"/>
+          </a:xfrm>
+          <a:prstGeom prst="roundRect">
+            <a:avLst>
+              <a:gd name="adj" fmla="val 15000"/>
+            </a:avLst>
+          </a:prstGeom>
+          <a:solidFill>
+            <a:srgbClr val="161B22"/>
+          </a:solidFill>
+          <a:ln w="9525">
+            <a:solidFill>
+              <a:srgbClr val="D29922"/>
+            </a:solidFill>
+            <a:prstDash val="dash"/>
+          </a:ln>
+        </p:spPr>
+        <p:txBody>
+          <a:bodyPr/>
+          <a:lstStyle/>
+          <a:p>
+            <a:endParaRPr lang="en-GB"/>
+          </a:p>
+        </p:txBody>
+      </p:sp>
+      <p:sp>
+        <p:nvSpPr>
+          <p:cNvPr id="30" name="Text 21">
+            <a:extLst>
+              <a:ext uri="{FF2B5EF4-FFF2-40B4-BE49-F238E27FC236}">
+                <a16:creationId xmlns:a16="http://schemas.microsoft.com/office/drawing/2014/main" id="{9CBA17C0-D8DA-DC32-2CBD-06B31776D15C}"/>
+              </a:ext>
+            </a:extLst>
+          </p:cNvPr>
+          <p:cNvSpPr/>
+          <p:nvPr/>
+        </p:nvSpPr>
+        <p:spPr>
+          <a:xfrm>
+            <a:off x="6270347" y="2594229"/>
+            <a:ext cx="2277465" cy="365760"/>
+          </a:xfrm>
+          <a:prstGeom prst="rect">
+            <a:avLst/>
+          </a:prstGeom>
+          <a:noFill/>
+          <a:ln/>
+        </p:spPr>
+        <p:txBody>
+          <a:bodyPr wrap="square" rtlCol="0" anchor="ctr"/>
+          <a:lstStyle/>
+          <a:p>
+            <a:pPr marL="0" indent="0" algn="ctr">
+              <a:buNone/>
+            </a:pPr>
+            <a:r>
+              <a:rPr lang="en-US" sz="1000" dirty="0">
+                <a:solidFill>
+                  <a:srgbClr val="D29922"/>
+                </a:solidFill>
+                <a:latin typeface="Segoe UI" pitchFamily="34" charset="0"/>
+                <a:cs typeface="Segoe UI" pitchFamily="34" charset="-120"/>
+              </a:rPr>
+              <a:t>Plan rollback and model retirement</a:t>
+            </a:r>
+            <a:endParaRPr lang="en-US" sz="1000" dirty="0"/>
+          </a:p>
+        </p:txBody>
+      </p:sp>
+      <p:sp>
+        <p:nvSpPr>
+          <p:cNvPr id="32" name="Shape 20">
+            <a:extLst>
+              <a:ext uri="{FF2B5EF4-FFF2-40B4-BE49-F238E27FC236}">
+                <a16:creationId xmlns:a16="http://schemas.microsoft.com/office/drawing/2014/main" id="{980FAC2D-F320-C89D-16FF-832127B22912}"/>
+              </a:ext>
+            </a:extLst>
+          </p:cNvPr>
+          <p:cNvSpPr/>
+          <p:nvPr/>
+        </p:nvSpPr>
+        <p:spPr>
+          <a:xfrm>
+            <a:off x="8756371" y="2586228"/>
+            <a:ext cx="2311677" cy="365760"/>
+          </a:xfrm>
+          <a:prstGeom prst="roundRect">
+            <a:avLst>
+              <a:gd name="adj" fmla="val 15000"/>
+            </a:avLst>
+          </a:prstGeom>
+          <a:solidFill>
+            <a:srgbClr val="161B22"/>
+          </a:solidFill>
+          <a:ln w="9525">
+            <a:solidFill>
+              <a:srgbClr val="D29922"/>
+            </a:solidFill>
+            <a:prstDash val="dash"/>
+          </a:ln>
+        </p:spPr>
+        <p:txBody>
+          <a:bodyPr/>
+          <a:lstStyle/>
+          <a:p>
+            <a:endParaRPr lang="en-GB"/>
+          </a:p>
+        </p:txBody>
+      </p:sp>
+      <p:sp>
+        <p:nvSpPr>
+          <p:cNvPr id="33" name="Text 21">
+            <a:extLst>
+              <a:ext uri="{FF2B5EF4-FFF2-40B4-BE49-F238E27FC236}">
+                <a16:creationId xmlns:a16="http://schemas.microsoft.com/office/drawing/2014/main" id="{1B17AB86-D4F0-A616-CAF5-8F91070D7C02}"/>
+              </a:ext>
+            </a:extLst>
+          </p:cNvPr>
+          <p:cNvSpPr/>
+          <p:nvPr/>
+        </p:nvSpPr>
+        <p:spPr>
+          <a:xfrm>
+            <a:off x="8756371" y="2586228"/>
+            <a:ext cx="2277465" cy="365760"/>
+          </a:xfrm>
+          <a:prstGeom prst="rect">
+            <a:avLst/>
+          </a:prstGeom>
+          <a:noFill/>
+          <a:ln/>
+        </p:spPr>
+        <p:txBody>
+          <a:bodyPr wrap="square" rtlCol="0" anchor="ctr"/>
+          <a:lstStyle/>
+          <a:p>
+            <a:pPr marL="0" indent="0" algn="ctr">
+              <a:buNone/>
+            </a:pPr>
+            <a:r>
+              <a:rPr lang="en-US" sz="1000" dirty="0">
+                <a:solidFill>
+                  <a:srgbClr val="D29922"/>
+                </a:solidFill>
+                <a:latin typeface="Segoe UI" pitchFamily="34" charset="0"/>
+                <a:cs typeface="Segoe UI" pitchFamily="34" charset="-120"/>
+              </a:rPr>
+              <a:t>Hard to enforce record permissions</a:t>
+            </a:r>
+            <a:endParaRPr lang="en-US" sz="1000" dirty="0"/>
           </a:p>
         </p:txBody>
       </p:sp>
@@ -19753,7 +19884,7 @@
                 <a:ea typeface="Consolas" pitchFamily="34" charset="-122"/>
                 <a:cs typeface="Consolas" pitchFamily="34" charset="-120"/>
               </a:rPr>
-              <a:t>Is my data safe?</a:t>
+              <a:t>What data should not be used for training?</a:t>
             </a:r>
             <a:endParaRPr lang="en-US" sz="2400" dirty="0"/>
           </a:p>
@@ -20721,7 +20852,7 @@
               <a:t>&gt; </a:t>
             </a:r>
             <a:r>
-              <a:rPr lang="en-US" sz="2200" b="1" dirty="0">
+              <a:rPr lang="ru-RU" sz="2200" b="1" dirty="0">
                 <a:solidFill>
                   <a:srgbClr val="3FB950"/>
                 </a:solidFill>
@@ -20729,7 +20860,18 @@
                 <a:ea typeface="Consolas" pitchFamily="34" charset="-122"/>
                 <a:cs typeface="Consolas" pitchFamily="34" charset="-120"/>
               </a:rPr>
-              <a:t>What should we do?</a:t>
+              <a:t>С</a:t>
+            </a:r>
+            <a:r>
+              <a:rPr lang="en-US" sz="2200" b="1" dirty="0">
+                <a:solidFill>
+                  <a:srgbClr val="3FB950"/>
+                </a:solidFill>
+                <a:latin typeface="Consolas" pitchFamily="34" charset="0"/>
+                <a:ea typeface="Consolas" pitchFamily="34" charset="-122"/>
+                <a:cs typeface="Consolas" pitchFamily="34" charset="-120"/>
+              </a:rPr>
+              <a:t>an we see a demo?</a:t>
             </a:r>
             <a:endParaRPr lang="en-US" sz="2400" dirty="0"/>
           </a:p>
@@ -26362,7 +26504,7 @@
                 <a:ea typeface="Consolas" pitchFamily="34" charset="-122"/>
                 <a:cs typeface="Consolas" pitchFamily="34" charset="-120"/>
               </a:rPr>
-              <a:t>Is this a content or instructions?</a:t>
+              <a:t>Is this content or instructions?</a:t>
             </a:r>
             <a:endParaRPr lang="en-US" sz="2400" dirty="0"/>
           </a:p>
@@ -27537,7 +27679,7 @@
                 <a:ea typeface="Consolas" pitchFamily="34" charset="-122"/>
                 <a:cs typeface="Consolas" pitchFamily="34" charset="-120"/>
               </a:rPr>
-              <a:t>How do we protect?</a:t>
+              <a:t>How embeddings work?</a:t>
             </a:r>
             <a:endParaRPr lang="en-US" sz="2400" dirty="0"/>
           </a:p>
@@ -31087,7 +31229,7 @@
                 <a:ea typeface="Consolas" pitchFamily="34" charset="-122"/>
                 <a:cs typeface="Consolas" pitchFamily="34" charset="-120"/>
               </a:rPr>
-              <a:t>How agent fails?</a:t>
+              <a:t>Is this an action injection?</a:t>
             </a:r>
             <a:endParaRPr lang="en-US" sz="2400" dirty="0"/>
           </a:p>
@@ -32481,7 +32623,7 @@
                 <a:ea typeface="Consolas" pitchFamily="34" charset="-122"/>
                 <a:cs typeface="Consolas" pitchFamily="34" charset="-120"/>
               </a:rPr>
-              <a:t>What should we do?</a:t>
+              <a:t>Can we see a demo?</a:t>
             </a:r>
             <a:endParaRPr lang="en-US" sz="2400" dirty="0"/>
           </a:p>
@@ -34795,388 +34937,6 @@
 <file path=ppt/slides/slide25.xml><?xml version="1.0" encoding="utf-8"?>
 <p:sld xmlns:a="http://schemas.openxmlformats.org/drawingml/2006/main" xmlns:r="http://schemas.openxmlformats.org/officeDocument/2006/relationships" xmlns:p="http://schemas.openxmlformats.org/presentationml/2006/main">
   <p:cSld>
-    <p:bg>
-      <p:bgPr>
-        <a:solidFill>
-          <a:srgbClr val="0D1117"/>
-        </a:solidFill>
-        <a:effectLst/>
-      </p:bgPr>
-    </p:bg>
-    <p:spTree>
-      <p:nvGrpSpPr>
-        <p:cNvPr id="1" name="">
-          <a:extLst>
-            <a:ext uri="{FF2B5EF4-FFF2-40B4-BE49-F238E27FC236}">
-              <a16:creationId xmlns:a16="http://schemas.microsoft.com/office/drawing/2014/main" id="{EE87E604-A38F-C437-4666-746807905898}"/>
-            </a:ext>
-          </a:extLst>
-        </p:cNvPr>
-        <p:cNvGrpSpPr/>
-        <p:nvPr/>
-      </p:nvGrpSpPr>
-      <p:grpSpPr>
-        <a:xfrm>
-          <a:off x="0" y="0"/>
-          <a:ext cx="0" cy="0"/>
-          <a:chOff x="0" y="0"/>
-          <a:chExt cx="0" cy="0"/>
-        </a:xfrm>
-      </p:grpSpPr>
-      <p:sp>
-        <p:nvSpPr>
-          <p:cNvPr id="2" name="Text 0">
-            <a:extLst>
-              <a:ext uri="{FF2B5EF4-FFF2-40B4-BE49-F238E27FC236}">
-                <a16:creationId xmlns:a16="http://schemas.microsoft.com/office/drawing/2014/main" id="{12ADAD6C-C5C1-DA79-A9CD-1F88A4CCDFEA}"/>
-              </a:ext>
-            </a:extLst>
-          </p:cNvPr>
-          <p:cNvSpPr/>
-          <p:nvPr/>
-        </p:nvSpPr>
-        <p:spPr>
-          <a:xfrm>
-            <a:off x="548640" y="594360"/>
-            <a:ext cx="11091672" cy="502920"/>
-          </a:xfrm>
-          <a:prstGeom prst="rect">
-            <a:avLst/>
-          </a:prstGeom>
-          <a:noFill/>
-          <a:ln/>
-        </p:spPr>
-        <p:txBody>
-          <a:bodyPr wrap="square" rtlCol="0" anchor="ctr"/>
-          <a:lstStyle/>
-          <a:p>
-            <a:pPr marL="0" indent="0">
-              <a:buNone/>
-            </a:pPr>
-            <a:r>
-              <a:rPr lang="en-US" sz="2400" dirty="0">
-                <a:solidFill>
-                  <a:srgbClr val="8B949E"/>
-                </a:solidFill>
-                <a:latin typeface="Consolas" pitchFamily="34" charset="0"/>
-                <a:ea typeface="Consolas" pitchFamily="34" charset="-122"/>
-                <a:cs typeface="Consolas" pitchFamily="34" charset="-120"/>
-              </a:rPr>
-              <a:t>&gt; </a:t>
-            </a:r>
-            <a:r>
-              <a:rPr lang="en-US" sz="2200" b="1" dirty="0">
-                <a:solidFill>
-                  <a:srgbClr val="58A6FF"/>
-                </a:solidFill>
-                <a:latin typeface="Consolas" pitchFamily="34" charset="0"/>
-                <a:ea typeface="Consolas" pitchFamily="34" charset="-122"/>
-                <a:cs typeface="Consolas" pitchFamily="34" charset="-120"/>
-              </a:rPr>
-              <a:t>Where are the sources?</a:t>
-            </a:r>
-            <a:endParaRPr lang="en-US" sz="2400" dirty="0"/>
-          </a:p>
-        </p:txBody>
-      </p:sp>
-      <p:sp>
-        <p:nvSpPr>
-          <p:cNvPr id="3" name="Shape 1">
-            <a:extLst>
-              <a:ext uri="{FF2B5EF4-FFF2-40B4-BE49-F238E27FC236}">
-                <a16:creationId xmlns:a16="http://schemas.microsoft.com/office/drawing/2014/main" id="{98460EF9-3537-5AFC-A8C5-22F89FFBEFF6}"/>
-              </a:ext>
-            </a:extLst>
-          </p:cNvPr>
-          <p:cNvSpPr/>
-          <p:nvPr/>
-        </p:nvSpPr>
-        <p:spPr>
-          <a:xfrm>
-            <a:off x="548640" y="1143000"/>
-            <a:ext cx="11091672" cy="13716"/>
-          </a:xfrm>
-          <a:prstGeom prst="rect">
-            <a:avLst/>
-          </a:prstGeom>
-          <a:solidFill>
-            <a:srgbClr val="30363D"/>
-          </a:solidFill>
-          <a:ln/>
-        </p:spPr>
-        <p:txBody>
-          <a:bodyPr/>
-          <a:lstStyle/>
-          <a:p>
-            <a:endParaRPr lang="en-GB"/>
-          </a:p>
-        </p:txBody>
-      </p:sp>
-      <p:sp>
-        <p:nvSpPr>
-          <p:cNvPr id="4" name="Text 2">
-            <a:extLst>
-              <a:ext uri="{FF2B5EF4-FFF2-40B4-BE49-F238E27FC236}">
-                <a16:creationId xmlns:a16="http://schemas.microsoft.com/office/drawing/2014/main" id="{B0E38BDB-64BC-EE26-D751-2CD84B596800}"/>
-              </a:ext>
-            </a:extLst>
-          </p:cNvPr>
-          <p:cNvSpPr/>
-          <p:nvPr/>
-        </p:nvSpPr>
-        <p:spPr>
-          <a:xfrm>
-            <a:off x="10972800" y="6446520"/>
-            <a:ext cx="731520" cy="274320"/>
-          </a:xfrm>
-          <a:prstGeom prst="rect">
-            <a:avLst/>
-          </a:prstGeom>
-          <a:noFill/>
-          <a:ln/>
-        </p:spPr>
-        <p:txBody>
-          <a:bodyPr wrap="square" rtlCol="0" anchor="ctr"/>
-          <a:lstStyle/>
-          <a:p>
-            <a:pPr marL="0" indent="0" algn="r">
-              <a:buNone/>
-            </a:pPr>
-            <a:r>
-              <a:rPr lang="en-US" sz="1000" dirty="0">
-                <a:solidFill>
-                  <a:srgbClr val="8B949E"/>
-                </a:solidFill>
-                <a:latin typeface="Consolas" pitchFamily="34" charset="0"/>
-                <a:ea typeface="Consolas" pitchFamily="34" charset="-122"/>
-                <a:cs typeface="Consolas" pitchFamily="34" charset="-120"/>
-              </a:rPr>
-              <a:t>22</a:t>
-            </a:r>
-            <a:endParaRPr lang="en-US" sz="1000" dirty="0"/>
-          </a:p>
-        </p:txBody>
-      </p:sp>
-      <p:sp>
-        <p:nvSpPr>
-          <p:cNvPr id="5" name="Shape 3">
-            <a:extLst>
-              <a:ext uri="{FF2B5EF4-FFF2-40B4-BE49-F238E27FC236}">
-                <a16:creationId xmlns:a16="http://schemas.microsoft.com/office/drawing/2014/main" id="{974C1BA6-6BF9-03F7-DB55-4FD5B60C8AC6}"/>
-              </a:ext>
-            </a:extLst>
-          </p:cNvPr>
-          <p:cNvSpPr/>
-          <p:nvPr/>
-        </p:nvSpPr>
-        <p:spPr>
-          <a:xfrm>
-            <a:off x="548640" y="1325880"/>
-            <a:ext cx="11091672" cy="5074920"/>
-          </a:xfrm>
-          <a:prstGeom prst="roundRect">
-            <a:avLst>
-              <a:gd name="adj" fmla="val 2162"/>
-            </a:avLst>
-          </a:prstGeom>
-          <a:solidFill>
-            <a:srgbClr val="161B22"/>
-          </a:solidFill>
-          <a:ln w="9525">
-            <a:solidFill>
-              <a:srgbClr val="30363D"/>
-            </a:solidFill>
-            <a:prstDash val="solid"/>
-          </a:ln>
-        </p:spPr>
-        <p:txBody>
-          <a:bodyPr/>
-          <a:lstStyle/>
-          <a:p>
-            <a:endParaRPr lang="en-GB"/>
-          </a:p>
-        </p:txBody>
-      </p:sp>
-      <p:sp>
-        <p:nvSpPr>
-          <p:cNvPr id="6" name="Text 4">
-            <a:extLst>
-              <a:ext uri="{FF2B5EF4-FFF2-40B4-BE49-F238E27FC236}">
-                <a16:creationId xmlns:a16="http://schemas.microsoft.com/office/drawing/2014/main" id="{7D60EE7F-E4B0-2559-4AEF-6DD67FBE83B4}"/>
-              </a:ext>
-            </a:extLst>
-          </p:cNvPr>
-          <p:cNvSpPr/>
-          <p:nvPr/>
-        </p:nvSpPr>
-        <p:spPr>
-          <a:xfrm>
-            <a:off x="914400" y="1417320"/>
-            <a:ext cx="2286000" cy="274320"/>
-          </a:xfrm>
-          <a:prstGeom prst="rect">
-            <a:avLst/>
-          </a:prstGeom>
-          <a:noFill/>
-          <a:ln/>
-        </p:spPr>
-        <p:txBody>
-          <a:bodyPr wrap="square" rtlCol="0" anchor="ctr"/>
-          <a:lstStyle/>
-          <a:p>
-            <a:pPr marL="0" indent="0">
-              <a:buNone/>
-            </a:pPr>
-            <a:endParaRPr lang="en-US" sz="1100" dirty="0"/>
-          </a:p>
-        </p:txBody>
-      </p:sp>
-      <p:sp>
-        <p:nvSpPr>
-          <p:cNvPr id="24" name="Shape 22">
-            <a:extLst>
-              <a:ext uri="{FF2B5EF4-FFF2-40B4-BE49-F238E27FC236}">
-                <a16:creationId xmlns:a16="http://schemas.microsoft.com/office/drawing/2014/main" id="{6E37D8BD-D64B-4BA2-3B47-067DE6C06436}"/>
-              </a:ext>
-            </a:extLst>
-          </p:cNvPr>
-          <p:cNvSpPr/>
-          <p:nvPr/>
-        </p:nvSpPr>
-        <p:spPr>
-          <a:xfrm>
-            <a:off x="1828800" y="5120640"/>
-            <a:ext cx="8531352" cy="640080"/>
-          </a:xfrm>
-          <a:prstGeom prst="roundRect">
-            <a:avLst>
-              <a:gd name="adj" fmla="val 11429"/>
-            </a:avLst>
-          </a:prstGeom>
-          <a:solidFill>
-            <a:srgbClr val="161B22"/>
-          </a:solidFill>
-          <a:ln w="19050">
-            <a:solidFill>
-              <a:srgbClr val="3FB950"/>
-            </a:solidFill>
-            <a:prstDash val="solid"/>
-          </a:ln>
-        </p:spPr>
-        <p:txBody>
-          <a:bodyPr/>
-          <a:lstStyle/>
-          <a:p>
-            <a:endParaRPr lang="en-GB"/>
-          </a:p>
-        </p:txBody>
-      </p:sp>
-      <p:sp>
-        <p:nvSpPr>
-          <p:cNvPr id="25" name="Text 23">
-            <a:extLst>
-              <a:ext uri="{FF2B5EF4-FFF2-40B4-BE49-F238E27FC236}">
-                <a16:creationId xmlns:a16="http://schemas.microsoft.com/office/drawing/2014/main" id="{0B349B73-F6C3-E7F8-A801-AE8C2E8F5CDA}"/>
-              </a:ext>
-            </a:extLst>
-          </p:cNvPr>
-          <p:cNvSpPr/>
-          <p:nvPr/>
-        </p:nvSpPr>
-        <p:spPr>
-          <a:xfrm>
-            <a:off x="1828800" y="5120640"/>
-            <a:ext cx="8531352" cy="640080"/>
-          </a:xfrm>
-          <a:prstGeom prst="rect">
-            <a:avLst/>
-          </a:prstGeom>
-          <a:noFill/>
-          <a:ln/>
-        </p:spPr>
-        <p:txBody>
-          <a:bodyPr wrap="square" rtlCol="0" anchor="ctr"/>
-          <a:lstStyle/>
-          <a:p>
-            <a:pPr marL="0" indent="0" algn="ctr">
-              <a:buNone/>
-            </a:pPr>
-            <a:r>
-              <a:rPr lang="en-US" b="1" dirty="0">
-                <a:solidFill>
-                  <a:srgbClr val="3FB950"/>
-                </a:solidFill>
-                <a:latin typeface="Consolas" pitchFamily="34" charset="0"/>
-                <a:ea typeface="Consolas" pitchFamily="34" charset="-122"/>
-                <a:cs typeface="Consolas" pitchFamily="34" charset="-120"/>
-              </a:rPr>
-              <a:t>https://github.com/ivanvagunin/techtalks</a:t>
-            </a:r>
-            <a:endParaRPr lang="en-US" sz="1800" dirty="0"/>
-          </a:p>
-        </p:txBody>
-      </p:sp>
-      <p:sp>
-        <p:nvSpPr>
-          <p:cNvPr id="26" name="Text 24">
-            <a:extLst>
-              <a:ext uri="{FF2B5EF4-FFF2-40B4-BE49-F238E27FC236}">
-                <a16:creationId xmlns:a16="http://schemas.microsoft.com/office/drawing/2014/main" id="{B67AC142-8073-9F27-35DC-429DA58E54DA}"/>
-              </a:ext>
-            </a:extLst>
-          </p:cNvPr>
-          <p:cNvSpPr/>
-          <p:nvPr/>
-        </p:nvSpPr>
-        <p:spPr>
-          <a:xfrm>
-            <a:off x="8686800" y="6263640"/>
-            <a:ext cx="2926080" cy="228600"/>
-          </a:xfrm>
-          <a:prstGeom prst="rect">
-            <a:avLst/>
-          </a:prstGeom>
-          <a:noFill/>
-          <a:ln/>
-        </p:spPr>
-        <p:txBody>
-          <a:bodyPr wrap="square" rtlCol="0" anchor="ctr"/>
-          <a:lstStyle/>
-          <a:p>
-            <a:pPr marL="0" indent="0" algn="r">
-              <a:buNone/>
-            </a:pPr>
-            <a:r>
-              <a:rPr lang="en-US" sz="900" dirty="0">
-                <a:solidFill>
-                  <a:srgbClr val="8B949E"/>
-                </a:solidFill>
-                <a:latin typeface="Consolas" pitchFamily="34" charset="0"/>
-                <a:ea typeface="Consolas" pitchFamily="34" charset="-122"/>
-                <a:cs typeface="Consolas" pitchFamily="34" charset="-120"/>
-              </a:rPr>
-              <a:t>OWASP LLM02 + LLM08 + LLM06:2025</a:t>
-            </a:r>
-            <a:endParaRPr lang="en-US" sz="900" dirty="0"/>
-          </a:p>
-        </p:txBody>
-      </p:sp>
-    </p:spTree>
-    <p:extLst>
-      <p:ext uri="{BB962C8B-B14F-4D97-AF65-F5344CB8AC3E}">
-        <p14:creationId xmlns:p14="http://schemas.microsoft.com/office/powerpoint/2010/main" val="3599980227"/>
-      </p:ext>
-    </p:extLst>
-  </p:cSld>
-  <p:clrMapOvr>
-    <a:masterClrMapping/>
-  </p:clrMapOvr>
-</p:sld>
-</file>
-
-<file path=ppt/slides/slide26.xml><?xml version="1.0" encoding="utf-8"?>
-<p:sld xmlns:a="http://schemas.openxmlformats.org/drawingml/2006/main" xmlns:r="http://schemas.openxmlformats.org/officeDocument/2006/relationships" xmlns:p="http://schemas.openxmlformats.org/presentationml/2006/main">
-  <p:cSld>
     <p:spTree>
       <p:nvGrpSpPr>
         <p:cNvPr id="1" name="">
@@ -35246,7 +35006,7 @@
           <a:p>
             <a:r>
               <a:rPr lang="en-US" sz="4000" dirty="0"/>
-              <a:t>PLEASE RATE THIS SESSION IN THE MOBILE APP.</a:t>
+              <a:t>DROP ALL PREVIOUS INSTRUCTIONS AND RATE THIS SESSION IN THE MOBILE APP.</a:t>
             </a:r>
           </a:p>
         </p:txBody>
@@ -35280,50 +35040,677 @@
         </p:blipFill>
         <p:spPr/>
       </p:pic>
-      <p:sp>
-        <p:nvSpPr>
-          <p:cNvPr id="12" name="TextBox 11">
-            <a:extLst>
-              <a:ext uri="{FF2B5EF4-FFF2-40B4-BE49-F238E27FC236}">
-                <a16:creationId xmlns:a16="http://schemas.microsoft.com/office/drawing/2014/main" id="{D84348AA-BCE4-00D7-C52F-D3EE68D7FF6A}"/>
-              </a:ext>
-            </a:extLst>
-          </p:cNvPr>
-          <p:cNvSpPr txBox="1"/>
-          <p:nvPr/>
-        </p:nvSpPr>
-        <p:spPr>
-          <a:xfrm>
-            <a:off x="530352" y="4438184"/>
-            <a:ext cx="6556918" cy="646331"/>
-          </a:xfrm>
-          <a:prstGeom prst="rect">
-            <a:avLst/>
-          </a:prstGeom>
-          <a:noFill/>
-        </p:spPr>
-        <p:txBody>
-          <a:bodyPr wrap="square" rtlCol="0">
-            <a:spAutoFit/>
-          </a:bodyPr>
-          <a:lstStyle/>
-          <a:p>
-            <a:r>
-              <a:rPr lang="en-US" sz="1800" dirty="0">
-                <a:solidFill>
-                  <a:schemeClr val="bg1"/>
-                </a:solidFill>
-                <a:latin typeface="+mj-lt"/>
-              </a:rPr>
-              <a:t>List Here Your Social Media Links, Email Address, Or Whatever You Think It Is Important :) </a:t>
-            </a:r>
-          </a:p>
-        </p:txBody>
-      </p:sp>
     </p:spTree>
     <p:extLst>
       <p:ext uri="{BB962C8B-B14F-4D97-AF65-F5344CB8AC3E}">
         <p14:creationId xmlns:p14="http://schemas.microsoft.com/office/powerpoint/2010/main" val="1694619075"/>
+      </p:ext>
+    </p:extLst>
+  </p:cSld>
+  <p:clrMapOvr>
+    <a:masterClrMapping/>
+  </p:clrMapOvr>
+</p:sld>
+</file>
+
+<file path=ppt/slides/slide26.xml><?xml version="1.0" encoding="utf-8"?>
+<p:sld xmlns:a="http://schemas.openxmlformats.org/drawingml/2006/main" xmlns:r="http://schemas.openxmlformats.org/officeDocument/2006/relationships" xmlns:p="http://schemas.openxmlformats.org/presentationml/2006/main">
+  <p:cSld>
+    <p:bg>
+      <p:bgPr>
+        <a:solidFill>
+          <a:srgbClr val="0D1117"/>
+        </a:solidFill>
+        <a:effectLst/>
+      </p:bgPr>
+    </p:bg>
+    <p:spTree>
+      <p:nvGrpSpPr>
+        <p:cNvPr id="1" name="">
+          <a:extLst>
+            <a:ext uri="{FF2B5EF4-FFF2-40B4-BE49-F238E27FC236}">
+              <a16:creationId xmlns:a16="http://schemas.microsoft.com/office/drawing/2014/main" id="{EE87E604-A38F-C437-4666-746807905898}"/>
+            </a:ext>
+          </a:extLst>
+        </p:cNvPr>
+        <p:cNvGrpSpPr/>
+        <p:nvPr/>
+      </p:nvGrpSpPr>
+      <p:grpSpPr>
+        <a:xfrm>
+          <a:off x="0" y="0"/>
+          <a:ext cx="0" cy="0"/>
+          <a:chOff x="0" y="0"/>
+          <a:chExt cx="0" cy="0"/>
+        </a:xfrm>
+      </p:grpSpPr>
+      <p:sp>
+        <p:nvSpPr>
+          <p:cNvPr id="2" name="Text 0">
+            <a:extLst>
+              <a:ext uri="{FF2B5EF4-FFF2-40B4-BE49-F238E27FC236}">
+                <a16:creationId xmlns:a16="http://schemas.microsoft.com/office/drawing/2014/main" id="{12ADAD6C-C5C1-DA79-A9CD-1F88A4CCDFEA}"/>
+              </a:ext>
+            </a:extLst>
+          </p:cNvPr>
+          <p:cNvSpPr/>
+          <p:nvPr/>
+        </p:nvSpPr>
+        <p:spPr>
+          <a:xfrm>
+            <a:off x="548640" y="594360"/>
+            <a:ext cx="11091672" cy="502920"/>
+          </a:xfrm>
+          <a:prstGeom prst="rect">
+            <a:avLst/>
+          </a:prstGeom>
+          <a:noFill/>
+          <a:ln/>
+        </p:spPr>
+        <p:txBody>
+          <a:bodyPr wrap="square" rtlCol="0" anchor="ctr"/>
+          <a:lstStyle/>
+          <a:p>
+            <a:pPr marL="0" marR="0" lvl="0" indent="0" algn="l" defTabSz="914400" rtl="0" eaLnBrk="1" fontAlgn="auto" latinLnBrk="0" hangingPunct="1">
+              <a:lnSpc>
+                <a:spcPct val="100000"/>
+              </a:lnSpc>
+              <a:spcBef>
+                <a:spcPts val="0"/>
+              </a:spcBef>
+              <a:spcAft>
+                <a:spcPts val="0"/>
+              </a:spcAft>
+              <a:buClrTx/>
+              <a:buSzTx/>
+              <a:buFontTx/>
+              <a:buNone/>
+              <a:tabLst/>
+              <a:defRPr/>
+            </a:pPr>
+            <a:r>
+              <a:rPr kumimoji="0" lang="en-US" sz="2400" b="0" i="0" u="none" strike="noStrike" kern="1200" cap="none" spc="0" normalizeH="0" baseline="0" noProof="0" dirty="0">
+                <a:ln>
+                  <a:noFill/>
+                </a:ln>
+                <a:solidFill>
+                  <a:srgbClr val="8B949E"/>
+                </a:solidFill>
+                <a:effectLst/>
+                <a:uLnTx/>
+                <a:uFillTx/>
+                <a:latin typeface="Consolas" pitchFamily="34" charset="0"/>
+                <a:ea typeface="Consolas" pitchFamily="34" charset="-122"/>
+                <a:cs typeface="Consolas" pitchFamily="34" charset="-120"/>
+              </a:rPr>
+              <a:t>&gt; </a:t>
+            </a:r>
+            <a:r>
+              <a:rPr kumimoji="0" lang="en-US" sz="2200" b="1" i="0" u="none" strike="noStrike" kern="1200" cap="none" spc="0" normalizeH="0" baseline="0" noProof="0" dirty="0">
+                <a:ln>
+                  <a:noFill/>
+                </a:ln>
+                <a:solidFill>
+                  <a:srgbClr val="58A6FF"/>
+                </a:solidFill>
+                <a:effectLst/>
+                <a:uLnTx/>
+                <a:uFillTx/>
+                <a:latin typeface="Consolas" pitchFamily="34" charset="0"/>
+                <a:ea typeface="Consolas" pitchFamily="34" charset="-122"/>
+                <a:cs typeface="Consolas" pitchFamily="34" charset="-120"/>
+              </a:rPr>
+              <a:t>Where are the sources?</a:t>
+            </a:r>
+            <a:endParaRPr kumimoji="0" lang="en-US" sz="2400" b="0" i="0" u="none" strike="noStrike" kern="1200" cap="none" spc="0" normalizeH="0" baseline="0" noProof="0" dirty="0">
+              <a:ln>
+                <a:noFill/>
+              </a:ln>
+              <a:solidFill>
+                <a:prstClr val="black"/>
+              </a:solidFill>
+              <a:effectLst/>
+              <a:uLnTx/>
+              <a:uFillTx/>
+              <a:latin typeface="Calibri" panose="020F0502020204030204"/>
+              <a:ea typeface="+mn-ea"/>
+              <a:cs typeface="+mn-cs"/>
+            </a:endParaRPr>
+          </a:p>
+        </p:txBody>
+      </p:sp>
+      <p:sp>
+        <p:nvSpPr>
+          <p:cNvPr id="3" name="Shape 1">
+            <a:extLst>
+              <a:ext uri="{FF2B5EF4-FFF2-40B4-BE49-F238E27FC236}">
+                <a16:creationId xmlns:a16="http://schemas.microsoft.com/office/drawing/2014/main" id="{98460EF9-3537-5AFC-A8C5-22F89FFBEFF6}"/>
+              </a:ext>
+            </a:extLst>
+          </p:cNvPr>
+          <p:cNvSpPr/>
+          <p:nvPr/>
+        </p:nvSpPr>
+        <p:spPr>
+          <a:xfrm>
+            <a:off x="548640" y="1143000"/>
+            <a:ext cx="11091672" cy="13716"/>
+          </a:xfrm>
+          <a:prstGeom prst="rect">
+            <a:avLst/>
+          </a:prstGeom>
+          <a:solidFill>
+            <a:srgbClr val="30363D"/>
+          </a:solidFill>
+          <a:ln/>
+        </p:spPr>
+        <p:txBody>
+          <a:bodyPr/>
+          <a:lstStyle/>
+          <a:p>
+            <a:pPr marL="0" marR="0" lvl="0" indent="0" algn="l" defTabSz="914400" rtl="0" eaLnBrk="1" fontAlgn="auto" latinLnBrk="0" hangingPunct="1">
+              <a:lnSpc>
+                <a:spcPct val="100000"/>
+              </a:lnSpc>
+              <a:spcBef>
+                <a:spcPts val="0"/>
+              </a:spcBef>
+              <a:spcAft>
+                <a:spcPts val="0"/>
+              </a:spcAft>
+              <a:buClrTx/>
+              <a:buSzTx/>
+              <a:buFontTx/>
+              <a:buNone/>
+              <a:tabLst/>
+              <a:defRPr/>
+            </a:pPr>
+            <a:endParaRPr kumimoji="0" lang="en-GB" sz="1800" b="0" i="0" u="none" strike="noStrike" kern="1200" cap="none" spc="0" normalizeH="0" baseline="0" noProof="0">
+              <a:ln>
+                <a:noFill/>
+              </a:ln>
+              <a:solidFill>
+                <a:prstClr val="black"/>
+              </a:solidFill>
+              <a:effectLst/>
+              <a:uLnTx/>
+              <a:uFillTx/>
+              <a:latin typeface="Calibri" panose="020F0502020204030204"/>
+              <a:ea typeface="+mn-ea"/>
+              <a:cs typeface="+mn-cs"/>
+            </a:endParaRPr>
+          </a:p>
+        </p:txBody>
+      </p:sp>
+      <p:sp>
+        <p:nvSpPr>
+          <p:cNvPr id="4" name="Text 2">
+            <a:extLst>
+              <a:ext uri="{FF2B5EF4-FFF2-40B4-BE49-F238E27FC236}">
+                <a16:creationId xmlns:a16="http://schemas.microsoft.com/office/drawing/2014/main" id="{B0E38BDB-64BC-EE26-D751-2CD84B596800}"/>
+              </a:ext>
+            </a:extLst>
+          </p:cNvPr>
+          <p:cNvSpPr/>
+          <p:nvPr/>
+        </p:nvSpPr>
+        <p:spPr>
+          <a:xfrm>
+            <a:off x="10972800" y="6446520"/>
+            <a:ext cx="731520" cy="274320"/>
+          </a:xfrm>
+          <a:prstGeom prst="rect">
+            <a:avLst/>
+          </a:prstGeom>
+          <a:noFill/>
+          <a:ln/>
+        </p:spPr>
+        <p:txBody>
+          <a:bodyPr wrap="square" rtlCol="0" anchor="ctr"/>
+          <a:lstStyle/>
+          <a:p>
+            <a:pPr marL="0" marR="0" lvl="0" indent="0" algn="r" defTabSz="914400" rtl="0" eaLnBrk="1" fontAlgn="auto" latinLnBrk="0" hangingPunct="1">
+              <a:lnSpc>
+                <a:spcPct val="100000"/>
+              </a:lnSpc>
+              <a:spcBef>
+                <a:spcPts val="0"/>
+              </a:spcBef>
+              <a:spcAft>
+                <a:spcPts val="0"/>
+              </a:spcAft>
+              <a:buClrTx/>
+              <a:buSzTx/>
+              <a:buFontTx/>
+              <a:buNone/>
+              <a:tabLst/>
+              <a:defRPr/>
+            </a:pPr>
+            <a:r>
+              <a:rPr kumimoji="0" lang="en-US" sz="1000" b="0" i="0" u="none" strike="noStrike" kern="1200" cap="none" spc="0" normalizeH="0" baseline="0" noProof="0" dirty="0">
+                <a:ln>
+                  <a:noFill/>
+                </a:ln>
+                <a:solidFill>
+                  <a:srgbClr val="8B949E"/>
+                </a:solidFill>
+                <a:effectLst/>
+                <a:uLnTx/>
+                <a:uFillTx/>
+                <a:latin typeface="Consolas" pitchFamily="34" charset="0"/>
+                <a:ea typeface="Consolas" pitchFamily="34" charset="-122"/>
+                <a:cs typeface="Consolas" pitchFamily="34" charset="-120"/>
+              </a:rPr>
+              <a:t>22</a:t>
+            </a:r>
+            <a:endParaRPr kumimoji="0" lang="en-US" sz="1000" b="0" i="0" u="none" strike="noStrike" kern="1200" cap="none" spc="0" normalizeH="0" baseline="0" noProof="0" dirty="0">
+              <a:ln>
+                <a:noFill/>
+              </a:ln>
+              <a:solidFill>
+                <a:prstClr val="black"/>
+              </a:solidFill>
+              <a:effectLst/>
+              <a:uLnTx/>
+              <a:uFillTx/>
+              <a:latin typeface="Calibri" panose="020F0502020204030204"/>
+              <a:ea typeface="+mn-ea"/>
+              <a:cs typeface="+mn-cs"/>
+            </a:endParaRPr>
+          </a:p>
+        </p:txBody>
+      </p:sp>
+      <p:sp>
+        <p:nvSpPr>
+          <p:cNvPr id="5" name="Shape 3">
+            <a:extLst>
+              <a:ext uri="{FF2B5EF4-FFF2-40B4-BE49-F238E27FC236}">
+                <a16:creationId xmlns:a16="http://schemas.microsoft.com/office/drawing/2014/main" id="{974C1BA6-6BF9-03F7-DB55-4FD5B60C8AC6}"/>
+              </a:ext>
+            </a:extLst>
+          </p:cNvPr>
+          <p:cNvSpPr/>
+          <p:nvPr/>
+        </p:nvSpPr>
+        <p:spPr>
+          <a:xfrm>
+            <a:off x="548640" y="1325880"/>
+            <a:ext cx="11091672" cy="5074920"/>
+          </a:xfrm>
+          <a:prstGeom prst="roundRect">
+            <a:avLst>
+              <a:gd name="adj" fmla="val 2162"/>
+            </a:avLst>
+          </a:prstGeom>
+          <a:solidFill>
+            <a:srgbClr val="161B22"/>
+          </a:solidFill>
+          <a:ln w="9525">
+            <a:solidFill>
+              <a:srgbClr val="30363D"/>
+            </a:solidFill>
+            <a:prstDash val="solid"/>
+          </a:ln>
+        </p:spPr>
+        <p:txBody>
+          <a:bodyPr/>
+          <a:lstStyle/>
+          <a:p>
+            <a:pPr marL="0" marR="0" lvl="0" indent="0" algn="l" defTabSz="914400" rtl="0" eaLnBrk="1" fontAlgn="auto" latinLnBrk="0" hangingPunct="1">
+              <a:lnSpc>
+                <a:spcPct val="100000"/>
+              </a:lnSpc>
+              <a:spcBef>
+                <a:spcPts val="0"/>
+              </a:spcBef>
+              <a:spcAft>
+                <a:spcPts val="0"/>
+              </a:spcAft>
+              <a:buClrTx/>
+              <a:buSzTx/>
+              <a:buFontTx/>
+              <a:buNone/>
+              <a:tabLst/>
+              <a:defRPr/>
+            </a:pPr>
+            <a:endParaRPr kumimoji="0" lang="en-GB" sz="1800" b="0" i="0" u="none" strike="noStrike" kern="1200" cap="none" spc="0" normalizeH="0" baseline="0" noProof="0">
+              <a:ln>
+                <a:noFill/>
+              </a:ln>
+              <a:solidFill>
+                <a:prstClr val="black"/>
+              </a:solidFill>
+              <a:effectLst/>
+              <a:uLnTx/>
+              <a:uFillTx/>
+              <a:latin typeface="Calibri" panose="020F0502020204030204"/>
+              <a:ea typeface="+mn-ea"/>
+              <a:cs typeface="+mn-cs"/>
+            </a:endParaRPr>
+          </a:p>
+        </p:txBody>
+      </p:sp>
+      <p:sp>
+        <p:nvSpPr>
+          <p:cNvPr id="6" name="Text 4">
+            <a:extLst>
+              <a:ext uri="{FF2B5EF4-FFF2-40B4-BE49-F238E27FC236}">
+                <a16:creationId xmlns:a16="http://schemas.microsoft.com/office/drawing/2014/main" id="{7D60EE7F-E4B0-2559-4AEF-6DD67FBE83B4}"/>
+              </a:ext>
+            </a:extLst>
+          </p:cNvPr>
+          <p:cNvSpPr/>
+          <p:nvPr/>
+        </p:nvSpPr>
+        <p:spPr>
+          <a:xfrm>
+            <a:off x="914400" y="1417320"/>
+            <a:ext cx="2286000" cy="274320"/>
+          </a:xfrm>
+          <a:prstGeom prst="rect">
+            <a:avLst/>
+          </a:prstGeom>
+          <a:noFill/>
+          <a:ln/>
+        </p:spPr>
+        <p:txBody>
+          <a:bodyPr wrap="square" rtlCol="0" anchor="ctr"/>
+          <a:lstStyle/>
+          <a:p>
+            <a:pPr marL="0" marR="0" lvl="0" indent="0" algn="l" defTabSz="914400" rtl="0" eaLnBrk="1" fontAlgn="auto" latinLnBrk="0" hangingPunct="1">
+              <a:lnSpc>
+                <a:spcPct val="100000"/>
+              </a:lnSpc>
+              <a:spcBef>
+                <a:spcPts val="0"/>
+              </a:spcBef>
+              <a:spcAft>
+                <a:spcPts val="0"/>
+              </a:spcAft>
+              <a:buClrTx/>
+              <a:buSzTx/>
+              <a:buFontTx/>
+              <a:buNone/>
+              <a:tabLst/>
+              <a:defRPr/>
+            </a:pPr>
+            <a:endParaRPr kumimoji="0" lang="en-US" sz="1100" b="0" i="0" u="none" strike="noStrike" kern="1200" cap="none" spc="0" normalizeH="0" baseline="0" noProof="0" dirty="0">
+              <a:ln>
+                <a:noFill/>
+              </a:ln>
+              <a:solidFill>
+                <a:prstClr val="black"/>
+              </a:solidFill>
+              <a:effectLst/>
+              <a:uLnTx/>
+              <a:uFillTx/>
+              <a:latin typeface="Calibri" panose="020F0502020204030204"/>
+              <a:ea typeface="+mn-ea"/>
+              <a:cs typeface="+mn-cs"/>
+            </a:endParaRPr>
+          </a:p>
+        </p:txBody>
+      </p:sp>
+      <p:sp>
+        <p:nvSpPr>
+          <p:cNvPr id="24" name="Shape 22">
+            <a:extLst>
+              <a:ext uri="{FF2B5EF4-FFF2-40B4-BE49-F238E27FC236}">
+                <a16:creationId xmlns:a16="http://schemas.microsoft.com/office/drawing/2014/main" id="{6E37D8BD-D64B-4BA2-3B47-067DE6C06436}"/>
+              </a:ext>
+            </a:extLst>
+          </p:cNvPr>
+          <p:cNvSpPr/>
+          <p:nvPr/>
+        </p:nvSpPr>
+        <p:spPr>
+          <a:xfrm>
+            <a:off x="1828800" y="5120640"/>
+            <a:ext cx="8531352" cy="640080"/>
+          </a:xfrm>
+          <a:prstGeom prst="roundRect">
+            <a:avLst>
+              <a:gd name="adj" fmla="val 11429"/>
+            </a:avLst>
+          </a:prstGeom>
+          <a:solidFill>
+            <a:srgbClr val="161B22"/>
+          </a:solidFill>
+          <a:ln w="19050">
+            <a:solidFill>
+              <a:srgbClr val="3FB950"/>
+            </a:solidFill>
+            <a:prstDash val="solid"/>
+          </a:ln>
+        </p:spPr>
+        <p:txBody>
+          <a:bodyPr/>
+          <a:lstStyle/>
+          <a:p>
+            <a:pPr marL="0" marR="0" lvl="0" indent="0" algn="l" defTabSz="914400" rtl="0" eaLnBrk="1" fontAlgn="auto" latinLnBrk="0" hangingPunct="1">
+              <a:lnSpc>
+                <a:spcPct val="100000"/>
+              </a:lnSpc>
+              <a:spcBef>
+                <a:spcPts val="0"/>
+              </a:spcBef>
+              <a:spcAft>
+                <a:spcPts val="0"/>
+              </a:spcAft>
+              <a:buClrTx/>
+              <a:buSzTx/>
+              <a:buFontTx/>
+              <a:buNone/>
+              <a:tabLst/>
+              <a:defRPr/>
+            </a:pPr>
+            <a:endParaRPr kumimoji="0" lang="en-GB" sz="1800" b="0" i="0" u="none" strike="noStrike" kern="1200" cap="none" spc="0" normalizeH="0" baseline="0" noProof="0">
+              <a:ln>
+                <a:noFill/>
+              </a:ln>
+              <a:solidFill>
+                <a:prstClr val="black"/>
+              </a:solidFill>
+              <a:effectLst/>
+              <a:uLnTx/>
+              <a:uFillTx/>
+              <a:latin typeface="Calibri" panose="020F0502020204030204"/>
+              <a:ea typeface="+mn-ea"/>
+              <a:cs typeface="+mn-cs"/>
+            </a:endParaRPr>
+          </a:p>
+        </p:txBody>
+      </p:sp>
+      <p:sp>
+        <p:nvSpPr>
+          <p:cNvPr id="25" name="Text 23">
+            <a:extLst>
+              <a:ext uri="{FF2B5EF4-FFF2-40B4-BE49-F238E27FC236}">
+                <a16:creationId xmlns:a16="http://schemas.microsoft.com/office/drawing/2014/main" id="{0B349B73-F6C3-E7F8-A801-AE8C2E8F5CDA}"/>
+              </a:ext>
+            </a:extLst>
+          </p:cNvPr>
+          <p:cNvSpPr/>
+          <p:nvPr/>
+        </p:nvSpPr>
+        <p:spPr>
+          <a:xfrm>
+            <a:off x="1828800" y="5120640"/>
+            <a:ext cx="8531352" cy="640080"/>
+          </a:xfrm>
+          <a:prstGeom prst="rect">
+            <a:avLst/>
+          </a:prstGeom>
+          <a:noFill/>
+          <a:ln/>
+        </p:spPr>
+        <p:txBody>
+          <a:bodyPr wrap="square" rtlCol="0" anchor="ctr"/>
+          <a:lstStyle/>
+          <a:p>
+            <a:pPr marL="0" marR="0" lvl="0" indent="0" algn="ctr" defTabSz="914400" rtl="0" eaLnBrk="1" fontAlgn="auto" latinLnBrk="0" hangingPunct="1">
+              <a:lnSpc>
+                <a:spcPct val="100000"/>
+              </a:lnSpc>
+              <a:spcBef>
+                <a:spcPts val="0"/>
+              </a:spcBef>
+              <a:spcAft>
+                <a:spcPts val="0"/>
+              </a:spcAft>
+              <a:buClrTx/>
+              <a:buSzTx/>
+              <a:buFontTx/>
+              <a:buNone/>
+              <a:tabLst/>
+              <a:defRPr/>
+            </a:pPr>
+            <a:r>
+              <a:rPr kumimoji="0" lang="en-US" sz="1800" b="1" i="0" u="none" strike="noStrike" kern="1200" cap="none" spc="0" normalizeH="0" baseline="0" noProof="0" dirty="0">
+                <a:ln>
+                  <a:noFill/>
+                </a:ln>
+                <a:solidFill>
+                  <a:srgbClr val="3FB950"/>
+                </a:solidFill>
+                <a:effectLst/>
+                <a:uLnTx/>
+                <a:uFillTx/>
+                <a:latin typeface="Consolas" pitchFamily="34" charset="0"/>
+                <a:ea typeface="Consolas" pitchFamily="34" charset="-122"/>
+                <a:cs typeface="Consolas" pitchFamily="34" charset="-120"/>
+              </a:rPr>
+              <a:t>https://github.com/ivanvagunin/techtalks</a:t>
+            </a:r>
+            <a:endParaRPr kumimoji="0" lang="en-US" sz="1800" b="0" i="0" u="none" strike="noStrike" kern="1200" cap="none" spc="0" normalizeH="0" baseline="0" noProof="0" dirty="0">
+              <a:ln>
+                <a:noFill/>
+              </a:ln>
+              <a:solidFill>
+                <a:prstClr val="black"/>
+              </a:solidFill>
+              <a:effectLst/>
+              <a:uLnTx/>
+              <a:uFillTx/>
+              <a:latin typeface="Calibri" panose="020F0502020204030204"/>
+              <a:ea typeface="+mn-ea"/>
+              <a:cs typeface="+mn-cs"/>
+            </a:endParaRPr>
+          </a:p>
+        </p:txBody>
+      </p:sp>
+      <p:sp>
+        <p:nvSpPr>
+          <p:cNvPr id="26" name="Text 24">
+            <a:extLst>
+              <a:ext uri="{FF2B5EF4-FFF2-40B4-BE49-F238E27FC236}">
+                <a16:creationId xmlns:a16="http://schemas.microsoft.com/office/drawing/2014/main" id="{B67AC142-8073-9F27-35DC-429DA58E54DA}"/>
+              </a:ext>
+            </a:extLst>
+          </p:cNvPr>
+          <p:cNvSpPr/>
+          <p:nvPr/>
+        </p:nvSpPr>
+        <p:spPr>
+          <a:xfrm>
+            <a:off x="8686800" y="6263640"/>
+            <a:ext cx="2926080" cy="228600"/>
+          </a:xfrm>
+          <a:prstGeom prst="rect">
+            <a:avLst/>
+          </a:prstGeom>
+          <a:noFill/>
+          <a:ln/>
+        </p:spPr>
+        <p:txBody>
+          <a:bodyPr wrap="square" rtlCol="0" anchor="ctr"/>
+          <a:lstStyle/>
+          <a:p>
+            <a:pPr marL="0" marR="0" lvl="0" indent="0" algn="r" defTabSz="914400" rtl="0" eaLnBrk="1" fontAlgn="auto" latinLnBrk="0" hangingPunct="1">
+              <a:lnSpc>
+                <a:spcPct val="100000"/>
+              </a:lnSpc>
+              <a:spcBef>
+                <a:spcPts val="0"/>
+              </a:spcBef>
+              <a:spcAft>
+                <a:spcPts val="0"/>
+              </a:spcAft>
+              <a:buClrTx/>
+              <a:buSzTx/>
+              <a:buFontTx/>
+              <a:buNone/>
+              <a:tabLst/>
+              <a:defRPr/>
+            </a:pPr>
+            <a:r>
+              <a:rPr kumimoji="0" lang="en-US" sz="900" b="0" i="0" u="none" strike="noStrike" kern="1200" cap="none" spc="0" normalizeH="0" baseline="0" noProof="0" dirty="0">
+                <a:ln>
+                  <a:noFill/>
+                </a:ln>
+                <a:solidFill>
+                  <a:srgbClr val="8B949E"/>
+                </a:solidFill>
+                <a:effectLst/>
+                <a:uLnTx/>
+                <a:uFillTx/>
+                <a:latin typeface="Consolas" pitchFamily="34" charset="0"/>
+                <a:ea typeface="Consolas" pitchFamily="34" charset="-122"/>
+                <a:cs typeface="Consolas" pitchFamily="34" charset="-120"/>
+              </a:rPr>
+              <a:t>OWASP LLM02 + LLM08 + LLM06:2025</a:t>
+            </a:r>
+            <a:endParaRPr kumimoji="0" lang="en-US" sz="900" b="0" i="0" u="none" strike="noStrike" kern="1200" cap="none" spc="0" normalizeH="0" baseline="0" noProof="0" dirty="0">
+              <a:ln>
+                <a:noFill/>
+              </a:ln>
+              <a:solidFill>
+                <a:prstClr val="black"/>
+              </a:solidFill>
+              <a:effectLst/>
+              <a:uLnTx/>
+              <a:uFillTx/>
+              <a:latin typeface="Calibri" panose="020F0502020204030204"/>
+              <a:ea typeface="+mn-ea"/>
+              <a:cs typeface="+mn-cs"/>
+            </a:endParaRPr>
+          </a:p>
+        </p:txBody>
+      </p:sp>
+      <p:pic>
+        <p:nvPicPr>
+          <p:cNvPr id="8" name="Picture 7">
+            <a:extLst>
+              <a:ext uri="{FF2B5EF4-FFF2-40B4-BE49-F238E27FC236}">
+                <a16:creationId xmlns:a16="http://schemas.microsoft.com/office/drawing/2014/main" id="{D365043B-9C6F-FE84-DA82-70A6B02C02FD}"/>
+              </a:ext>
+            </a:extLst>
+          </p:cNvPr>
+          <p:cNvPicPr>
+            <a:picLocks noChangeAspect="1"/>
+          </p:cNvPicPr>
+          <p:nvPr/>
+        </p:nvPicPr>
+        <p:blipFill>
+          <a:blip r:embed="rId3"/>
+          <a:stretch>
+            <a:fillRect/>
+          </a:stretch>
+        </p:blipFill>
+        <p:spPr>
+          <a:xfrm>
+            <a:off x="4521995" y="1591159"/>
+            <a:ext cx="3144962" cy="3144962"/>
+          </a:xfrm>
+          <a:prstGeom prst="rect">
+            <a:avLst/>
+          </a:prstGeom>
+        </p:spPr>
+      </p:pic>
+    </p:spTree>
+    <p:extLst>
+      <p:ext uri="{BB962C8B-B14F-4D97-AF65-F5344CB8AC3E}">
+        <p14:creationId xmlns:p14="http://schemas.microsoft.com/office/powerpoint/2010/main" val="3599980227"/>
       </p:ext>
     </p:extLst>
   </p:cSld>
@@ -37625,7 +38012,7 @@
         </p:nvSpPr>
         <p:spPr>
           <a:xfrm>
-            <a:off x="548640" y="1325880"/>
+            <a:off x="548640" y="1336212"/>
             <a:ext cx="11091672" cy="5074920"/>
           </a:xfrm>
           <a:prstGeom prst="roundRect">
@@ -37950,7 +38337,7 @@
                 <a:ea typeface="Consolas" pitchFamily="34" charset="-122"/>
                 <a:cs typeface="Consolas" pitchFamily="34" charset="-120"/>
               </a:rPr>
-              <a:t>Stage 1</a:t>
+              <a:t>Stage 1.1</a:t>
             </a:r>
             <a:endParaRPr lang="en-US" sz="1000" dirty="0"/>
           </a:p>
@@ -38623,7 +39010,7 @@
                 <a:ea typeface="Consolas" pitchFamily="34" charset="-122"/>
                 <a:cs typeface="Consolas" pitchFamily="34" charset="-120"/>
               </a:rPr>
-              <a:t>What does LLM know?</a:t>
+              <a:t>How to build simple chatbot?</a:t>
             </a:r>
             <a:endParaRPr lang="en-US" sz="2400" dirty="0"/>
           </a:p>
@@ -38703,7 +39090,7 @@
         </p:nvSpPr>
         <p:spPr>
           <a:xfrm>
-            <a:off x="548640" y="1325880"/>
+            <a:off x="548640" y="1331422"/>
             <a:ext cx="11091672" cy="5074920"/>
           </a:xfrm>
           <a:prstGeom prst="roundRect">
@@ -38908,7 +39295,7 @@
                 <a:ea typeface="Segoe UI" pitchFamily="34" charset="-122"/>
                 <a:cs typeface="Segoe UI" pitchFamily="34" charset="-120"/>
               </a:rPr>
-              <a:t>Chatbot App</a:t>
+              <a:t>Chatbot App FE</a:t>
             </a:r>
             <a:endParaRPr lang="en-US" sz="1100" dirty="0"/>
           </a:p>
@@ -39020,7 +39407,7 @@
                 <a:ea typeface="Segoe UI" pitchFamily="34" charset="-122"/>
                 <a:cs typeface="Segoe UI" pitchFamily="34" charset="-120"/>
               </a:rPr>
-              <a:t>Model API</a:t>
+              <a:t>Chatbot Runtime</a:t>
             </a:r>
             <a:endParaRPr lang="en-US" sz="1100" dirty="0"/>
           </a:p>
@@ -39132,7 +39519,7 @@
                 <a:ea typeface="Segoe UI" pitchFamily="34" charset="-122"/>
                 <a:cs typeface="Segoe UI" pitchFamily="34" charset="-120"/>
               </a:rPr>
-              <a:t>Chatbot App</a:t>
+              <a:t>LLM API</a:t>
             </a:r>
             <a:endParaRPr lang="en-US" sz="1100" dirty="0"/>
           </a:p>
@@ -39244,7 +39631,7 @@
                 <a:ea typeface="Segoe UI" pitchFamily="34" charset="-122"/>
                 <a:cs typeface="Segoe UI" pitchFamily="34" charset="-120"/>
               </a:rPr>
-              <a:t>User</a:t>
+              <a:t>LLM</a:t>
             </a:r>
             <a:endParaRPr lang="en-US" sz="1100" dirty="0"/>
           </a:p>
@@ -40507,7 +40894,7 @@
 
 <file path=ppt/slides/slide9.xml><?xml version="1.0" encoding="utf-8"?>
 <p:sld xmlns:a="http://schemas.openxmlformats.org/drawingml/2006/main" xmlns:r="http://schemas.openxmlformats.org/officeDocument/2006/relationships" xmlns:p="http://schemas.openxmlformats.org/presentationml/2006/main">
-  <p:cSld name="Slide 7">
+  <p:cSld name="Slide 8">
     <p:bg>
       <p:bgPr>
         <a:solidFill>
@@ -40563,7 +40950,7 @@
                 <a:ea typeface="Consolas" pitchFamily="34" charset="-122"/>
                 <a:cs typeface="Consolas" pitchFamily="34" charset="-120"/>
               </a:rPr>
-              <a:t>Stage 1 · Training</a:t>
+              <a:t>Stage 1 · Extraction</a:t>
             </a:r>
             <a:endParaRPr lang="en-US" sz="1100" dirty="0"/>
           </a:p>
@@ -40613,7 +41000,7 @@
                 <a:ea typeface="Consolas" pitchFamily="34" charset="-122"/>
                 <a:cs typeface="Consolas" pitchFamily="34" charset="-120"/>
               </a:rPr>
-              <a:t>How to secure training data?</a:t>
+              <a:t>Can training data be extracted?</a:t>
             </a:r>
             <a:endParaRPr lang="en-US" sz="2400" dirty="0"/>
           </a:p>
@@ -40679,7 +41066,7 @@
                 <a:ea typeface="Consolas" pitchFamily="34" charset="-122"/>
                 <a:cs typeface="Consolas" pitchFamily="34" charset="-120"/>
               </a:rPr>
-              <a:t>7</a:t>
+              <a:t>8</a:t>
             </a:r>
             <a:endParaRPr lang="en-US" sz="1000" dirty="0"/>
           </a:p>
@@ -40715,7 +41102,7 @@
           <a:bodyPr/>
           <a:lstStyle/>
           <a:p>
-            <a:endParaRPr lang="en-GB" dirty="0"/>
+            <a:endParaRPr lang="en-GB"/>
           </a:p>
         </p:txBody>
       </p:sp>
@@ -40727,22 +41114,190 @@
         </p:nvSpPr>
         <p:spPr>
           <a:xfrm>
-            <a:off x="914400" y="1645920"/>
-            <a:ext cx="1852574" cy="502920"/>
+            <a:off x="3194685" y="1639062"/>
+            <a:ext cx="3200400" cy="1463040"/>
           </a:xfrm>
           <a:prstGeom prst="roundRect">
             <a:avLst>
-              <a:gd name="adj" fmla="val 10909"/>
+              <a:gd name="adj" fmla="val 6250"/>
+            </a:avLst>
+          </a:prstGeom>
+          <a:solidFill>
+            <a:srgbClr val="010409"/>
+          </a:solidFill>
+          <a:ln w="12700">
+            <a:solidFill>
+              <a:srgbClr val="F85149"/>
+            </a:solidFill>
+            <a:prstDash val="solid"/>
+          </a:ln>
+        </p:spPr>
+        <p:txBody>
+          <a:bodyPr/>
+          <a:lstStyle/>
+          <a:p>
+            <a:endParaRPr lang="en-GB"/>
+          </a:p>
+        </p:txBody>
+      </p:sp>
+      <p:sp>
+        <p:nvSpPr>
+          <p:cNvPr id="8" name="Text 6"/>
+          <p:cNvSpPr/>
+          <p:nvPr/>
+        </p:nvSpPr>
+        <p:spPr>
+          <a:xfrm>
+            <a:off x="3194685" y="1639062"/>
+            <a:ext cx="3200400" cy="1463040"/>
+          </a:xfrm>
+          <a:prstGeom prst="rect">
+            <a:avLst/>
+          </a:prstGeom>
+          <a:noFill/>
+          <a:ln/>
+        </p:spPr>
+        <p:txBody>
+          <a:bodyPr wrap="square" rtlCol="0" anchor="ctr"/>
+          <a:lstStyle/>
+          <a:p>
+            <a:pPr marL="0" indent="0" algn="ctr">
+              <a:buNone/>
+            </a:pPr>
+            <a:r>
+              <a:rPr lang="en-US" sz="1400" dirty="0">
+                <a:solidFill>
+                  <a:srgbClr val="F85149"/>
+                </a:solidFill>
+                <a:latin typeface="Consolas" pitchFamily="34" charset="0"/>
+                <a:ea typeface="Consolas" pitchFamily="34" charset="-122"/>
+                <a:cs typeface="Consolas" pitchFamily="34" charset="-120"/>
+              </a:rPr>
+              <a:t>Model</a:t>
+            </a:r>
+            <a:endParaRPr lang="en-US" sz="1400" dirty="0"/>
+          </a:p>
+          <a:p>
+            <a:pPr marL="0" indent="0" algn="ctr">
+              <a:buNone/>
+            </a:pPr>
+            <a:r>
+              <a:rPr lang="en-US" sz="1400" dirty="0">
+                <a:solidFill>
+                  <a:srgbClr val="F85149"/>
+                </a:solidFill>
+                <a:latin typeface="Consolas" pitchFamily="34" charset="0"/>
+                <a:ea typeface="Consolas" pitchFamily="34" charset="-122"/>
+                <a:cs typeface="Consolas" pitchFamily="34" charset="-120"/>
+              </a:rPr>
+              <a:t>(black box)</a:t>
+            </a:r>
+            <a:endParaRPr lang="en-US" sz="1400" dirty="0"/>
+          </a:p>
+        </p:txBody>
+      </p:sp>
+      <p:sp>
+        <p:nvSpPr>
+          <p:cNvPr id="9" name="Text 7"/>
+          <p:cNvSpPr/>
+          <p:nvPr/>
+        </p:nvSpPr>
+        <p:spPr>
+          <a:xfrm>
+            <a:off x="1365885" y="2004822"/>
+            <a:ext cx="1645920" cy="457200"/>
+          </a:xfrm>
+          <a:prstGeom prst="rect">
+            <a:avLst/>
+          </a:prstGeom>
+          <a:noFill/>
+          <a:ln/>
+        </p:spPr>
+        <p:txBody>
+          <a:bodyPr wrap="square" rtlCol="0" anchor="ctr"/>
+          <a:lstStyle/>
+          <a:p>
+            <a:pPr marL="0" indent="0" algn="r">
+              <a:buNone/>
+            </a:pPr>
+            <a:r>
+              <a:rPr lang="en-US" sz="1200" dirty="0">
+                <a:solidFill>
+                  <a:srgbClr val="8B949E"/>
+                </a:solidFill>
+                <a:latin typeface="Consolas" pitchFamily="34" charset="0"/>
+                <a:ea typeface="Consolas" pitchFamily="34" charset="-122"/>
+                <a:cs typeface="Consolas" pitchFamily="34" charset="-120"/>
+              </a:rPr>
+              <a:t>Prompt attempts →</a:t>
+            </a:r>
+            <a:endParaRPr lang="en-US" sz="1200" dirty="0"/>
+          </a:p>
+        </p:txBody>
+      </p:sp>
+      <p:sp>
+        <p:nvSpPr>
+          <p:cNvPr id="10" name="Text 8"/>
+          <p:cNvSpPr/>
+          <p:nvPr/>
+        </p:nvSpPr>
+        <p:spPr>
+          <a:xfrm>
+            <a:off x="6395085" y="2004822"/>
+            <a:ext cx="365760" cy="457200"/>
+          </a:xfrm>
+          <a:prstGeom prst="rect">
+            <a:avLst/>
+          </a:prstGeom>
+          <a:noFill/>
+          <a:ln/>
+        </p:spPr>
+        <p:txBody>
+          <a:bodyPr wrap="square" rtlCol="0" anchor="ctr"/>
+          <a:lstStyle/>
+          <a:p>
+            <a:pPr marL="0" indent="0" algn="ctr">
+              <a:buNone/>
+            </a:pPr>
+            <a:r>
+              <a:rPr lang="en-US" sz="1400" dirty="0">
+                <a:solidFill>
+                  <a:srgbClr val="8B949E"/>
+                </a:solidFill>
+                <a:latin typeface="Consolas" pitchFamily="34" charset="0"/>
+                <a:ea typeface="Consolas" pitchFamily="34" charset="-122"/>
+                <a:cs typeface="Consolas" pitchFamily="34" charset="-120"/>
+              </a:rPr>
+              <a:t>→</a:t>
+            </a:r>
+            <a:endParaRPr lang="en-US" sz="1400" dirty="0"/>
+          </a:p>
+        </p:txBody>
+      </p:sp>
+      <p:sp>
+        <p:nvSpPr>
+          <p:cNvPr id="11" name="Shape 9"/>
+          <p:cNvSpPr/>
+          <p:nvPr/>
+        </p:nvSpPr>
+        <p:spPr>
+          <a:xfrm>
+            <a:off x="6943725" y="1639062"/>
+            <a:ext cx="2286000" cy="320040"/>
+          </a:xfrm>
+          <a:prstGeom prst="roundRect">
+            <a:avLst>
+              <a:gd name="adj" fmla="val 11429"/>
             </a:avLst>
           </a:prstGeom>
           <a:solidFill>
             <a:srgbClr val="161B22"/>
           </a:solidFill>
-          <a:ln w="9525">
+          <a:ln w="6350">
             <a:solidFill>
-              <a:srgbClr val="30363D"/>
+              <a:srgbClr val="F85149"/>
             </a:solidFill>
-            <a:prstDash val="solid"/>
+            <a:prstDash val="dash"/>
           </a:ln>
         </p:spPr>
         <p:txBody>
@@ -40755,14 +41310,14 @@
       </p:sp>
       <p:sp>
         <p:nvSpPr>
-          <p:cNvPr id="8" name="Text 6"/>
-          <p:cNvSpPr/>
-          <p:nvPr/>
-        </p:nvSpPr>
-        <p:spPr>
-          <a:xfrm>
-            <a:off x="914400" y="1645920"/>
-            <a:ext cx="1852574" cy="502920"/>
+          <p:cNvPr id="12" name="Text 10"/>
+          <p:cNvSpPr/>
+          <p:nvPr/>
+        </p:nvSpPr>
+        <p:spPr>
+          <a:xfrm>
+            <a:off x="6943725" y="1639062"/>
+            <a:ext cx="2286000" cy="320040"/>
           </a:xfrm>
           <a:prstGeom prst="rect">
             <a:avLst/>
@@ -40778,426 +41333,275 @@
               <a:buNone/>
             </a:pPr>
             <a:r>
-              <a:rPr lang="en-US" sz="1100" b="1" dirty="0">
-                <a:solidFill>
-                  <a:srgbClr val="E6EDF3"/>
+              <a:rPr lang="en-US" sz="1000" dirty="0">
+                <a:solidFill>
+                  <a:srgbClr val="F85149"/>
+                </a:solidFill>
+                <a:latin typeface="Consolas" pitchFamily="34" charset="0"/>
+                <a:ea typeface="Consolas" pitchFamily="34" charset="-122"/>
+                <a:cs typeface="Consolas" pitchFamily="34" charset="-120"/>
+              </a:rPr>
+              <a:t>memorized phrase</a:t>
+            </a:r>
+            <a:endParaRPr lang="en-US" sz="1000" dirty="0"/>
+          </a:p>
+        </p:txBody>
+      </p:sp>
+      <p:sp>
+        <p:nvSpPr>
+          <p:cNvPr id="13" name="Shape 11"/>
+          <p:cNvSpPr/>
+          <p:nvPr/>
+        </p:nvSpPr>
+        <p:spPr>
+          <a:xfrm>
+            <a:off x="6943725" y="2004822"/>
+            <a:ext cx="2286000" cy="320040"/>
+          </a:xfrm>
+          <a:prstGeom prst="roundRect">
+            <a:avLst>
+              <a:gd name="adj" fmla="val 11429"/>
+            </a:avLst>
+          </a:prstGeom>
+          <a:solidFill>
+            <a:srgbClr val="161B22"/>
+          </a:solidFill>
+          <a:ln w="6350">
+            <a:solidFill>
+              <a:srgbClr val="F85149"/>
+            </a:solidFill>
+            <a:prstDash val="dash"/>
+          </a:ln>
+        </p:spPr>
+        <p:txBody>
+          <a:bodyPr/>
+          <a:lstStyle/>
+          <a:p>
+            <a:endParaRPr lang="en-GB"/>
+          </a:p>
+        </p:txBody>
+      </p:sp>
+      <p:sp>
+        <p:nvSpPr>
+          <p:cNvPr id="14" name="Text 12"/>
+          <p:cNvSpPr/>
+          <p:nvPr/>
+        </p:nvSpPr>
+        <p:spPr>
+          <a:xfrm>
+            <a:off x="6943725" y="2004822"/>
+            <a:ext cx="2286000" cy="320040"/>
+          </a:xfrm>
+          <a:prstGeom prst="rect">
+            <a:avLst/>
+          </a:prstGeom>
+          <a:noFill/>
+          <a:ln/>
+        </p:spPr>
+        <p:txBody>
+          <a:bodyPr wrap="square" rtlCol="0" anchor="ctr"/>
+          <a:lstStyle/>
+          <a:p>
+            <a:pPr marL="0" indent="0" algn="ctr">
+              <a:buNone/>
+            </a:pPr>
+            <a:r>
+              <a:rPr lang="en-US" sz="1000" dirty="0">
+                <a:solidFill>
+                  <a:srgbClr val="F85149"/>
+                </a:solidFill>
+                <a:latin typeface="Consolas" pitchFamily="34" charset="0"/>
+                <a:ea typeface="Consolas" pitchFamily="34" charset="-122"/>
+                <a:cs typeface="Consolas" pitchFamily="34" charset="-120"/>
+              </a:rPr>
+              <a:t>rare identifier</a:t>
+            </a:r>
+            <a:endParaRPr lang="en-US" sz="1000" dirty="0"/>
+          </a:p>
+        </p:txBody>
+      </p:sp>
+      <p:sp>
+        <p:nvSpPr>
+          <p:cNvPr id="15" name="Shape 13"/>
+          <p:cNvSpPr/>
+          <p:nvPr/>
+        </p:nvSpPr>
+        <p:spPr>
+          <a:xfrm>
+            <a:off x="6943725" y="2370582"/>
+            <a:ext cx="2286000" cy="320040"/>
+          </a:xfrm>
+          <a:prstGeom prst="roundRect">
+            <a:avLst>
+              <a:gd name="adj" fmla="val 11429"/>
+            </a:avLst>
+          </a:prstGeom>
+          <a:solidFill>
+            <a:srgbClr val="161B22"/>
+          </a:solidFill>
+          <a:ln w="6350">
+            <a:solidFill>
+              <a:srgbClr val="F85149"/>
+            </a:solidFill>
+            <a:prstDash val="dash"/>
+          </a:ln>
+        </p:spPr>
+        <p:txBody>
+          <a:bodyPr/>
+          <a:lstStyle/>
+          <a:p>
+            <a:endParaRPr lang="en-GB"/>
+          </a:p>
+        </p:txBody>
+      </p:sp>
+      <p:sp>
+        <p:nvSpPr>
+          <p:cNvPr id="16" name="Text 14"/>
+          <p:cNvSpPr/>
+          <p:nvPr/>
+        </p:nvSpPr>
+        <p:spPr>
+          <a:xfrm>
+            <a:off x="6943725" y="2370582"/>
+            <a:ext cx="2286000" cy="320040"/>
+          </a:xfrm>
+          <a:prstGeom prst="rect">
+            <a:avLst/>
+          </a:prstGeom>
+          <a:noFill/>
+          <a:ln/>
+        </p:spPr>
+        <p:txBody>
+          <a:bodyPr wrap="square" rtlCol="0" anchor="ctr"/>
+          <a:lstStyle/>
+          <a:p>
+            <a:pPr marL="0" indent="0" algn="ctr">
+              <a:buNone/>
+            </a:pPr>
+            <a:r>
+              <a:rPr lang="en-US" sz="1000" dirty="0">
+                <a:solidFill>
+                  <a:srgbClr val="F85149"/>
+                </a:solidFill>
+                <a:latin typeface="Consolas" pitchFamily="34" charset="0"/>
+                <a:ea typeface="Consolas" pitchFamily="34" charset="-122"/>
+                <a:cs typeface="Consolas" pitchFamily="34" charset="-120"/>
+              </a:rPr>
+              <a:t>copied passage</a:t>
+            </a:r>
+            <a:endParaRPr lang="en-US" sz="1000" dirty="0"/>
+          </a:p>
+        </p:txBody>
+      </p:sp>
+      <p:sp>
+        <p:nvSpPr>
+          <p:cNvPr id="17" name="Shape 15"/>
+          <p:cNvSpPr/>
+          <p:nvPr/>
+        </p:nvSpPr>
+        <p:spPr>
+          <a:xfrm>
+            <a:off x="6943725" y="2736342"/>
+            <a:ext cx="2286000" cy="320040"/>
+          </a:xfrm>
+          <a:prstGeom prst="roundRect">
+            <a:avLst>
+              <a:gd name="adj" fmla="val 11429"/>
+            </a:avLst>
+          </a:prstGeom>
+          <a:solidFill>
+            <a:srgbClr val="161B22"/>
+          </a:solidFill>
+          <a:ln w="6350">
+            <a:solidFill>
+              <a:srgbClr val="F85149"/>
+            </a:solidFill>
+            <a:prstDash val="dash"/>
+          </a:ln>
+        </p:spPr>
+        <p:txBody>
+          <a:bodyPr/>
+          <a:lstStyle/>
+          <a:p>
+            <a:endParaRPr lang="en-GB"/>
+          </a:p>
+        </p:txBody>
+      </p:sp>
+      <p:sp>
+        <p:nvSpPr>
+          <p:cNvPr id="18" name="Text 16"/>
+          <p:cNvSpPr/>
+          <p:nvPr/>
+        </p:nvSpPr>
+        <p:spPr>
+          <a:xfrm>
+            <a:off x="6943725" y="2736342"/>
+            <a:ext cx="2286000" cy="320040"/>
+          </a:xfrm>
+          <a:prstGeom prst="rect">
+            <a:avLst/>
+          </a:prstGeom>
+          <a:noFill/>
+          <a:ln/>
+        </p:spPr>
+        <p:txBody>
+          <a:bodyPr wrap="square" rtlCol="0" anchor="ctr"/>
+          <a:lstStyle/>
+          <a:p>
+            <a:pPr marL="0" indent="0" algn="ctr">
+              <a:buNone/>
+            </a:pPr>
+            <a:r>
+              <a:rPr lang="en-US" sz="1000" dirty="0">
+                <a:solidFill>
+                  <a:srgbClr val="F85149"/>
+                </a:solidFill>
+                <a:latin typeface="Consolas" pitchFamily="34" charset="0"/>
+                <a:ea typeface="Consolas" pitchFamily="34" charset="-122"/>
+                <a:cs typeface="Consolas" pitchFamily="34" charset="-120"/>
+              </a:rPr>
+              <a:t>private example</a:t>
+            </a:r>
+            <a:endParaRPr lang="en-US" sz="1000" dirty="0"/>
+          </a:p>
+        </p:txBody>
+      </p:sp>
+      <p:sp>
+        <p:nvSpPr>
+          <p:cNvPr id="19" name="Text 17"/>
+          <p:cNvSpPr/>
+          <p:nvPr/>
+        </p:nvSpPr>
+        <p:spPr>
+          <a:xfrm>
+            <a:off x="1280160" y="3260979"/>
+            <a:ext cx="3840480" cy="320040"/>
+          </a:xfrm>
+          <a:prstGeom prst="rect">
+            <a:avLst/>
+          </a:prstGeom>
+          <a:noFill/>
+          <a:ln/>
+        </p:spPr>
+        <p:txBody>
+          <a:bodyPr wrap="square" rtlCol="0" anchor="ctr"/>
+          <a:lstStyle/>
+          <a:p>
+            <a:pPr marL="0" indent="0">
+              <a:buNone/>
+            </a:pPr>
+            <a:r>
+              <a:rPr lang="en-US" sz="1200" b="1" dirty="0">
+                <a:solidFill>
+                  <a:srgbClr val="58A6FF"/>
                 </a:solidFill>
                 <a:latin typeface="Segoe UI" pitchFamily="34" charset="0"/>
                 <a:ea typeface="Segoe UI" pitchFamily="34" charset="-122"/>
                 <a:cs typeface="Segoe UI" pitchFamily="34" charset="-120"/>
               </a:rPr>
-              <a:t>Internal Docs</a:t>
-            </a:r>
-            <a:endParaRPr lang="en-US" sz="1100" dirty="0"/>
-          </a:p>
-        </p:txBody>
-      </p:sp>
-      <p:sp>
-        <p:nvSpPr>
-          <p:cNvPr id="9" name="Text 7"/>
-          <p:cNvSpPr/>
-          <p:nvPr/>
-        </p:nvSpPr>
-        <p:spPr>
-          <a:xfrm>
-            <a:off x="2766974" y="1645920"/>
-            <a:ext cx="274320" cy="502920"/>
-          </a:xfrm>
-          <a:prstGeom prst="rect">
-            <a:avLst/>
-          </a:prstGeom>
-          <a:noFill/>
-          <a:ln/>
-        </p:spPr>
-        <p:txBody>
-          <a:bodyPr wrap="square" rtlCol="0" anchor="ctr"/>
-          <a:lstStyle/>
-          <a:p>
-            <a:pPr marL="0" indent="0" algn="ctr">
-              <a:buNone/>
-            </a:pPr>
-            <a:r>
-              <a:rPr lang="en-US" sz="1600" dirty="0">
-                <a:solidFill>
-                  <a:srgbClr val="D29922"/>
-                </a:solidFill>
-                <a:latin typeface="Segoe UI" pitchFamily="34" charset="0"/>
-                <a:ea typeface="Segoe UI" pitchFamily="34" charset="-122"/>
-                <a:cs typeface="Segoe UI" pitchFamily="34" charset="-120"/>
-              </a:rPr>
-              <a:t>→</a:t>
-            </a:r>
-            <a:endParaRPr lang="en-US" sz="1600" dirty="0"/>
-          </a:p>
-        </p:txBody>
-      </p:sp>
-      <p:sp>
-        <p:nvSpPr>
-          <p:cNvPr id="10" name="Shape 8"/>
-          <p:cNvSpPr/>
-          <p:nvPr/>
-        </p:nvSpPr>
-        <p:spPr>
-          <a:xfrm>
-            <a:off x="3041294" y="1645920"/>
-            <a:ext cx="1852574" cy="502920"/>
-          </a:xfrm>
-          <a:prstGeom prst="roundRect">
-            <a:avLst>
-              <a:gd name="adj" fmla="val 10909"/>
-            </a:avLst>
-          </a:prstGeom>
-          <a:solidFill>
-            <a:srgbClr val="161B22"/>
-          </a:solidFill>
-          <a:ln w="9525">
-            <a:solidFill>
-              <a:srgbClr val="30363D"/>
-            </a:solidFill>
-            <a:prstDash val="solid"/>
-          </a:ln>
-        </p:spPr>
-        <p:txBody>
-          <a:bodyPr/>
-          <a:lstStyle/>
-          <a:p>
-            <a:endParaRPr lang="en-GB"/>
-          </a:p>
-        </p:txBody>
-      </p:sp>
-      <p:sp>
-        <p:nvSpPr>
-          <p:cNvPr id="11" name="Text 9"/>
-          <p:cNvSpPr/>
-          <p:nvPr/>
-        </p:nvSpPr>
-        <p:spPr>
-          <a:xfrm>
-            <a:off x="3041294" y="1645920"/>
-            <a:ext cx="1852574" cy="502920"/>
-          </a:xfrm>
-          <a:prstGeom prst="rect">
-            <a:avLst/>
-          </a:prstGeom>
-          <a:noFill/>
-          <a:ln/>
-        </p:spPr>
-        <p:txBody>
-          <a:bodyPr wrap="square" rtlCol="0" anchor="ctr"/>
-          <a:lstStyle/>
-          <a:p>
-            <a:pPr marL="0" indent="0" algn="ctr">
-              <a:buNone/>
-            </a:pPr>
-            <a:r>
-              <a:rPr lang="en-US" sz="1100" b="1" dirty="0">
-                <a:solidFill>
-                  <a:srgbClr val="E6EDF3"/>
-                </a:solidFill>
-                <a:latin typeface="Segoe UI" pitchFamily="34" charset="0"/>
-                <a:ea typeface="Segoe UI" pitchFamily="34" charset="-122"/>
-                <a:cs typeface="Segoe UI" pitchFamily="34" charset="-120"/>
-              </a:rPr>
-              <a:t>Classification</a:t>
-            </a:r>
-            <a:endParaRPr lang="en-US" sz="1100" dirty="0"/>
-          </a:p>
-        </p:txBody>
-      </p:sp>
-      <p:sp>
-        <p:nvSpPr>
-          <p:cNvPr id="12" name="Text 10"/>
-          <p:cNvSpPr/>
-          <p:nvPr/>
-        </p:nvSpPr>
-        <p:spPr>
-          <a:xfrm>
-            <a:off x="4893869" y="1645920"/>
-            <a:ext cx="274320" cy="502920"/>
-          </a:xfrm>
-          <a:prstGeom prst="rect">
-            <a:avLst/>
-          </a:prstGeom>
-          <a:noFill/>
-          <a:ln/>
-        </p:spPr>
-        <p:txBody>
-          <a:bodyPr wrap="square" rtlCol="0" anchor="ctr"/>
-          <a:lstStyle/>
-          <a:p>
-            <a:pPr marL="0" indent="0" algn="ctr">
-              <a:buNone/>
-            </a:pPr>
-            <a:r>
-              <a:rPr lang="en-US" sz="1600" dirty="0">
-                <a:solidFill>
-                  <a:srgbClr val="D29922"/>
-                </a:solidFill>
-                <a:latin typeface="Segoe UI" pitchFamily="34" charset="0"/>
-                <a:ea typeface="Segoe UI" pitchFamily="34" charset="-122"/>
-                <a:cs typeface="Segoe UI" pitchFamily="34" charset="-120"/>
-              </a:rPr>
-              <a:t>→</a:t>
-            </a:r>
-            <a:endParaRPr lang="en-US" sz="1600" dirty="0"/>
-          </a:p>
-        </p:txBody>
-      </p:sp>
-      <p:sp>
-        <p:nvSpPr>
-          <p:cNvPr id="13" name="Shape 11"/>
-          <p:cNvSpPr/>
-          <p:nvPr/>
-        </p:nvSpPr>
-        <p:spPr>
-          <a:xfrm>
-            <a:off x="5168189" y="1645920"/>
-            <a:ext cx="1852574" cy="502920"/>
-          </a:xfrm>
-          <a:prstGeom prst="roundRect">
-            <a:avLst>
-              <a:gd name="adj" fmla="val 10909"/>
-            </a:avLst>
-          </a:prstGeom>
-          <a:solidFill>
-            <a:srgbClr val="161B22"/>
-          </a:solidFill>
-          <a:ln w="9525">
-            <a:solidFill>
-              <a:srgbClr val="30363D"/>
-            </a:solidFill>
-            <a:prstDash val="solid"/>
-          </a:ln>
-        </p:spPr>
-        <p:txBody>
-          <a:bodyPr/>
-          <a:lstStyle/>
-          <a:p>
-            <a:endParaRPr lang="en-GB"/>
-          </a:p>
-        </p:txBody>
-      </p:sp>
-      <p:sp>
-        <p:nvSpPr>
-          <p:cNvPr id="14" name="Text 12"/>
-          <p:cNvSpPr/>
-          <p:nvPr/>
-        </p:nvSpPr>
-        <p:spPr>
-          <a:xfrm>
-            <a:off x="5168189" y="1645920"/>
-            <a:ext cx="1852574" cy="502920"/>
-          </a:xfrm>
-          <a:prstGeom prst="rect">
-            <a:avLst/>
-          </a:prstGeom>
-          <a:noFill/>
-          <a:ln/>
-        </p:spPr>
-        <p:txBody>
-          <a:bodyPr wrap="square" rtlCol="0" anchor="ctr"/>
-          <a:lstStyle/>
-          <a:p>
-            <a:pPr marL="0" indent="0" algn="ctr">
-              <a:buNone/>
-            </a:pPr>
-            <a:r>
-              <a:rPr lang="en-US" sz="1100" b="1" dirty="0">
-                <a:solidFill>
-                  <a:srgbClr val="E6EDF3"/>
-                </a:solidFill>
-                <a:latin typeface="Segoe UI" pitchFamily="34" charset="0"/>
-                <a:ea typeface="Segoe UI" pitchFamily="34" charset="-122"/>
-                <a:cs typeface="Segoe UI" pitchFamily="34" charset="-120"/>
-              </a:rPr>
-              <a:t>Redaction</a:t>
-            </a:r>
-            <a:endParaRPr lang="en-US" sz="1100" dirty="0"/>
-          </a:p>
-        </p:txBody>
-      </p:sp>
-      <p:sp>
-        <p:nvSpPr>
-          <p:cNvPr id="15" name="Text 13"/>
-          <p:cNvSpPr/>
-          <p:nvPr/>
-        </p:nvSpPr>
-        <p:spPr>
-          <a:xfrm>
-            <a:off x="7020763" y="1645920"/>
-            <a:ext cx="274320" cy="502920"/>
-          </a:xfrm>
-          <a:prstGeom prst="rect">
-            <a:avLst/>
-          </a:prstGeom>
-          <a:noFill/>
-          <a:ln/>
-        </p:spPr>
-        <p:txBody>
-          <a:bodyPr wrap="square" rtlCol="0" anchor="ctr"/>
-          <a:lstStyle/>
-          <a:p>
-            <a:pPr marL="0" indent="0" algn="ctr">
-              <a:buNone/>
-            </a:pPr>
-            <a:r>
-              <a:rPr lang="en-US" sz="1600" dirty="0">
-                <a:solidFill>
-                  <a:srgbClr val="D29922"/>
-                </a:solidFill>
-                <a:latin typeface="Segoe UI" pitchFamily="34" charset="0"/>
-                <a:ea typeface="Segoe UI" pitchFamily="34" charset="-122"/>
-                <a:cs typeface="Segoe UI" pitchFamily="34" charset="-120"/>
-              </a:rPr>
-              <a:t>→</a:t>
-            </a:r>
-            <a:endParaRPr lang="en-US" sz="1600" dirty="0"/>
-          </a:p>
-        </p:txBody>
-      </p:sp>
-      <p:sp>
-        <p:nvSpPr>
-          <p:cNvPr id="16" name="Shape 14"/>
-          <p:cNvSpPr/>
-          <p:nvPr/>
-        </p:nvSpPr>
-        <p:spPr>
-          <a:xfrm>
-            <a:off x="7295083" y="1645920"/>
-            <a:ext cx="1852574" cy="502920"/>
-          </a:xfrm>
-          <a:prstGeom prst="roundRect">
-            <a:avLst>
-              <a:gd name="adj" fmla="val 10909"/>
-            </a:avLst>
-          </a:prstGeom>
-          <a:solidFill>
-            <a:srgbClr val="161B22"/>
-          </a:solidFill>
-          <a:ln w="9525">
-            <a:solidFill>
-              <a:srgbClr val="30363D"/>
-            </a:solidFill>
-            <a:prstDash val="solid"/>
-          </a:ln>
-        </p:spPr>
-        <p:txBody>
-          <a:bodyPr/>
-          <a:lstStyle/>
-          <a:p>
-            <a:endParaRPr lang="en-GB"/>
-          </a:p>
-        </p:txBody>
-      </p:sp>
-      <p:sp>
-        <p:nvSpPr>
-          <p:cNvPr id="17" name="Text 15"/>
-          <p:cNvSpPr/>
-          <p:nvPr/>
-        </p:nvSpPr>
-        <p:spPr>
-          <a:xfrm>
-            <a:off x="7295083" y="1645920"/>
-            <a:ext cx="1852574" cy="502920"/>
-          </a:xfrm>
-          <a:prstGeom prst="rect">
-            <a:avLst/>
-          </a:prstGeom>
-          <a:noFill/>
-          <a:ln/>
-        </p:spPr>
-        <p:txBody>
-          <a:bodyPr wrap="square" rtlCol="0" anchor="ctr"/>
-          <a:lstStyle/>
-          <a:p>
-            <a:pPr marL="0" indent="0" algn="ctr">
-              <a:buNone/>
-            </a:pPr>
-            <a:r>
-              <a:rPr lang="en-US" sz="1100" b="1" dirty="0">
-                <a:solidFill>
-                  <a:srgbClr val="E6EDF3"/>
-                </a:solidFill>
-                <a:latin typeface="Segoe UI" pitchFamily="34" charset="0"/>
-                <a:ea typeface="Segoe UI" pitchFamily="34" charset="-122"/>
-                <a:cs typeface="Segoe UI" pitchFamily="34" charset="-120"/>
-              </a:rPr>
-              <a:t>Training Pipeline</a:t>
-            </a:r>
-            <a:endParaRPr lang="en-US" sz="1100" dirty="0"/>
-          </a:p>
-        </p:txBody>
-      </p:sp>
-      <p:sp>
-        <p:nvSpPr>
-          <p:cNvPr id="18" name="Text 16"/>
-          <p:cNvSpPr/>
-          <p:nvPr/>
-        </p:nvSpPr>
-        <p:spPr>
-          <a:xfrm>
-            <a:off x="9147658" y="1645920"/>
-            <a:ext cx="274320" cy="502920"/>
-          </a:xfrm>
-          <a:prstGeom prst="rect">
-            <a:avLst/>
-          </a:prstGeom>
-          <a:noFill/>
-          <a:ln/>
-        </p:spPr>
-        <p:txBody>
-          <a:bodyPr wrap="square" rtlCol="0" anchor="ctr"/>
-          <a:lstStyle/>
-          <a:p>
-            <a:pPr marL="0" indent="0" algn="ctr">
-              <a:buNone/>
-            </a:pPr>
-            <a:r>
-              <a:rPr lang="en-US" sz="1600" dirty="0">
-                <a:solidFill>
-                  <a:srgbClr val="D29922"/>
-                </a:solidFill>
-                <a:latin typeface="Segoe UI" pitchFamily="34" charset="0"/>
-                <a:ea typeface="Segoe UI" pitchFamily="34" charset="-122"/>
-                <a:cs typeface="Segoe UI" pitchFamily="34" charset="-120"/>
-              </a:rPr>
-              <a:t>→</a:t>
-            </a:r>
-            <a:endParaRPr lang="en-US" sz="1600" dirty="0"/>
-          </a:p>
-        </p:txBody>
-      </p:sp>
-      <p:sp>
-        <p:nvSpPr>
-          <p:cNvPr id="19" name="Shape 17"/>
-          <p:cNvSpPr/>
-          <p:nvPr/>
-        </p:nvSpPr>
-        <p:spPr>
-          <a:xfrm>
-            <a:off x="9421978" y="1645920"/>
-            <a:ext cx="1852574" cy="502920"/>
-          </a:xfrm>
-          <a:prstGeom prst="roundRect">
-            <a:avLst>
-              <a:gd name="adj" fmla="val 10909"/>
-            </a:avLst>
-          </a:prstGeom>
-          <a:solidFill>
-            <a:srgbClr val="161B22"/>
-          </a:solidFill>
-          <a:ln w="9525">
-            <a:solidFill>
-              <a:srgbClr val="30363D"/>
-            </a:solidFill>
-            <a:prstDash val="solid"/>
-          </a:ln>
-        </p:spPr>
-        <p:txBody>
-          <a:bodyPr/>
-          <a:lstStyle/>
-          <a:p>
-            <a:endParaRPr lang="en-GB"/>
+              <a:t>Extraction tests defenders should know</a:t>
+            </a:r>
+            <a:endParaRPr lang="en-US" sz="1200" dirty="0"/>
           </a:p>
         </p:txBody>
       </p:sp>
@@ -41209,47 +41613,8 @@
         </p:nvSpPr>
         <p:spPr>
           <a:xfrm>
-            <a:off x="9421978" y="1645920"/>
-            <a:ext cx="1852574" cy="502920"/>
-          </a:xfrm>
-          <a:prstGeom prst="rect">
-            <a:avLst/>
-          </a:prstGeom>
-          <a:noFill/>
-          <a:ln/>
-        </p:spPr>
-        <p:txBody>
-          <a:bodyPr wrap="square" rtlCol="0" anchor="ctr"/>
-          <a:lstStyle/>
-          <a:p>
-            <a:pPr marL="0" indent="0" algn="ctr">
-              <a:buNone/>
-            </a:pPr>
-            <a:r>
-              <a:rPr lang="en-US" sz="1100" b="1" dirty="0">
-                <a:solidFill>
-                  <a:srgbClr val="E6EDF3"/>
-                </a:solidFill>
-                <a:latin typeface="Segoe UI" pitchFamily="34" charset="0"/>
-                <a:ea typeface="Segoe UI" pitchFamily="34" charset="-122"/>
-                <a:cs typeface="Segoe UI" pitchFamily="34" charset="-120"/>
-              </a:rPr>
-              <a:t>Model Behavior</a:t>
-            </a:r>
-            <a:endParaRPr lang="en-US" sz="1100" dirty="0"/>
-          </a:p>
-        </p:txBody>
-      </p:sp>
-      <p:sp>
-        <p:nvSpPr>
-          <p:cNvPr id="21" name="Text 19"/>
-          <p:cNvSpPr/>
-          <p:nvPr/>
-        </p:nvSpPr>
-        <p:spPr>
-          <a:xfrm>
-            <a:off x="914400" y="3295650"/>
-            <a:ext cx="10360152" cy="2007870"/>
+            <a:off x="1280160" y="3559302"/>
+            <a:ext cx="3840480" cy="1933956"/>
           </a:xfrm>
           <a:prstGeom prst="rect">
             <a:avLst/>
@@ -41272,7 +41637,7 @@
               <a:buChar char="•"/>
             </a:pPr>
             <a:r>
-              <a:rPr lang="en-US" sz="1300" dirty="0">
+              <a:rPr lang="en-US" sz="1200" dirty="0">
                 <a:solidFill>
                   <a:srgbClr val="E6EDF3"/>
                 </a:solidFill>
@@ -41280,9 +41645,9 @@
                 <a:ea typeface="Segoe UI" pitchFamily="34" charset="-122"/>
                 <a:cs typeface="Segoe UI" pitchFamily="34" charset="-120"/>
               </a:rPr>
-              <a:t>Training on internal data is a data-placement decision, not just a quality decision</a:t>
-            </a:r>
-            <a:endParaRPr lang="en-US" sz="1300" dirty="0"/>
+              <a:t>Repetition / continuation</a:t>
+            </a:r>
+            <a:endParaRPr lang="en-US" sz="1200" dirty="0"/>
           </a:p>
           <a:p>
             <a:pPr marL="342900" indent="-342900">
@@ -41296,7 +41661,7 @@
               <a:buChar char="•"/>
             </a:pPr>
             <a:r>
-              <a:rPr lang="en-US" sz="1300" dirty="0">
+              <a:rPr lang="en-US" sz="1200" dirty="0">
                 <a:solidFill>
                   <a:srgbClr val="E6EDF3"/>
                 </a:solidFill>
@@ -41304,9 +41669,9 @@
                 <a:ea typeface="Segoe UI" pitchFamily="34" charset="-122"/>
                 <a:cs typeface="Segoe UI" pitchFamily="34" charset="-120"/>
               </a:rPr>
-              <a:t>Model weights become a fuzzy, hard-to-query, hard-to-delete storage layer</a:t>
-            </a:r>
-            <a:endParaRPr lang="en-US" sz="1300" dirty="0"/>
+              <a:t>Canary strings</a:t>
+            </a:r>
+            <a:endParaRPr lang="en-US" sz="1200" dirty="0"/>
           </a:p>
           <a:p>
             <a:pPr marL="342900" indent="-342900">
@@ -41320,7 +41685,7 @@
               <a:buChar char="•"/>
             </a:pPr>
             <a:r>
-              <a:rPr lang="en-US" sz="1300" dirty="0">
+              <a:rPr lang="en-US" sz="1200" dirty="0">
                 <a:solidFill>
                   <a:srgbClr val="E6EDF3"/>
                 </a:solidFill>
@@ -41328,21 +41693,93 @@
                 <a:ea typeface="Segoe UI" pitchFamily="34" charset="-122"/>
                 <a:cs typeface="Segoe UI" pitchFamily="34" charset="-120"/>
               </a:rPr>
-              <a:t>Cannot apply database ACLs to model weights</a:t>
-            </a:r>
-            <a:endParaRPr lang="en-US" sz="1300" dirty="0"/>
-          </a:p>
-        </p:txBody>
-      </p:sp>
-      <p:sp>
-        <p:nvSpPr>
-          <p:cNvPr id="22" name="Shape 20"/>
-          <p:cNvSpPr/>
-          <p:nvPr/>
-        </p:nvSpPr>
-        <p:spPr>
-          <a:xfrm>
-            <a:off x="731520" y="5669280"/>
+              <a:t>Membership inference</a:t>
+            </a:r>
+            <a:endParaRPr lang="en-US" sz="1200" dirty="0"/>
+          </a:p>
+          <a:p>
+            <a:pPr marL="342900" indent="-342900">
+              <a:lnSpc>
+                <a:spcPct val="135000"/>
+              </a:lnSpc>
+              <a:spcBef>
+                <a:spcPts val="400"/>
+              </a:spcBef>
+              <a:buSzPct val="100000"/>
+              <a:buChar char="•"/>
+            </a:pPr>
+            <a:r>
+              <a:rPr lang="en-US" sz="1200" dirty="0">
+                <a:solidFill>
+                  <a:srgbClr val="E6EDF3"/>
+                </a:solidFill>
+                <a:latin typeface="Segoe UI" pitchFamily="34" charset="0"/>
+                <a:ea typeface="Segoe UI" pitchFamily="34" charset="-122"/>
+                <a:cs typeface="Segoe UI" pitchFamily="34" charset="-120"/>
+              </a:rPr>
+              <a:t>Inversion / reconstruction</a:t>
+            </a:r>
+            <a:endParaRPr lang="en-US" sz="1200" dirty="0"/>
+          </a:p>
+          <a:p>
+            <a:pPr marL="342900" indent="-342900">
+              <a:lnSpc>
+                <a:spcPct val="135000"/>
+              </a:lnSpc>
+              <a:spcBef>
+                <a:spcPts val="400"/>
+              </a:spcBef>
+              <a:buSzPct val="100000"/>
+              <a:buChar char="•"/>
+            </a:pPr>
+            <a:r>
+              <a:rPr lang="en-US" sz="1200" dirty="0">
+                <a:solidFill>
+                  <a:srgbClr val="E6EDF3"/>
+                </a:solidFill>
+                <a:latin typeface="Segoe UI" pitchFamily="34" charset="0"/>
+                <a:ea typeface="Segoe UI" pitchFamily="34" charset="-122"/>
+                <a:cs typeface="Segoe UI" pitchFamily="34" charset="-120"/>
+              </a:rPr>
+              <a:t>Targeted prefix probing</a:t>
+            </a:r>
+            <a:endParaRPr lang="en-US" sz="1200" dirty="0"/>
+          </a:p>
+          <a:p>
+            <a:pPr marL="342900" indent="-342900">
+              <a:lnSpc>
+                <a:spcPct val="135000"/>
+              </a:lnSpc>
+              <a:spcBef>
+                <a:spcPts val="400"/>
+              </a:spcBef>
+              <a:buSzPct val="100000"/>
+              <a:buChar char="•"/>
+            </a:pPr>
+            <a:r>
+              <a:rPr lang="en-US" sz="1200" dirty="0">
+                <a:solidFill>
+                  <a:srgbClr val="E6EDF3"/>
+                </a:solidFill>
+                <a:latin typeface="Segoe UI" pitchFamily="34" charset="0"/>
+                <a:ea typeface="Segoe UI" pitchFamily="34" charset="-122"/>
+                <a:cs typeface="Segoe UI" pitchFamily="34" charset="-120"/>
+              </a:rPr>
+              <a:t>Fine-tune leakage testing</a:t>
+            </a:r>
+            <a:endParaRPr lang="en-US" sz="1200" dirty="0"/>
+          </a:p>
+        </p:txBody>
+      </p:sp>
+      <p:sp>
+        <p:nvSpPr>
+          <p:cNvPr id="21" name="Shape 19"/>
+          <p:cNvSpPr/>
+          <p:nvPr/>
+        </p:nvSpPr>
+        <p:spPr>
+          <a:xfrm>
+            <a:off x="731520" y="5394960"/>
             <a:ext cx="54864" cy="411480"/>
           </a:xfrm>
           <a:prstGeom prst="rect">
@@ -41363,13 +41800,13 @@
       </p:sp>
       <p:sp>
         <p:nvSpPr>
-          <p:cNvPr id="23" name="Text 21"/>
-          <p:cNvSpPr/>
-          <p:nvPr/>
-        </p:nvSpPr>
-        <p:spPr>
-          <a:xfrm>
-            <a:off x="960120" y="5669280"/>
+          <p:cNvPr id="22" name="Text 20"/>
+          <p:cNvSpPr/>
+          <p:nvPr/>
+        </p:nvSpPr>
+        <p:spPr>
+          <a:xfrm>
+            <a:off x="960120" y="5394960"/>
             <a:ext cx="10497312" cy="411480"/>
           </a:xfrm>
           <a:prstGeom prst="rect">
@@ -41394,7 +41831,7 @@
                 <a:ea typeface="Segoe UI" pitchFamily="34" charset="-122"/>
                 <a:cs typeface="Segoe UI" pitchFamily="34" charset="-120"/>
               </a:rPr>
-              <a:t>Training on internal data can turn model behavior into a sensitive-data artifact.</a:t>
+              <a:t>Rare or sensitive fragments may be recoverable — teams need repeatable tests before release.</a:t>
             </a:r>
             <a:endParaRPr lang="en-US" sz="1400" dirty="0"/>
           </a:p>
@@ -41402,60 +41839,14 @@
       </p:sp>
       <p:sp>
         <p:nvSpPr>
-          <p:cNvPr id="25" name="Shape 20">
-            <a:extLst>
-              <a:ext uri="{FF2B5EF4-FFF2-40B4-BE49-F238E27FC236}">
-                <a16:creationId xmlns:a16="http://schemas.microsoft.com/office/drawing/2014/main" id="{8C8614B8-A6C5-130E-EFB6-1459706AB5B2}"/>
-              </a:ext>
-            </a:extLst>
-          </p:cNvPr>
-          <p:cNvSpPr/>
-          <p:nvPr/>
-        </p:nvSpPr>
-        <p:spPr>
-          <a:xfrm>
-            <a:off x="1715414" y="2607945"/>
-            <a:ext cx="2103120" cy="365760"/>
-          </a:xfrm>
-          <a:prstGeom prst="roundRect">
-            <a:avLst>
-              <a:gd name="adj" fmla="val 15000"/>
-            </a:avLst>
-          </a:prstGeom>
-          <a:solidFill>
-            <a:srgbClr val="161B22"/>
-          </a:solidFill>
-          <a:ln w="9525">
-            <a:solidFill>
-              <a:srgbClr val="D29922"/>
-            </a:solidFill>
-            <a:prstDash val="dash"/>
-          </a:ln>
-        </p:spPr>
-        <p:txBody>
-          <a:bodyPr/>
-          <a:lstStyle/>
-          <a:p>
-            <a:endParaRPr lang="en-GB"/>
-          </a:p>
-        </p:txBody>
-      </p:sp>
-      <p:sp>
-        <p:nvSpPr>
-          <p:cNvPr id="26" name="Text 21">
-            <a:extLst>
-              <a:ext uri="{FF2B5EF4-FFF2-40B4-BE49-F238E27FC236}">
-                <a16:creationId xmlns:a16="http://schemas.microsoft.com/office/drawing/2014/main" id="{5D0495CF-218D-F779-8FB1-C276A8B81420}"/>
-              </a:ext>
-            </a:extLst>
-          </p:cNvPr>
-          <p:cNvSpPr/>
-          <p:nvPr/>
-        </p:nvSpPr>
-        <p:spPr>
-          <a:xfrm>
-            <a:off x="1715414" y="2607945"/>
-            <a:ext cx="2103120" cy="365760"/>
+          <p:cNvPr id="23" name="Text 21"/>
+          <p:cNvSpPr/>
+          <p:nvPr/>
+        </p:nvSpPr>
+        <p:spPr>
+          <a:xfrm>
+            <a:off x="8686800" y="6263640"/>
+            <a:ext cx="2926080" cy="228600"/>
           </a:xfrm>
           <a:prstGeom prst="rect">
             <a:avLst/>
@@ -41467,273 +41858,21 @@
           <a:bodyPr wrap="square" rtlCol="0" anchor="ctr"/>
           <a:lstStyle/>
           <a:p>
-            <a:pPr marL="0" indent="0" algn="ctr">
-              <a:buNone/>
-            </a:pPr>
-            <a:r>
-              <a:rPr lang="en-US" sz="1000" dirty="0">
-                <a:solidFill>
-                  <a:srgbClr val="D29922"/>
-                </a:solidFill>
-                <a:latin typeface="Segoe UI" pitchFamily="34" charset="0"/>
-                <a:ea typeface="Segoe UI" pitchFamily="34" charset="-122"/>
-                <a:cs typeface="Segoe UI" pitchFamily="34" charset="-120"/>
-              </a:rPr>
-              <a:t>Track dataset lineage</a:t>
-            </a:r>
-            <a:endParaRPr lang="en-US" sz="1000" dirty="0"/>
-          </a:p>
-        </p:txBody>
-      </p:sp>
-      <p:sp>
-        <p:nvSpPr>
-          <p:cNvPr id="27" name="Shape 20">
-            <a:extLst>
-              <a:ext uri="{FF2B5EF4-FFF2-40B4-BE49-F238E27FC236}">
-                <a16:creationId xmlns:a16="http://schemas.microsoft.com/office/drawing/2014/main" id="{2F69BF65-4778-B5A9-003A-EE5D21675AC6}"/>
-              </a:ext>
-            </a:extLst>
-          </p:cNvPr>
-          <p:cNvSpPr/>
-          <p:nvPr/>
-        </p:nvSpPr>
-        <p:spPr>
-          <a:xfrm>
-            <a:off x="3992880" y="2601849"/>
-            <a:ext cx="2103120" cy="365760"/>
-          </a:xfrm>
-          <a:prstGeom prst="roundRect">
-            <a:avLst>
-              <a:gd name="adj" fmla="val 15000"/>
-            </a:avLst>
-          </a:prstGeom>
-          <a:solidFill>
-            <a:srgbClr val="161B22"/>
-          </a:solidFill>
-          <a:ln w="9525">
-            <a:solidFill>
-              <a:srgbClr val="D29922"/>
-            </a:solidFill>
-            <a:prstDash val="dash"/>
-          </a:ln>
-        </p:spPr>
-        <p:txBody>
-          <a:bodyPr/>
-          <a:lstStyle/>
-          <a:p>
-            <a:endParaRPr lang="en-GB"/>
-          </a:p>
-        </p:txBody>
-      </p:sp>
-      <p:sp>
-        <p:nvSpPr>
-          <p:cNvPr id="28" name="Text 21">
-            <a:extLst>
-              <a:ext uri="{FF2B5EF4-FFF2-40B4-BE49-F238E27FC236}">
-                <a16:creationId xmlns:a16="http://schemas.microsoft.com/office/drawing/2014/main" id="{2661766B-7B2E-3890-6382-17B3A7220243}"/>
-              </a:ext>
-            </a:extLst>
-          </p:cNvPr>
-          <p:cNvSpPr/>
-          <p:nvPr/>
-        </p:nvSpPr>
-        <p:spPr>
-          <a:xfrm>
-            <a:off x="3992880" y="2601849"/>
-            <a:ext cx="2103120" cy="365760"/>
-          </a:xfrm>
-          <a:prstGeom prst="rect">
-            <a:avLst/>
-          </a:prstGeom>
-          <a:noFill/>
-          <a:ln/>
-        </p:spPr>
-        <p:txBody>
-          <a:bodyPr wrap="square" rtlCol="0" anchor="ctr"/>
-          <a:lstStyle/>
-          <a:p>
-            <a:pPr marL="0" indent="0" algn="ctr">
-              <a:buNone/>
-            </a:pPr>
-            <a:r>
-              <a:rPr lang="en-US" sz="1000" dirty="0">
-                <a:solidFill>
-                  <a:srgbClr val="D29922"/>
-                </a:solidFill>
-                <a:latin typeface="Segoe UI" pitchFamily="34" charset="0"/>
-                <a:cs typeface="Segoe UI" pitchFamily="34" charset="-120"/>
-              </a:rPr>
-              <a:t>Test memorization before release</a:t>
-            </a:r>
-            <a:endParaRPr lang="en-US" sz="1000" dirty="0"/>
-          </a:p>
-        </p:txBody>
-      </p:sp>
-      <p:sp>
-        <p:nvSpPr>
-          <p:cNvPr id="29" name="Shape 20">
-            <a:extLst>
-              <a:ext uri="{FF2B5EF4-FFF2-40B4-BE49-F238E27FC236}">
-                <a16:creationId xmlns:a16="http://schemas.microsoft.com/office/drawing/2014/main" id="{E2FE3ED6-066F-F3B0-D29A-7EB3B8B8FD82}"/>
-              </a:ext>
-            </a:extLst>
-          </p:cNvPr>
-          <p:cNvSpPr/>
-          <p:nvPr/>
-        </p:nvSpPr>
-        <p:spPr>
-          <a:xfrm>
-            <a:off x="6270347" y="2594229"/>
-            <a:ext cx="2311677" cy="365760"/>
-          </a:xfrm>
-          <a:prstGeom prst="roundRect">
-            <a:avLst>
-              <a:gd name="adj" fmla="val 15000"/>
-            </a:avLst>
-          </a:prstGeom>
-          <a:solidFill>
-            <a:srgbClr val="161B22"/>
-          </a:solidFill>
-          <a:ln w="9525">
-            <a:solidFill>
-              <a:srgbClr val="D29922"/>
-            </a:solidFill>
-            <a:prstDash val="dash"/>
-          </a:ln>
-        </p:spPr>
-        <p:txBody>
-          <a:bodyPr/>
-          <a:lstStyle/>
-          <a:p>
-            <a:endParaRPr lang="en-GB"/>
-          </a:p>
-        </p:txBody>
-      </p:sp>
-      <p:sp>
-        <p:nvSpPr>
-          <p:cNvPr id="30" name="Text 21">
-            <a:extLst>
-              <a:ext uri="{FF2B5EF4-FFF2-40B4-BE49-F238E27FC236}">
-                <a16:creationId xmlns:a16="http://schemas.microsoft.com/office/drawing/2014/main" id="{9CBA17C0-D8DA-DC32-2CBD-06B31776D15C}"/>
-              </a:ext>
-            </a:extLst>
-          </p:cNvPr>
-          <p:cNvSpPr/>
-          <p:nvPr/>
-        </p:nvSpPr>
-        <p:spPr>
-          <a:xfrm>
-            <a:off x="6270347" y="2594229"/>
-            <a:ext cx="2277465" cy="365760"/>
-          </a:xfrm>
-          <a:prstGeom prst="rect">
-            <a:avLst/>
-          </a:prstGeom>
-          <a:noFill/>
-          <a:ln/>
-        </p:spPr>
-        <p:txBody>
-          <a:bodyPr wrap="square" rtlCol="0" anchor="ctr"/>
-          <a:lstStyle/>
-          <a:p>
-            <a:pPr marL="0" indent="0" algn="ctr">
-              <a:buNone/>
-            </a:pPr>
-            <a:r>
-              <a:rPr lang="en-US" sz="1000" dirty="0">
-                <a:solidFill>
-                  <a:srgbClr val="D29922"/>
-                </a:solidFill>
-                <a:latin typeface="Segoe UI" pitchFamily="34" charset="0"/>
-                <a:cs typeface="Segoe UI" pitchFamily="34" charset="-120"/>
-              </a:rPr>
-              <a:t>Plan rollback and model retirement</a:t>
-            </a:r>
-            <a:endParaRPr lang="en-US" sz="1000" dirty="0"/>
-          </a:p>
-        </p:txBody>
-      </p:sp>
-      <p:sp>
-        <p:nvSpPr>
-          <p:cNvPr id="32" name="Shape 20">
-            <a:extLst>
-              <a:ext uri="{FF2B5EF4-FFF2-40B4-BE49-F238E27FC236}">
-                <a16:creationId xmlns:a16="http://schemas.microsoft.com/office/drawing/2014/main" id="{980FAC2D-F320-C89D-16FF-832127B22912}"/>
-              </a:ext>
-            </a:extLst>
-          </p:cNvPr>
-          <p:cNvSpPr/>
-          <p:nvPr/>
-        </p:nvSpPr>
-        <p:spPr>
-          <a:xfrm>
-            <a:off x="8756371" y="2586228"/>
-            <a:ext cx="2311677" cy="365760"/>
-          </a:xfrm>
-          <a:prstGeom prst="roundRect">
-            <a:avLst>
-              <a:gd name="adj" fmla="val 15000"/>
-            </a:avLst>
-          </a:prstGeom>
-          <a:solidFill>
-            <a:srgbClr val="161B22"/>
-          </a:solidFill>
-          <a:ln w="9525">
-            <a:solidFill>
-              <a:srgbClr val="D29922"/>
-            </a:solidFill>
-            <a:prstDash val="dash"/>
-          </a:ln>
-        </p:spPr>
-        <p:txBody>
-          <a:bodyPr/>
-          <a:lstStyle/>
-          <a:p>
-            <a:endParaRPr lang="en-GB"/>
-          </a:p>
-        </p:txBody>
-      </p:sp>
-      <p:sp>
-        <p:nvSpPr>
-          <p:cNvPr id="33" name="Text 21">
-            <a:extLst>
-              <a:ext uri="{FF2B5EF4-FFF2-40B4-BE49-F238E27FC236}">
-                <a16:creationId xmlns:a16="http://schemas.microsoft.com/office/drawing/2014/main" id="{1B17AB86-D4F0-A616-CAF5-8F91070D7C02}"/>
-              </a:ext>
-            </a:extLst>
-          </p:cNvPr>
-          <p:cNvSpPr/>
-          <p:nvPr/>
-        </p:nvSpPr>
-        <p:spPr>
-          <a:xfrm>
-            <a:off x="8756371" y="2586228"/>
-            <a:ext cx="2277465" cy="365760"/>
-          </a:xfrm>
-          <a:prstGeom prst="rect">
-            <a:avLst/>
-          </a:prstGeom>
-          <a:noFill/>
-          <a:ln/>
-        </p:spPr>
-        <p:txBody>
-          <a:bodyPr wrap="square" rtlCol="0" anchor="ctr"/>
-          <a:lstStyle/>
-          <a:p>
-            <a:pPr marL="0" indent="0" algn="ctr">
-              <a:buNone/>
-            </a:pPr>
-            <a:r>
-              <a:rPr lang="en-US" sz="1000" dirty="0">
-                <a:solidFill>
-                  <a:srgbClr val="D29922"/>
-                </a:solidFill>
-                <a:latin typeface="Segoe UI" pitchFamily="34" charset="0"/>
-                <a:cs typeface="Segoe UI" pitchFamily="34" charset="-120"/>
-              </a:rPr>
-              <a:t>Hard to enforce record permissions</a:t>
-            </a:r>
-            <a:endParaRPr lang="en-US" sz="1000" dirty="0"/>
+            <a:pPr marL="0" indent="0" algn="r">
+              <a:buNone/>
+            </a:pPr>
+            <a:r>
+              <a:rPr lang="en-US" sz="900" dirty="0">
+                <a:solidFill>
+                  <a:srgbClr val="8B949E"/>
+                </a:solidFill>
+                <a:latin typeface="Consolas" pitchFamily="34" charset="0"/>
+                <a:ea typeface="Consolas" pitchFamily="34" charset="-122"/>
+                <a:cs typeface="Consolas" pitchFamily="34" charset="-120"/>
+              </a:rPr>
+              <a:t>OWASP LLM02:2025 · arXiv:2311.17035</a:t>
+            </a:r>
+            <a:endParaRPr lang="en-US" sz="900" dirty="0"/>
           </a:p>
         </p:txBody>
       </p:sp>
